--- a/presentations/03-setup/03-setup-lecture.pptx
+++ b/presentations/03-setup/03-setup-lecture.pptx
@@ -36,9 +36,12 @@
     <p:sldId id="284" r:id="rId30"/>
     <p:sldId id="285" r:id="rId31"/>
     <p:sldId id="286" r:id="rId32"/>
+    <p:sldId id="287" r:id="rId33"/>
+    <p:sldId id="288" r:id="rId34"/>
+    <p:sldId id="289" r:id="rId35"/>
   </p:sldIdLst>
   <p:notesMasterIdLst>
-    <p:notesMasterId r:id="rId33"/>
+    <p:notesMasterId r:id="rId36"/>
   </p:notesMasterIdLst>
   <p:sldSz cx="12192000" cy="6858000"/>
   <p:notesSz cx="6858000" cy="12192000"/>
@@ -137,7 +140,7 @@
   <p:extLst>
     <p:ext uri="{521415D9-36F7-43E2-AB2F-B90AF26B5E84}">
       <p14:sectionLst xmlns:p14="http://schemas.microsoft.com/office/powerpoint/2010/main">
-        <p14:section name="Opening" id="{d0f1846a-8365-fe6d-d812-a26506b73760}">
+        <p14:section name="Opening" id="{510ede18-7360-2764-7b11-52381c7bb68d}">
           <p14:sldIdLst>
             <p14:sldId id="256"/>
             <p14:sldId id="257"/>
@@ -148,7 +151,7 @@
             <p14:sldId id="262"/>
           </p14:sldIdLst>
         </p14:section>
-        <p14:section name="ESP-IDF" id="{32b6b410-5b9e-3095-3864-d5aedc9ecbb7}">
+        <p14:section name="ESP-IDF" id="{bd736d2f-9a01-332e-3a2a-85d58721f928}">
           <p14:sldIdLst>
             <p14:sldId id="263"/>
             <p14:sldId id="264"/>
@@ -157,7 +160,7 @@
             <p14:sldId id="267"/>
           </p14:sldIdLst>
         </p14:section>
-        <p14:section name="Two targets, two directories" id="{769990f2-17e6-7c08-90cc-15d32c8a34ba}">
+        <p14:section name="Two targets, two directories" id="{04b5ef2e-edec-bf33-15b3-07de65c41371}">
           <p14:sldIdLst>
             <p14:sldId id="268"/>
             <p14:sldId id="269"/>
@@ -166,7 +169,7 @@
             <p14:sldId id="272"/>
           </p14:sldIdLst>
         </p14:section>
-        <p14:section name="The prg32 tool" id="{0d72d032-2845-acf8-7fbf-1ed46cdec452}">
+        <p14:section name="The prg32 tool" id="{993e13f6-1ad4-4592-169c-80501bac1369}">
           <p14:sldIdLst>
             <p14:sldId id="273"/>
             <p14:sldId id="274"/>
@@ -174,22 +177,25 @@
             <p14:sldId id="276"/>
             <p14:sldId id="277"/>
             <p14:sldId id="278"/>
+            <p14:sldId id="279"/>
+            <p14:sldId id="280"/>
           </p14:sldIdLst>
         </p14:section>
-        <p14:section name="Profiles and diagnosis" id="{74bffff4-cea8-3878-b6fa-cbe134d229a0}">
+        <p14:section name="Profiles and diagnosis" id="{e81a8375-a43e-01f0-edfd-ab09b402f815}">
           <p14:sldIdLst>
-            <p14:sldId id="279"/>
-            <p14:sldId id="280"/>
             <p14:sldId id="281"/>
             <p14:sldId id="282"/>
             <p14:sldId id="283"/>
             <p14:sldId id="284"/>
             <p14:sldId id="285"/>
+            <p14:sldId id="286"/>
+            <p14:sldId id="287"/>
+            <p14:sldId id="288"/>
           </p14:sldIdLst>
         </p14:section>
-        <p14:section name="Closing" id="{2d240722-9895-3d73-7e8b-1f54dc184b7a}">
+        <p14:section name="Closing" id="{f7bad59d-5b6d-acb3-b814-51655a13cc6a}">
           <p14:sldIdLst>
-            <p14:sldId id="286"/>
+            <p14:sldId id="289"/>
           </p14:sldIdLst>
         </p14:section>
       </p14:sectionLst>
@@ -1740,7 +1746,8 @@
           <a:p>
             <a:r>
               <a:rPr lang="en-US" dirty="0"/>
-              <a:t/>
+              <a:t>Captured from a real build.
+</a:t>
             </a:r>
             <a:endParaRPr lang="en-US" dirty="0"/>
           </a:p>
@@ -1828,7 +1835,7 @@
           <a:p>
             <a:r>
               <a:rPr lang="en-US" dirty="0"/>
-              <a:t/>
+              <a:t>From prg32/cartridge/build_cartridge.py.</a:t>
             </a:r>
             <a:endParaRPr lang="en-US" dirty="0"/>
           </a:p>
@@ -2092,7 +2099,7 @@
           <a:p>
             <a:r>
               <a:rPr lang="en-US" dirty="0"/>
-              <a:t>cartridge build assumes 64 KiB unless you pass --cart-ram-kib. esp32c6 upload asks the board.</a:t>
+              <a:t/>
             </a:r>
             <a:endParaRPr lang="en-US" dirty="0"/>
           </a:p>
@@ -2268,7 +2275,7 @@
           <a:p>
             <a:r>
               <a:rPr lang="en-US" dirty="0"/>
-              <a:t/>
+              <a:t>cartridge build assumes 64 KiB unless you pass --cart-ram-kib. esp32c6 upload asks the board.</a:t>
             </a:r>
             <a:endParaRPr lang="en-US" dirty="0"/>
           </a:p>
@@ -2356,7 +2363,7 @@
           <a:p>
             <a:r>
               <a:rPr lang="en-US" dirty="0"/>
-              <a:t/>
+              <a:t>Sizes from the build logs of the lab steps.</a:t>
             </a:r>
             <a:endParaRPr lang="en-US" dirty="0"/>
           </a:p>
@@ -2444,7 +2451,7 @@
           <a:p>
             <a:r>
               <a:rPr lang="en-US" dirty="0"/>
-              <a:t>Answer: B. QEMU has no Wi-Fi path; cartridges are written into its flash image.</a:t>
+              <a:t/>
             </a:r>
             <a:endParaRPr lang="en-US" dirty="0"/>
           </a:p>
@@ -2732,6 +2739,270 @@
             <a:fld id="{F7021451-1387-4CA6-816F-3879F97B5CBC}" type="slidenum">
               <a:rPr lang="en-US"/>
               <a:t>31</a:t>
+            </a:fld>
+            <a:endParaRPr lang="en-US"/>
+          </a:p>
+        </p:txBody>
+      </p:sp>
+    </p:spTree>
+    <p:extLst>
+      <p:ext uri="{BB962C8B-B14F-4D97-AF65-F5344CB8AC3E}">
+        <p14:creationId xmlns:p14="http://schemas.microsoft.com/office/powerpoint/2010/main" val="1024086991"/>
+      </p:ext>
+    </p:extLst>
+  </p:cSld>
+  <p:clrMapOvr>
+    <a:masterClrMapping/>
+  </p:clrMapOvr>
+</p:notes>
+</file>
+
+<file path=ppt/notesSlides/notesSlide32.xml><?xml version="1.0" encoding="utf-8"?>
+<p:notes xmlns:a="http://schemas.openxmlformats.org/drawingml/2006/main" xmlns:r="http://schemas.openxmlformats.org/officeDocument/2006/relationships" xmlns:p="http://schemas.openxmlformats.org/presentationml/2006/main">
+  <p:cSld>
+    <p:spTree>
+      <p:nvGrpSpPr>
+        <p:cNvPr id="1" name=""/>
+        <p:cNvGrpSpPr/>
+        <p:nvPr/>
+      </p:nvGrpSpPr>
+      <p:grpSpPr>
+        <a:xfrm>
+          <a:off x="0" y="0"/>
+          <a:ext cx="0" cy="0"/>
+          <a:chOff x="0" y="0"/>
+          <a:chExt cx="0" cy="0"/>
+        </a:xfrm>
+      </p:grpSpPr>
+      <p:sp>
+        <p:nvSpPr>
+          <p:cNvPr id="2" name="Slide Image Placeholder 1"/>
+          <p:cNvSpPr>
+            <a:spLocks noGrp="1" noRot="1" noChangeAspect="1"/>
+          </p:cNvSpPr>
+          <p:nvPr>
+            <p:ph type="sldImg"/>
+          </p:nvPr>
+        </p:nvSpPr>
+        <p:spPr/>
+      </p:sp>
+      <p:sp>
+        <p:nvSpPr>
+          <p:cNvPr id="3" name="Notes Placeholder 2"/>
+          <p:cNvSpPr>
+            <a:spLocks noGrp="1"/>
+          </p:cNvSpPr>
+          <p:nvPr>
+            <p:ph type="body" idx="1"/>
+          </p:nvPr>
+        </p:nvSpPr>
+        <p:spPr/>
+        <p:txBody>
+          <a:bodyPr/>
+          <a:lstStyle/>
+          <a:p>
+            <a:r>
+              <a:rPr lang="en-US" dirty="0"/>
+              <a:t>Answer: B. QEMU has no Wi-Fi path; cartridges are written into its flash image.</a:t>
+            </a:r>
+            <a:endParaRPr lang="en-US" dirty="0"/>
+          </a:p>
+        </p:txBody>
+      </p:sp>
+      <p:sp>
+        <p:nvSpPr>
+          <p:cNvPr id="4" name="Slide Number Placeholder 3"/>
+          <p:cNvSpPr>
+            <a:spLocks noGrp="1"/>
+          </p:cNvSpPr>
+          <p:nvPr>
+            <p:ph type="sldNum" sz="quarter" idx="10"/>
+          </p:nvPr>
+        </p:nvSpPr>
+        <p:spPr/>
+        <p:txBody>
+          <a:bodyPr/>
+          <a:lstStyle/>
+          <a:p>
+            <a:fld id="{F7021451-1387-4CA6-816F-3879F97B5CBC}" type="slidenum">
+              <a:rPr lang="en-US"/>
+              <a:t>32</a:t>
+            </a:fld>
+            <a:endParaRPr lang="en-US"/>
+          </a:p>
+        </p:txBody>
+      </p:sp>
+    </p:spTree>
+    <p:extLst>
+      <p:ext uri="{BB962C8B-B14F-4D97-AF65-F5344CB8AC3E}">
+        <p14:creationId xmlns:p14="http://schemas.microsoft.com/office/powerpoint/2010/main" val="1024086991"/>
+      </p:ext>
+    </p:extLst>
+  </p:cSld>
+  <p:clrMapOvr>
+    <a:masterClrMapping/>
+  </p:clrMapOvr>
+</p:notes>
+</file>
+
+<file path=ppt/notesSlides/notesSlide33.xml><?xml version="1.0" encoding="utf-8"?>
+<p:notes xmlns:a="http://schemas.openxmlformats.org/drawingml/2006/main" xmlns:r="http://schemas.openxmlformats.org/officeDocument/2006/relationships" xmlns:p="http://schemas.openxmlformats.org/presentationml/2006/main">
+  <p:cSld>
+    <p:spTree>
+      <p:nvGrpSpPr>
+        <p:cNvPr id="1" name=""/>
+        <p:cNvGrpSpPr/>
+        <p:nvPr/>
+      </p:nvGrpSpPr>
+      <p:grpSpPr>
+        <a:xfrm>
+          <a:off x="0" y="0"/>
+          <a:ext cx="0" cy="0"/>
+          <a:chOff x="0" y="0"/>
+          <a:chExt cx="0" cy="0"/>
+        </a:xfrm>
+      </p:grpSpPr>
+      <p:sp>
+        <p:nvSpPr>
+          <p:cNvPr id="2" name="Slide Image Placeholder 1"/>
+          <p:cNvSpPr>
+            <a:spLocks noGrp="1" noRot="1" noChangeAspect="1"/>
+          </p:cNvSpPr>
+          <p:nvPr>
+            <p:ph type="sldImg"/>
+          </p:nvPr>
+        </p:nvSpPr>
+        <p:spPr/>
+      </p:sp>
+      <p:sp>
+        <p:nvSpPr>
+          <p:cNvPr id="3" name="Notes Placeholder 2"/>
+          <p:cNvSpPr>
+            <a:spLocks noGrp="1"/>
+          </p:cNvSpPr>
+          <p:nvPr>
+            <p:ph type="body" idx="1"/>
+          </p:nvPr>
+        </p:nvSpPr>
+        <p:spPr/>
+        <p:txBody>
+          <a:bodyPr/>
+          <a:lstStyle/>
+          <a:p>
+            <a:r>
+              <a:rPr lang="en-US" dirty="0"/>
+              <a:t/>
+            </a:r>
+            <a:endParaRPr lang="en-US" dirty="0"/>
+          </a:p>
+        </p:txBody>
+      </p:sp>
+      <p:sp>
+        <p:nvSpPr>
+          <p:cNvPr id="4" name="Slide Number Placeholder 3"/>
+          <p:cNvSpPr>
+            <a:spLocks noGrp="1"/>
+          </p:cNvSpPr>
+          <p:nvPr>
+            <p:ph type="sldNum" sz="quarter" idx="10"/>
+          </p:nvPr>
+        </p:nvSpPr>
+        <p:spPr/>
+        <p:txBody>
+          <a:bodyPr/>
+          <a:lstStyle/>
+          <a:p>
+            <a:fld id="{F7021451-1387-4CA6-816F-3879F97B5CBC}" type="slidenum">
+              <a:rPr lang="en-US"/>
+              <a:t>33</a:t>
+            </a:fld>
+            <a:endParaRPr lang="en-US"/>
+          </a:p>
+        </p:txBody>
+      </p:sp>
+    </p:spTree>
+    <p:extLst>
+      <p:ext uri="{BB962C8B-B14F-4D97-AF65-F5344CB8AC3E}">
+        <p14:creationId xmlns:p14="http://schemas.microsoft.com/office/powerpoint/2010/main" val="1024086991"/>
+      </p:ext>
+    </p:extLst>
+  </p:cSld>
+  <p:clrMapOvr>
+    <a:masterClrMapping/>
+  </p:clrMapOvr>
+</p:notes>
+</file>
+
+<file path=ppt/notesSlides/notesSlide34.xml><?xml version="1.0" encoding="utf-8"?>
+<p:notes xmlns:a="http://schemas.openxmlformats.org/drawingml/2006/main" xmlns:r="http://schemas.openxmlformats.org/officeDocument/2006/relationships" xmlns:p="http://schemas.openxmlformats.org/presentationml/2006/main">
+  <p:cSld>
+    <p:spTree>
+      <p:nvGrpSpPr>
+        <p:cNvPr id="1" name=""/>
+        <p:cNvGrpSpPr/>
+        <p:nvPr/>
+      </p:nvGrpSpPr>
+      <p:grpSpPr>
+        <a:xfrm>
+          <a:off x="0" y="0"/>
+          <a:ext cx="0" cy="0"/>
+          <a:chOff x="0" y="0"/>
+          <a:chExt cx="0" cy="0"/>
+        </a:xfrm>
+      </p:grpSpPr>
+      <p:sp>
+        <p:nvSpPr>
+          <p:cNvPr id="2" name="Slide Image Placeholder 1"/>
+          <p:cNvSpPr>
+            <a:spLocks noGrp="1" noRot="1" noChangeAspect="1"/>
+          </p:cNvSpPr>
+          <p:nvPr>
+            <p:ph type="sldImg"/>
+          </p:nvPr>
+        </p:nvSpPr>
+        <p:spPr/>
+      </p:sp>
+      <p:sp>
+        <p:nvSpPr>
+          <p:cNvPr id="3" name="Notes Placeholder 2"/>
+          <p:cNvSpPr>
+            <a:spLocks noGrp="1"/>
+          </p:cNvSpPr>
+          <p:nvPr>
+            <p:ph type="body" idx="1"/>
+          </p:nvPr>
+        </p:nvSpPr>
+        <p:spPr/>
+        <p:txBody>
+          <a:bodyPr/>
+          <a:lstStyle/>
+          <a:p>
+            <a:r>
+              <a:rPr lang="en-US" dirty="0"/>
+              <a:t/>
+            </a:r>
+            <a:endParaRPr lang="en-US" dirty="0"/>
+          </a:p>
+        </p:txBody>
+      </p:sp>
+      <p:sp>
+        <p:nvSpPr>
+          <p:cNvPr id="4" name="Slide Number Placeholder 3"/>
+          <p:cNvSpPr>
+            <a:spLocks noGrp="1"/>
+          </p:cNvSpPr>
+          <p:nvPr>
+            <p:ph type="sldNum" sz="quarter" idx="10"/>
+          </p:nvPr>
+        </p:nvSpPr>
+        <p:spPr/>
+        <p:txBody>
+          <a:bodyPr/>
+          <a:lstStyle/>
+          <a:p>
+            <a:fld id="{F7021451-1387-4CA6-816F-3879F97B5CBC}" type="slidenum">
+              <a:rPr lang="en-US"/>
+              <a:t>34</a:t>
             </a:fld>
             <a:endParaRPr lang="en-US"/>
           </a:p>
@@ -12429,7 +12700,7 @@
                 <a:ea typeface="Cambria" pitchFamily="34" charset="-122"/>
                 <a:cs typeface="Cambria" pitchFamily="34" charset="-120"/>
               </a:rPr>
-              <a:t>Flash once, upload often</a:t>
+              <a:t>A real build log</a:t>
             </a:r>
             <a:endParaRPr lang="en-US" sz="3000" dirty="0"/>
           </a:p>
@@ -12443,20 +12714,20 @@
         </p:nvSpPr>
         <p:spPr>
           <a:xfrm>
-            <a:off x="548640" y="1920240"/>
-            <a:ext cx="1853123" cy="1737360"/>
+            <a:off x="548640" y="1463040"/>
+            <a:ext cx="7406640" cy="4754880"/>
           </a:xfrm>
           <a:prstGeom prst="roundRect">
             <a:avLst>
-              <a:gd name="adj" fmla="val 4211"/>
+              <a:gd name="adj" fmla="val 1538"/>
             </a:avLst>
           </a:prstGeom>
           <a:solidFill>
-            <a:srgbClr val="2E4A62"/>
+            <a:srgbClr val="12202B"/>
           </a:solidFill>
           <a:ln w="12700">
             <a:solidFill>
-              <a:srgbClr val="2E4A62"/>
+              <a:srgbClr val="12202B"/>
             </a:solidFill>
             <a:prstDash val="solid"/>
           </a:ln>
@@ -12470,8 +12741,8 @@
         </p:nvSpPr>
         <p:spPr>
           <a:xfrm>
-            <a:off x="658368" y="2103120"/>
-            <a:ext cx="1633667" cy="731520"/>
+            <a:off x="777240" y="1645920"/>
+            <a:ext cx="6949440" cy="4389120"/>
           </a:xfrm>
           <a:prstGeom prst="rect">
             <a:avLst/>
@@ -12480,600 +12751,109 @@
           <a:ln/>
         </p:spPr>
         <p:txBody>
-          <a:bodyPr wrap="square" lIns="0" tIns="0" rIns="0" bIns="0" rtlCol="0" anchor="ctr"/>
-          <a:lstStyle/>
-          <a:p>
-            <a:pPr algn="ctr" indent="0" marL="0">
+          <a:bodyPr wrap="square" lIns="0" tIns="0" rIns="0" bIns="0" rtlCol="0" anchor="t"/>
+          <a:lstStyle/>
+          <a:p>
+            <a:pPr indent="0" marL="0">
               <a:buNone/>
             </a:pPr>
             <a:r>
-              <a:rPr lang="en-US" sz="2000" b="1" dirty="0">
-                <a:solidFill>
-                  <a:srgbClr val="FFFFFF"/>
-                </a:solidFill>
-                <a:latin typeface="Calibri" pitchFamily="34" charset="0"/>
-                <a:ea typeface="Calibri" pitchFamily="34" charset="-122"/>
-                <a:cs typeface="Calibri" pitchFamily="34" charset="-120"/>
+              <a:rPr lang="en-US" sz="1250" dirty="0">
+                <a:solidFill>
+                  <a:srgbClr val="E6EDF2"/>
+                </a:solidFill>
+                <a:latin typeface="Courier New" pitchFamily="34" charset="0"/>
+                <a:ea typeface="Courier New" pitchFamily="34" charset="-122"/>
+                <a:cs typeface="Courier New" pitchFamily="34" charset="-120"/>
               </a:rPr>
-              <a:t>Build firmware</a:t>
-            </a:r>
-            <a:endParaRPr lang="en-US" sz="2000" dirty="0"/>
-          </a:p>
-        </p:txBody>
-      </p:sp>
-      <p:sp>
-        <p:nvSpPr>
-          <p:cNvPr id="5" name="Text 3"/>
-          <p:cNvSpPr txBox="1"/>
-          <p:nvPr/>
-        </p:nvSpPr>
-        <p:spPr>
-          <a:xfrm>
-            <a:off x="658368" y="2834640"/>
-            <a:ext cx="1633667" cy="731520"/>
-          </a:xfrm>
-          <a:prstGeom prst="rect">
-            <a:avLst/>
-          </a:prstGeom>
-          <a:noFill/>
-          <a:ln/>
-        </p:spPr>
-        <p:txBody>
-          <a:bodyPr wrap="square" lIns="0" tIns="0" rIns="0" bIns="0" rtlCol="0" anchor="t"/>
-          <a:lstStyle/>
-          <a:p>
-            <a:pPr algn="ctr" indent="0" marL="0">
+              <a:t>[INFO] Portable: True</a:t>
+            </a:r>
+            <a:endParaRPr lang="en-US" sz="1250" dirty="0"/>
+          </a:p>
+          <a:p>
+            <a:pPr indent="0" marL="0">
               <a:buNone/>
             </a:pPr>
             <a:r>
-              <a:rPr lang="en-US" sz="1500" dirty="0">
-                <a:solidFill>
-                  <a:srgbClr val="FFFFFF"/>
-                </a:solidFill>
-                <a:latin typeface="Calibri" pitchFamily="34" charset="0"/>
-                <a:ea typeface="Calibri" pitchFamily="34" charset="-122"/>
-                <a:cs typeface="Calibri" pitchFamily="34" charset="-120"/>
+              <a:rPr lang="en-US" sz="1250" dirty="0">
+                <a:solidFill>
+                  <a:srgbClr val="E6EDF2"/>
+                </a:solidFill>
+                <a:latin typeface="Courier New" pitchFamily="34" charset="0"/>
+                <a:ea typeface="Courier New" pitchFamily="34" charset="-122"/>
+                <a:cs typeface="Courier New" pitchFamily="34" charset="-120"/>
               </a:rPr>
-              <a:t>once per course</a:t>
-            </a:r>
-            <a:endParaRPr lang="en-US" sz="1500" dirty="0"/>
-          </a:p>
-        </p:txBody>
-      </p:sp>
-      <p:sp>
-        <p:nvSpPr>
-          <p:cNvPr id="6" name="Shape 4"/>
+              <a:t>[INFO] Building cartridge: work/hello/hello (Prefix: hello_world)</a:t>
+            </a:r>
+            <a:endParaRPr lang="en-US" sz="1250" dirty="0"/>
+          </a:p>
+          <a:p>
+            <a:pPr indent="0" marL="0">
+              <a:buNone/>
+            </a:pPr>
+            <a:r>
+              <a:rPr lang="en-US" sz="1250" dirty="0">
+                <a:solidFill>
+                  <a:srgbClr val="E6EDF2"/>
+                </a:solidFill>
+                <a:latin typeface="Courier New" pitchFamily="34" charset="0"/>
+                <a:ea typeface="Courier New" pitchFamily="34" charset="-122"/>
+                <a:cs typeface="Courier New" pitchFamily="34" charset="-120"/>
+              </a:rPr>
+              <a:t>[INFO] Cartridge RAM limit: 65536 bytes (default firmware profile)</a:t>
+            </a:r>
+            <a:endParaRPr lang="en-US" sz="1250" dirty="0"/>
+          </a:p>
+          <a:p>
+            <a:pPr indent="0" marL="0">
+              <a:buNone/>
+            </a:pPr>
+            <a:r>
+              <a:rPr lang="en-US" sz="1250" dirty="0">
+                <a:solidFill>
+                  <a:srgbClr val="E6EDF2"/>
+                </a:solidFill>
+                <a:latin typeface="Courier New" pitchFamily="34" charset="0"/>
+                <a:ea typeface="Courier New" pitchFamily="34" charset="-122"/>
+                <a:cs typeface="Courier New" pitchFamily="34" charset="-120"/>
+              </a:rPr>
+              <a:t>[OK] built work/hello/hello.prg32 name=hello load=0x40800000</a:t>
+            </a:r>
+            <a:endParaRPr lang="en-US" sz="1250" dirty="0"/>
+          </a:p>
+          <a:p>
+            <a:pPr indent="0" marL="0">
+              <a:buNone/>
+            </a:pPr>
+            <a:r>
+              <a:rPr lang="en-US" sz="1250" dirty="0">
+                <a:solidFill>
+                  <a:srgbClr val="E6EDF2"/>
+                </a:solidFill>
+                <a:latin typeface="Courier New" pitchFamily="34" charset="0"/>
+                <a:ea typeface="Courier New" pitchFamily="34" charset="-122"/>
+                <a:cs typeface="Courier New" pitchFamily="34" charset="-120"/>
+              </a:rPr>
+              <a:t>[INFO] code=2664 mem=2664 audio=0</a:t>
+            </a:r>
+            <a:endParaRPr lang="en-US" sz="1250" dirty="0"/>
+          </a:p>
+        </p:txBody>
+      </p:sp>
+      <p:sp>
+        <p:nvSpPr>
+          <p:cNvPr id="5" name="Shape 3"/>
           <p:cNvSpPr/>
           <p:nvPr/>
         </p:nvSpPr>
         <p:spPr>
           <a:xfrm>
-            <a:off x="2474915" y="2633472"/>
-            <a:ext cx="310896" cy="310896"/>
-          </a:xfrm>
-          <a:prstGeom prst="rightArrow">
-            <a:avLst/>
-          </a:prstGeom>
-          <a:solidFill>
-            <a:srgbClr val="C9D2D8"/>
-          </a:solidFill>
-          <a:ln w="12700">
-            <a:solidFill>
-              <a:srgbClr val="C9D2D8"/>
-            </a:solidFill>
-            <a:prstDash val="solid"/>
-          </a:ln>
-        </p:spPr>
-      </p:sp>
-      <p:sp>
-        <p:nvSpPr>
-          <p:cNvPr id="7" name="Shape 5"/>
-          <p:cNvSpPr/>
-          <p:nvPr/>
-        </p:nvSpPr>
-        <p:spPr>
-          <a:xfrm>
-            <a:off x="2858963" y="1920240"/>
-            <a:ext cx="1853123" cy="1737360"/>
+            <a:off x="8229600" y="1463040"/>
+            <a:ext cx="3413455" cy="1037844"/>
           </a:xfrm>
           <a:prstGeom prst="roundRect">
             <a:avLst>
-              <a:gd name="adj" fmla="val 4211"/>
-            </a:avLst>
-          </a:prstGeom>
-          <a:solidFill>
-            <a:srgbClr val="0E7C86"/>
-          </a:solidFill>
-          <a:ln w="12700">
-            <a:solidFill>
-              <a:srgbClr val="0E7C86"/>
-            </a:solidFill>
-            <a:prstDash val="solid"/>
-          </a:ln>
-        </p:spPr>
-      </p:sp>
-      <p:sp>
-        <p:nvSpPr>
-          <p:cNvPr id="8" name="Text 6"/>
-          <p:cNvSpPr txBox="1"/>
-          <p:nvPr/>
-        </p:nvSpPr>
-        <p:spPr>
-          <a:xfrm>
-            <a:off x="2968691" y="2103120"/>
-            <a:ext cx="1633667" cy="731520"/>
-          </a:xfrm>
-          <a:prstGeom prst="rect">
-            <a:avLst/>
-          </a:prstGeom>
-          <a:noFill/>
-          <a:ln/>
-        </p:spPr>
-        <p:txBody>
-          <a:bodyPr wrap="square" lIns="0" tIns="0" rIns="0" bIns="0" rtlCol="0" anchor="ctr"/>
-          <a:lstStyle/>
-          <a:p>
-            <a:pPr algn="ctr" indent="0" marL="0">
-              <a:buNone/>
-            </a:pPr>
-            <a:r>
-              <a:rPr lang="en-US" sz="2000" b="1" dirty="0">
-                <a:solidFill>
-                  <a:srgbClr val="FFFFFF"/>
-                </a:solidFill>
-                <a:latin typeface="Calibri" pitchFamily="34" charset="0"/>
-                <a:ea typeface="Calibri" pitchFamily="34" charset="-122"/>
-                <a:cs typeface="Calibri" pitchFamily="34" charset="-120"/>
-              </a:rPr>
-              <a:t>Flash board</a:t>
-            </a:r>
-            <a:endParaRPr lang="en-US" sz="2000" dirty="0"/>
-          </a:p>
-        </p:txBody>
-      </p:sp>
-      <p:sp>
-        <p:nvSpPr>
-          <p:cNvPr id="9" name="Text 7"/>
-          <p:cNvSpPr txBox="1"/>
-          <p:nvPr/>
-        </p:nvSpPr>
-        <p:spPr>
-          <a:xfrm>
-            <a:off x="2968691" y="2834640"/>
-            <a:ext cx="1633667" cy="731520"/>
-          </a:xfrm>
-          <a:prstGeom prst="rect">
-            <a:avLst/>
-          </a:prstGeom>
-          <a:noFill/>
-          <a:ln/>
-        </p:spPr>
-        <p:txBody>
-          <a:bodyPr wrap="square" lIns="0" tIns="0" rIns="0" bIns="0" rtlCol="0" anchor="t"/>
-          <a:lstStyle/>
-          <a:p>
-            <a:pPr algn="ctr" indent="0" marL="0">
-              <a:buNone/>
-            </a:pPr>
-            <a:r>
-              <a:rPr lang="en-US" sz="1500" dirty="0">
-                <a:solidFill>
-                  <a:srgbClr val="FFFFFF"/>
-                </a:solidFill>
-                <a:latin typeface="Calibri" pitchFamily="34" charset="0"/>
-                <a:ea typeface="Calibri" pitchFamily="34" charset="-122"/>
-                <a:cs typeface="Calibri" pitchFamily="34" charset="-120"/>
-              </a:rPr>
-              <a:t>once</a:t>
-            </a:r>
-            <a:endParaRPr lang="en-US" sz="1500" dirty="0"/>
-          </a:p>
-        </p:txBody>
-      </p:sp>
-      <p:sp>
-        <p:nvSpPr>
-          <p:cNvPr id="10" name="Shape 8"/>
-          <p:cNvSpPr/>
-          <p:nvPr/>
-        </p:nvSpPr>
-        <p:spPr>
-          <a:xfrm>
-            <a:off x="4785238" y="2633472"/>
-            <a:ext cx="310896" cy="310896"/>
-          </a:xfrm>
-          <a:prstGeom prst="rightArrow">
-            <a:avLst/>
-          </a:prstGeom>
-          <a:solidFill>
-            <a:srgbClr val="C9D2D8"/>
-          </a:solidFill>
-          <a:ln w="12700">
-            <a:solidFill>
-              <a:srgbClr val="C9D2D8"/>
-            </a:solidFill>
-            <a:prstDash val="solid"/>
-          </a:ln>
-        </p:spPr>
-      </p:sp>
-      <p:sp>
-        <p:nvSpPr>
-          <p:cNvPr id="11" name="Shape 9"/>
-          <p:cNvSpPr/>
-          <p:nvPr/>
-        </p:nvSpPr>
-        <p:spPr>
-          <a:xfrm>
-            <a:off x="5169286" y="1920240"/>
-            <a:ext cx="1853123" cy="1737360"/>
-          </a:xfrm>
-          <a:prstGeom prst="roundRect">
-            <a:avLst>
-              <a:gd name="adj" fmla="val 4211"/>
-            </a:avLst>
-          </a:prstGeom>
-          <a:solidFill>
-            <a:srgbClr val="6B4FA0"/>
-          </a:solidFill>
-          <a:ln w="12700">
-            <a:solidFill>
-              <a:srgbClr val="6B4FA0"/>
-            </a:solidFill>
-            <a:prstDash val="solid"/>
-          </a:ln>
-        </p:spPr>
-      </p:sp>
-      <p:sp>
-        <p:nvSpPr>
-          <p:cNvPr id="12" name="Text 10"/>
-          <p:cNvSpPr txBox="1"/>
-          <p:nvPr/>
-        </p:nvSpPr>
-        <p:spPr>
-          <a:xfrm>
-            <a:off x="5279014" y="2103120"/>
-            <a:ext cx="1633667" cy="731520"/>
-          </a:xfrm>
-          <a:prstGeom prst="rect">
-            <a:avLst/>
-          </a:prstGeom>
-          <a:noFill/>
-          <a:ln/>
-        </p:spPr>
-        <p:txBody>
-          <a:bodyPr wrap="square" lIns="0" tIns="0" rIns="0" bIns="0" rtlCol="0" anchor="ctr"/>
-          <a:lstStyle/>
-          <a:p>
-            <a:pPr algn="ctr" indent="0" marL="0">
-              <a:buNone/>
-            </a:pPr>
-            <a:r>
-              <a:rPr lang="en-US" sz="2000" b="1" dirty="0">
-                <a:solidFill>
-                  <a:srgbClr val="FFFFFF"/>
-                </a:solidFill>
-                <a:latin typeface="Calibri" pitchFamily="34" charset="0"/>
-                <a:ea typeface="Calibri" pitchFamily="34" charset="-122"/>
-                <a:cs typeface="Calibri" pitchFamily="34" charset="-120"/>
-              </a:rPr>
-              <a:t>Build cartridge</a:t>
-            </a:r>
-            <a:endParaRPr lang="en-US" sz="2000" dirty="0"/>
-          </a:p>
-        </p:txBody>
-      </p:sp>
-      <p:sp>
-        <p:nvSpPr>
-          <p:cNvPr id="13" name="Text 11"/>
-          <p:cNvSpPr txBox="1"/>
-          <p:nvPr/>
-        </p:nvSpPr>
-        <p:spPr>
-          <a:xfrm>
-            <a:off x="5279014" y="2834640"/>
-            <a:ext cx="1633667" cy="731520"/>
-          </a:xfrm>
-          <a:prstGeom prst="rect">
-            <a:avLst/>
-          </a:prstGeom>
-          <a:noFill/>
-          <a:ln/>
-        </p:spPr>
-        <p:txBody>
-          <a:bodyPr wrap="square" lIns="0" tIns="0" rIns="0" bIns="0" rtlCol="0" anchor="t"/>
-          <a:lstStyle/>
-          <a:p>
-            <a:pPr algn="ctr" indent="0" marL="0">
-              <a:buNone/>
-            </a:pPr>
-            <a:r>
-              <a:rPr lang="en-US" sz="1500" dirty="0">
-                <a:solidFill>
-                  <a:srgbClr val="FFFFFF"/>
-                </a:solidFill>
-                <a:latin typeface="Calibri" pitchFamily="34" charset="0"/>
-                <a:ea typeface="Calibri" pitchFamily="34" charset="-122"/>
-                <a:cs typeface="Calibri" pitchFamily="34" charset="-120"/>
-              </a:rPr>
-              <a:t>seconds</a:t>
-            </a:r>
-            <a:endParaRPr lang="en-US" sz="1500" dirty="0"/>
-          </a:p>
-        </p:txBody>
-      </p:sp>
-      <p:sp>
-        <p:nvSpPr>
-          <p:cNvPr id="14" name="Shape 12"/>
-          <p:cNvSpPr/>
-          <p:nvPr/>
-        </p:nvSpPr>
-        <p:spPr>
-          <a:xfrm>
-            <a:off x="7095561" y="2633472"/>
-            <a:ext cx="310896" cy="310896"/>
-          </a:xfrm>
-          <a:prstGeom prst="rightArrow">
-            <a:avLst/>
-          </a:prstGeom>
-          <a:solidFill>
-            <a:srgbClr val="C9D2D8"/>
-          </a:solidFill>
-          <a:ln w="12700">
-            <a:solidFill>
-              <a:srgbClr val="C9D2D8"/>
-            </a:solidFill>
-            <a:prstDash val="solid"/>
-          </a:ln>
-        </p:spPr>
-      </p:sp>
-      <p:sp>
-        <p:nvSpPr>
-          <p:cNvPr id="15" name="Shape 13"/>
-          <p:cNvSpPr/>
-          <p:nvPr/>
-        </p:nvSpPr>
-        <p:spPr>
-          <a:xfrm>
-            <a:off x="7479609" y="1920240"/>
-            <a:ext cx="1853123" cy="1737360"/>
-          </a:xfrm>
-          <a:prstGeom prst="roundRect">
-            <a:avLst>
-              <a:gd name="adj" fmla="val 4211"/>
-            </a:avLst>
-          </a:prstGeom>
-          <a:solidFill>
-            <a:srgbClr val="C7791B"/>
-          </a:solidFill>
-          <a:ln w="12700">
-            <a:solidFill>
-              <a:srgbClr val="C7791B"/>
-            </a:solidFill>
-            <a:prstDash val="solid"/>
-          </a:ln>
-        </p:spPr>
-      </p:sp>
-      <p:sp>
-        <p:nvSpPr>
-          <p:cNvPr id="16" name="Text 14"/>
-          <p:cNvSpPr txBox="1"/>
-          <p:nvPr/>
-        </p:nvSpPr>
-        <p:spPr>
-          <a:xfrm>
-            <a:off x="7589337" y="2103120"/>
-            <a:ext cx="1633667" cy="731520"/>
-          </a:xfrm>
-          <a:prstGeom prst="rect">
-            <a:avLst/>
-          </a:prstGeom>
-          <a:noFill/>
-          <a:ln/>
-        </p:spPr>
-        <p:txBody>
-          <a:bodyPr wrap="square" lIns="0" tIns="0" rIns="0" bIns="0" rtlCol="0" anchor="ctr"/>
-          <a:lstStyle/>
-          <a:p>
-            <a:pPr algn="ctr" indent="0" marL="0">
-              <a:buNone/>
-            </a:pPr>
-            <a:r>
-              <a:rPr lang="en-US" sz="2000" b="1" dirty="0">
-                <a:solidFill>
-                  <a:srgbClr val="FFFFFF"/>
-                </a:solidFill>
-                <a:latin typeface="Calibri" pitchFamily="34" charset="0"/>
-                <a:ea typeface="Calibri" pitchFamily="34" charset="-122"/>
-                <a:cs typeface="Calibri" pitchFamily="34" charset="-120"/>
-              </a:rPr>
-              <a:t>Upload or stage</a:t>
-            </a:r>
-            <a:endParaRPr lang="en-US" sz="2000" dirty="0"/>
-          </a:p>
-        </p:txBody>
-      </p:sp>
-      <p:sp>
-        <p:nvSpPr>
-          <p:cNvPr id="17" name="Text 15"/>
-          <p:cNvSpPr txBox="1"/>
-          <p:nvPr/>
-        </p:nvSpPr>
-        <p:spPr>
-          <a:xfrm>
-            <a:off x="7589337" y="2834640"/>
-            <a:ext cx="1633667" cy="731520"/>
-          </a:xfrm>
-          <a:prstGeom prst="rect">
-            <a:avLst/>
-          </a:prstGeom>
-          <a:noFill/>
-          <a:ln/>
-        </p:spPr>
-        <p:txBody>
-          <a:bodyPr wrap="square" lIns="0" tIns="0" rIns="0" bIns="0" rtlCol="0" anchor="t"/>
-          <a:lstStyle/>
-          <a:p>
-            <a:pPr algn="ctr" indent="0" marL="0">
-              <a:buNone/>
-            </a:pPr>
-            <a:r>
-              <a:rPr lang="en-US" sz="1500" dirty="0">
-                <a:solidFill>
-                  <a:srgbClr val="FFFFFF"/>
-                </a:solidFill>
-                <a:latin typeface="Calibri" pitchFamily="34" charset="0"/>
-                <a:ea typeface="Calibri" pitchFamily="34" charset="-122"/>
-                <a:cs typeface="Calibri" pitchFamily="34" charset="-120"/>
-              </a:rPr>
-              <a:t>seconds</a:t>
-            </a:r>
-            <a:endParaRPr lang="en-US" sz="1500" dirty="0"/>
-          </a:p>
-        </p:txBody>
-      </p:sp>
-      <p:sp>
-        <p:nvSpPr>
-          <p:cNvPr id="18" name="Shape 16"/>
-          <p:cNvSpPr/>
-          <p:nvPr/>
-        </p:nvSpPr>
-        <p:spPr>
-          <a:xfrm>
-            <a:off x="9405884" y="2633472"/>
-            <a:ext cx="310896" cy="310896"/>
-          </a:xfrm>
-          <a:prstGeom prst="rightArrow">
-            <a:avLst/>
-          </a:prstGeom>
-          <a:solidFill>
-            <a:srgbClr val="C9D2D8"/>
-          </a:solidFill>
-          <a:ln w="12700">
-            <a:solidFill>
-              <a:srgbClr val="C9D2D8"/>
-            </a:solidFill>
-            <a:prstDash val="solid"/>
-          </a:ln>
-        </p:spPr>
-      </p:sp>
-      <p:sp>
-        <p:nvSpPr>
-          <p:cNvPr id="19" name="Shape 17"/>
-          <p:cNvSpPr/>
-          <p:nvPr/>
-        </p:nvSpPr>
-        <p:spPr>
-          <a:xfrm>
-            <a:off x="9789932" y="1920240"/>
-            <a:ext cx="1853123" cy="1737360"/>
-          </a:xfrm>
-          <a:prstGeom prst="roundRect">
-            <a:avLst>
-              <a:gd name="adj" fmla="val 4211"/>
-            </a:avLst>
-          </a:prstGeom>
-          <a:solidFill>
-            <a:srgbClr val="2F7D4F"/>
-          </a:solidFill>
-          <a:ln w="12700">
-            <a:solidFill>
-              <a:srgbClr val="2F7D4F"/>
-            </a:solidFill>
-            <a:prstDash val="solid"/>
-          </a:ln>
-        </p:spPr>
-      </p:sp>
-      <p:sp>
-        <p:nvSpPr>
-          <p:cNvPr id="20" name="Text 18"/>
-          <p:cNvSpPr txBox="1"/>
-          <p:nvPr/>
-        </p:nvSpPr>
-        <p:spPr>
-          <a:xfrm>
-            <a:off x="9899660" y="2103120"/>
-            <a:ext cx="1633667" cy="731520"/>
-          </a:xfrm>
-          <a:prstGeom prst="rect">
-            <a:avLst/>
-          </a:prstGeom>
-          <a:noFill/>
-          <a:ln/>
-        </p:spPr>
-        <p:txBody>
-          <a:bodyPr wrap="square" lIns="0" tIns="0" rIns="0" bIns="0" rtlCol="0" anchor="ctr"/>
-          <a:lstStyle/>
-          <a:p>
-            <a:pPr algn="ctr" indent="0" marL="0">
-              <a:buNone/>
-            </a:pPr>
-            <a:r>
-              <a:rPr lang="en-US" sz="2000" b="1" dirty="0">
-                <a:solidFill>
-                  <a:srgbClr val="FFFFFF"/>
-                </a:solidFill>
-                <a:latin typeface="Calibri" pitchFamily="34" charset="0"/>
-                <a:ea typeface="Calibri" pitchFamily="34" charset="-122"/>
-                <a:cs typeface="Calibri" pitchFamily="34" charset="-120"/>
-              </a:rPr>
-              <a:t>Play</a:t>
-            </a:r>
-            <a:endParaRPr lang="en-US" sz="2000" dirty="0"/>
-          </a:p>
-        </p:txBody>
-      </p:sp>
-      <p:sp>
-        <p:nvSpPr>
-          <p:cNvPr id="21" name="Text 19"/>
-          <p:cNvSpPr txBox="1"/>
-          <p:nvPr/>
-        </p:nvSpPr>
-        <p:spPr>
-          <a:xfrm>
-            <a:off x="9899660" y="2834640"/>
-            <a:ext cx="1633667" cy="731520"/>
-          </a:xfrm>
-          <a:prstGeom prst="rect">
-            <a:avLst/>
-          </a:prstGeom>
-          <a:noFill/>
-          <a:ln/>
-        </p:spPr>
-        <p:txBody>
-          <a:bodyPr wrap="square" lIns="0" tIns="0" rIns="0" bIns="0" rtlCol="0" anchor="t"/>
-          <a:lstStyle/>
-          <a:p>
-            <a:pPr algn="ctr" indent="0" marL="0">
-              <a:buNone/>
-            </a:pPr>
-            <a:r>
-              <a:rPr lang="en-US" sz="1500" dirty="0">
-                <a:solidFill>
-                  <a:srgbClr val="FFFFFF"/>
-                </a:solidFill>
-                <a:latin typeface="Calibri" pitchFamily="34" charset="0"/>
-                <a:ea typeface="Calibri" pitchFamily="34" charset="-122"/>
-                <a:cs typeface="Calibri" pitchFamily="34" charset="-120"/>
-              </a:rPr>
-              <a:t>and repeat</a:t>
-            </a:r>
-            <a:endParaRPr lang="en-US" sz="1500" dirty="0"/>
-          </a:p>
-        </p:txBody>
-      </p:sp>
-      <p:sp>
-        <p:nvSpPr>
-          <p:cNvPr id="22" name="Shape 20"/>
-          <p:cNvSpPr/>
-          <p:nvPr/>
-        </p:nvSpPr>
-        <p:spPr>
-          <a:xfrm>
-            <a:off x="548640" y="4114800"/>
-            <a:ext cx="11094415" cy="2103120"/>
-          </a:xfrm>
-          <a:prstGeom prst="roundRect">
-            <a:avLst>
-              <a:gd name="adj" fmla="val 3478"/>
+              <a:gd name="adj" fmla="val 7048"/>
             </a:avLst>
           </a:prstGeom>
           <a:solidFill>
@@ -13089,40 +12869,426 @@
       </p:sp>
       <p:sp>
         <p:nvSpPr>
-          <p:cNvPr id="23" name="Text 21"/>
+          <p:cNvPr id="6" name="Text 4"/>
           <p:cNvSpPr txBox="1"/>
           <p:nvPr/>
         </p:nvSpPr>
         <p:spPr>
           <a:xfrm>
-            <a:off x="868680" y="4251960"/>
-            <a:ext cx="10454335" cy="1828800"/>
-          </a:xfrm>
-          <a:prstGeom prst="rect">
-            <a:avLst/>
-          </a:prstGeom>
-          <a:noFill/>
-          <a:ln/>
+            <a:off x="8394192" y="1627632"/>
+            <a:ext cx="365760" cy="365760"/>
+          </a:xfrm>
+          <a:prstGeom prst="roundRect">
+            <a:avLst>
+              <a:gd name="adj" fmla="val 20000"/>
+            </a:avLst>
+          </a:prstGeom>
+          <a:solidFill>
+            <a:srgbClr val="C7791B"/>
+          </a:solidFill>
+          <a:ln>
+            <a:solidFill>
+              <a:srgbClr val="C7791B"/>
+            </a:solidFill>
+          </a:ln>
         </p:spPr>
         <p:txBody>
           <a:bodyPr wrap="square" lIns="0" tIns="0" rIns="0" bIns="0" rtlCol="0" anchor="ctr"/>
           <a:lstStyle/>
           <a:p>
-            <a:pPr indent="0" marL="0">
+            <a:pPr algn="ctr" indent="0" marL="0">
               <a:buNone/>
             </a:pPr>
             <a:r>
-              <a:rPr lang="en-US" sz="2200" dirty="0">
-                <a:solidFill>
-                  <a:srgbClr val="1B2530"/>
+              <a:rPr lang="en-US" sz="1400" b="1" dirty="0">
+                <a:solidFill>
+                  <a:srgbClr val="FFFFFF"/>
                 </a:solidFill>
                 <a:latin typeface="Calibri" pitchFamily="34" charset="0"/>
                 <a:ea typeface="Calibri" pitchFamily="34" charset="-122"/>
                 <a:cs typeface="Calibri" pitchFamily="34" charset="-120"/>
               </a:rPr>
-              <a:t>The resident firmware stays on the board. Your edit-build-run loop touches only the cartridge.</a:t>
-            </a:r>
-            <a:endParaRPr lang="en-US" sz="2200" dirty="0"/>
+              <a:t>1</a:t>
+            </a:r>
+            <a:endParaRPr lang="en-US" sz="1400" dirty="0"/>
+          </a:p>
+        </p:txBody>
+      </p:sp>
+      <p:sp>
+        <p:nvSpPr>
+          <p:cNvPr id="7" name="Text 5"/>
+          <p:cNvSpPr txBox="1"/>
+          <p:nvPr/>
+        </p:nvSpPr>
+        <p:spPr>
+          <a:xfrm>
+            <a:off x="8915400" y="1600200"/>
+            <a:ext cx="2544775" cy="763524"/>
+          </a:xfrm>
+          <a:prstGeom prst="rect">
+            <a:avLst/>
+          </a:prstGeom>
+          <a:noFill/>
+          <a:ln/>
+        </p:spPr>
+        <p:txBody>
+          <a:bodyPr wrap="square" lIns="0" tIns="0" rIns="0" bIns="0" rtlCol="0" anchor="ctr"/>
+          <a:lstStyle/>
+          <a:p>
+            <a:pPr indent="0" marL="0">
+              <a:buNone/>
+            </a:pPr>
+            <a:r>
+              <a:rPr lang="en-US" sz="1600" dirty="0">
+                <a:solidFill>
+                  <a:srgbClr val="1B2530"/>
+                </a:solidFill>
+                <a:latin typeface="Calibri" pitchFamily="34" charset="0"/>
+                <a:ea typeface="Calibri" pitchFamily="34" charset="-122"/>
+                <a:cs typeface="Calibri" pitchFamily="34" charset="-120"/>
+              </a:rPr>
+              <a:t>Portable: ABI-table imports</a:t>
+            </a:r>
+            <a:endParaRPr lang="en-US" sz="1600" dirty="0"/>
+          </a:p>
+        </p:txBody>
+      </p:sp>
+      <p:sp>
+        <p:nvSpPr>
+          <p:cNvPr id="8" name="Shape 6"/>
+          <p:cNvSpPr/>
+          <p:nvPr/>
+        </p:nvSpPr>
+        <p:spPr>
+          <a:xfrm>
+            <a:off x="8229600" y="2702052"/>
+            <a:ext cx="3413455" cy="1037844"/>
+          </a:xfrm>
+          <a:prstGeom prst="roundRect">
+            <a:avLst>
+              <a:gd name="adj" fmla="val 7048"/>
+            </a:avLst>
+          </a:prstGeom>
+          <a:solidFill>
+            <a:srgbClr val="EEF2F4"/>
+          </a:solidFill>
+          <a:ln w="12700">
+            <a:solidFill>
+              <a:srgbClr val="EEF2F4"/>
+            </a:solidFill>
+            <a:prstDash val="solid"/>
+          </a:ln>
+        </p:spPr>
+      </p:sp>
+      <p:sp>
+        <p:nvSpPr>
+          <p:cNvPr id="9" name="Text 7"/>
+          <p:cNvSpPr txBox="1"/>
+          <p:nvPr/>
+        </p:nvSpPr>
+        <p:spPr>
+          <a:xfrm>
+            <a:off x="8394192" y="2866644"/>
+            <a:ext cx="365760" cy="365760"/>
+          </a:xfrm>
+          <a:prstGeom prst="roundRect">
+            <a:avLst>
+              <a:gd name="adj" fmla="val 20000"/>
+            </a:avLst>
+          </a:prstGeom>
+          <a:solidFill>
+            <a:srgbClr val="C7791B"/>
+          </a:solidFill>
+          <a:ln>
+            <a:solidFill>
+              <a:srgbClr val="C7791B"/>
+            </a:solidFill>
+          </a:ln>
+        </p:spPr>
+        <p:txBody>
+          <a:bodyPr wrap="square" lIns="0" tIns="0" rIns="0" bIns="0" rtlCol="0" anchor="ctr"/>
+          <a:lstStyle/>
+          <a:p>
+            <a:pPr algn="ctr" indent="0" marL="0">
+              <a:buNone/>
+            </a:pPr>
+            <a:r>
+              <a:rPr lang="en-US" sz="1400" b="1" dirty="0">
+                <a:solidFill>
+                  <a:srgbClr val="FFFFFF"/>
+                </a:solidFill>
+                <a:latin typeface="Calibri" pitchFamily="34" charset="0"/>
+                <a:ea typeface="Calibri" pitchFamily="34" charset="-122"/>
+                <a:cs typeface="Calibri" pitchFamily="34" charset="-120"/>
+              </a:rPr>
+              <a:t>2</a:t>
+            </a:r>
+            <a:endParaRPr lang="en-US" sz="1400" dirty="0"/>
+          </a:p>
+        </p:txBody>
+      </p:sp>
+      <p:sp>
+        <p:nvSpPr>
+          <p:cNvPr id="10" name="Text 8"/>
+          <p:cNvSpPr txBox="1"/>
+          <p:nvPr/>
+        </p:nvSpPr>
+        <p:spPr>
+          <a:xfrm>
+            <a:off x="8915400" y="2839212"/>
+            <a:ext cx="2544775" cy="763524"/>
+          </a:xfrm>
+          <a:prstGeom prst="rect">
+            <a:avLst/>
+          </a:prstGeom>
+          <a:noFill/>
+          <a:ln/>
+        </p:spPr>
+        <p:txBody>
+          <a:bodyPr wrap="square" lIns="0" tIns="0" rIns="0" bIns="0" rtlCol="0" anchor="ctr"/>
+          <a:lstStyle/>
+          <a:p>
+            <a:pPr indent="0" marL="0">
+              <a:buNone/>
+            </a:pPr>
+            <a:r>
+              <a:rPr lang="en-US" sz="1600" dirty="0">
+                <a:solidFill>
+                  <a:srgbClr val="1B2530"/>
+                </a:solidFill>
+                <a:latin typeface="Calibri" pitchFamily="34" charset="0"/>
+                <a:ea typeface="Calibri" pitchFamily="34" charset="-122"/>
+                <a:cs typeface="Calibri" pitchFamily="34" charset="-120"/>
+              </a:rPr>
+              <a:t>The 64 KiB profile limit</a:t>
+            </a:r>
+            <a:endParaRPr lang="en-US" sz="1600" dirty="0"/>
+          </a:p>
+        </p:txBody>
+      </p:sp>
+      <p:sp>
+        <p:nvSpPr>
+          <p:cNvPr id="11" name="Shape 9"/>
+          <p:cNvSpPr/>
+          <p:nvPr/>
+        </p:nvSpPr>
+        <p:spPr>
+          <a:xfrm>
+            <a:off x="8229600" y="3941064"/>
+            <a:ext cx="3413455" cy="1037844"/>
+          </a:xfrm>
+          <a:prstGeom prst="roundRect">
+            <a:avLst>
+              <a:gd name="adj" fmla="val 7048"/>
+            </a:avLst>
+          </a:prstGeom>
+          <a:solidFill>
+            <a:srgbClr val="EEF2F4"/>
+          </a:solidFill>
+          <a:ln w="12700">
+            <a:solidFill>
+              <a:srgbClr val="EEF2F4"/>
+            </a:solidFill>
+            <a:prstDash val="solid"/>
+          </a:ln>
+        </p:spPr>
+      </p:sp>
+      <p:sp>
+        <p:nvSpPr>
+          <p:cNvPr id="12" name="Text 10"/>
+          <p:cNvSpPr txBox="1"/>
+          <p:nvPr/>
+        </p:nvSpPr>
+        <p:spPr>
+          <a:xfrm>
+            <a:off x="8394192" y="4105656"/>
+            <a:ext cx="365760" cy="365760"/>
+          </a:xfrm>
+          <a:prstGeom prst="roundRect">
+            <a:avLst>
+              <a:gd name="adj" fmla="val 20000"/>
+            </a:avLst>
+          </a:prstGeom>
+          <a:solidFill>
+            <a:srgbClr val="C7791B"/>
+          </a:solidFill>
+          <a:ln>
+            <a:solidFill>
+              <a:srgbClr val="C7791B"/>
+            </a:solidFill>
+          </a:ln>
+        </p:spPr>
+        <p:txBody>
+          <a:bodyPr wrap="square" lIns="0" tIns="0" rIns="0" bIns="0" rtlCol="0" anchor="ctr"/>
+          <a:lstStyle/>
+          <a:p>
+            <a:pPr algn="ctr" indent="0" marL="0">
+              <a:buNone/>
+            </a:pPr>
+            <a:r>
+              <a:rPr lang="en-US" sz="1400" b="1" dirty="0">
+                <a:solidFill>
+                  <a:srgbClr val="FFFFFF"/>
+                </a:solidFill>
+                <a:latin typeface="Calibri" pitchFamily="34" charset="0"/>
+                <a:ea typeface="Calibri" pitchFamily="34" charset="-122"/>
+                <a:cs typeface="Calibri" pitchFamily="34" charset="-120"/>
+              </a:rPr>
+              <a:t>3</a:t>
+            </a:r>
+            <a:endParaRPr lang="en-US" sz="1400" dirty="0"/>
+          </a:p>
+        </p:txBody>
+      </p:sp>
+      <p:sp>
+        <p:nvSpPr>
+          <p:cNvPr id="13" name="Text 11"/>
+          <p:cNvSpPr txBox="1"/>
+          <p:nvPr/>
+        </p:nvSpPr>
+        <p:spPr>
+          <a:xfrm>
+            <a:off x="8915400" y="4078224"/>
+            <a:ext cx="2544775" cy="763524"/>
+          </a:xfrm>
+          <a:prstGeom prst="rect">
+            <a:avLst/>
+          </a:prstGeom>
+          <a:noFill/>
+          <a:ln/>
+        </p:spPr>
+        <p:txBody>
+          <a:bodyPr wrap="square" lIns="0" tIns="0" rIns="0" bIns="0" rtlCol="0" anchor="ctr"/>
+          <a:lstStyle/>
+          <a:p>
+            <a:pPr indent="0" marL="0">
+              <a:buNone/>
+            </a:pPr>
+            <a:r>
+              <a:rPr lang="en-US" sz="1600" dirty="0">
+                <a:solidFill>
+                  <a:srgbClr val="1B2530"/>
+                </a:solidFill>
+                <a:latin typeface="Calibri" pitchFamily="34" charset="0"/>
+                <a:ea typeface="Calibri" pitchFamily="34" charset="-122"/>
+                <a:cs typeface="Calibri" pitchFamily="34" charset="-120"/>
+              </a:rPr>
+              <a:t>Load address of cartridge RAM</a:t>
+            </a:r>
+            <a:endParaRPr lang="en-US" sz="1600" dirty="0"/>
+          </a:p>
+        </p:txBody>
+      </p:sp>
+      <p:sp>
+        <p:nvSpPr>
+          <p:cNvPr id="14" name="Shape 12"/>
+          <p:cNvSpPr/>
+          <p:nvPr/>
+        </p:nvSpPr>
+        <p:spPr>
+          <a:xfrm>
+            <a:off x="8229600" y="5180076"/>
+            <a:ext cx="3413455" cy="1037844"/>
+          </a:xfrm>
+          <a:prstGeom prst="roundRect">
+            <a:avLst>
+              <a:gd name="adj" fmla="val 7048"/>
+            </a:avLst>
+          </a:prstGeom>
+          <a:solidFill>
+            <a:srgbClr val="EEF2F4"/>
+          </a:solidFill>
+          <a:ln w="12700">
+            <a:solidFill>
+              <a:srgbClr val="EEF2F4"/>
+            </a:solidFill>
+            <a:prstDash val="solid"/>
+          </a:ln>
+        </p:spPr>
+      </p:sp>
+      <p:sp>
+        <p:nvSpPr>
+          <p:cNvPr id="15" name="Text 13"/>
+          <p:cNvSpPr txBox="1"/>
+          <p:nvPr/>
+        </p:nvSpPr>
+        <p:spPr>
+          <a:xfrm>
+            <a:off x="8394192" y="5344668"/>
+            <a:ext cx="365760" cy="365760"/>
+          </a:xfrm>
+          <a:prstGeom prst="roundRect">
+            <a:avLst>
+              <a:gd name="adj" fmla="val 20000"/>
+            </a:avLst>
+          </a:prstGeom>
+          <a:solidFill>
+            <a:srgbClr val="C7791B"/>
+          </a:solidFill>
+          <a:ln>
+            <a:solidFill>
+              <a:srgbClr val="C7791B"/>
+            </a:solidFill>
+          </a:ln>
+        </p:spPr>
+        <p:txBody>
+          <a:bodyPr wrap="square" lIns="0" tIns="0" rIns="0" bIns="0" rtlCol="0" anchor="ctr"/>
+          <a:lstStyle/>
+          <a:p>
+            <a:pPr algn="ctr" indent="0" marL="0">
+              <a:buNone/>
+            </a:pPr>
+            <a:r>
+              <a:rPr lang="en-US" sz="1400" b="1" dirty="0">
+                <a:solidFill>
+                  <a:srgbClr val="FFFFFF"/>
+                </a:solidFill>
+                <a:latin typeface="Calibri" pitchFamily="34" charset="0"/>
+                <a:ea typeface="Calibri" pitchFamily="34" charset="-122"/>
+                <a:cs typeface="Calibri" pitchFamily="34" charset="-120"/>
+              </a:rPr>
+              <a:t>4</a:t>
+            </a:r>
+            <a:endParaRPr lang="en-US" sz="1400" dirty="0"/>
+          </a:p>
+        </p:txBody>
+      </p:sp>
+      <p:sp>
+        <p:nvSpPr>
+          <p:cNvPr id="16" name="Text 14"/>
+          <p:cNvSpPr txBox="1"/>
+          <p:nvPr/>
+        </p:nvSpPr>
+        <p:spPr>
+          <a:xfrm>
+            <a:off x="8915400" y="5317236"/>
+            <a:ext cx="2544775" cy="763524"/>
+          </a:xfrm>
+          <a:prstGeom prst="rect">
+            <a:avLst/>
+          </a:prstGeom>
+          <a:noFill/>
+          <a:ln/>
+        </p:spPr>
+        <p:txBody>
+          <a:bodyPr wrap="square" lIns="0" tIns="0" rIns="0" bIns="0" rtlCol="0" anchor="ctr"/>
+          <a:lstStyle/>
+          <a:p>
+            <a:pPr indent="0" marL="0">
+              <a:buNone/>
+            </a:pPr>
+            <a:r>
+              <a:rPr lang="en-US" sz="1600" dirty="0">
+                <a:solidFill>
+                  <a:srgbClr val="1B2530"/>
+                </a:solidFill>
+                <a:latin typeface="Calibri" pitchFamily="34" charset="0"/>
+                <a:ea typeface="Calibri" pitchFamily="34" charset="-122"/>
+                <a:cs typeface="Calibri" pitchFamily="34" charset="-120"/>
+              </a:rPr>
+              <a:t>code: bytes copied; mem: bytes reserved (code + data + .bss)</a:t>
+            </a:r>
+            <a:endParaRPr lang="en-US" sz="1600" dirty="0"/>
           </a:p>
         </p:txBody>
       </p:sp>
@@ -13234,598 +13400,1279 @@
                 <a:ea typeface="Cambria" pitchFamily="34" charset="-122"/>
                 <a:cs typeface="Cambria" pitchFamily="34" charset="-120"/>
               </a:rPr>
-              <a:t>The build command, option by option</a:t>
+              <a:t>What the builder does</a:t>
             </a:r>
             <a:endParaRPr lang="en-US" sz="3000" dirty="0"/>
           </a:p>
         </p:txBody>
       </p:sp>
-      <p:sp>
-        <p:nvSpPr>
-          <p:cNvPr id="3" name="Shape 1"/>
-          <p:cNvSpPr/>
-          <p:nvPr/>
-        </p:nvSpPr>
-        <p:spPr>
-          <a:xfrm>
-            <a:off x="548640" y="1463040"/>
-            <a:ext cx="7406640" cy="4754880"/>
-          </a:xfrm>
-          <a:prstGeom prst="roundRect">
-            <a:avLst>
-              <a:gd name="adj" fmla="val 1538"/>
-            </a:avLst>
-          </a:prstGeom>
-          <a:solidFill>
-            <a:srgbClr val="12202B"/>
-          </a:solidFill>
-          <a:ln w="12700">
-            <a:solidFill>
-              <a:srgbClr val="12202B"/>
-            </a:solidFill>
-            <a:prstDash val="solid"/>
-          </a:ln>
-        </p:spPr>
-      </p:sp>
-      <p:sp>
-        <p:nvSpPr>
-          <p:cNvPr id="4" name="Text 2"/>
-          <p:cNvSpPr txBox="1"/>
-          <p:nvPr/>
-        </p:nvSpPr>
-        <p:spPr>
-          <a:xfrm>
-            <a:off x="777240" y="1645920"/>
-            <a:ext cx="6949440" cy="4389120"/>
-          </a:xfrm>
-          <a:prstGeom prst="rect">
-            <a:avLst/>
-          </a:prstGeom>
-          <a:noFill/>
-          <a:ln/>
-        </p:spPr>
-        <p:txBody>
-          <a:bodyPr wrap="square" lIns="0" tIns="0" rIns="0" bIns="0" rtlCol="0" anchor="t"/>
-          <a:lstStyle/>
-          <a:p>
-            <a:pPr indent="0" marL="0">
-              <a:buNone/>
-            </a:pPr>
-            <a:r>
-              <a:rPr lang="en-US" sz="1650" dirty="0">
-                <a:solidFill>
-                  <a:srgbClr val="E6EDF2"/>
-                </a:solidFill>
-                <a:latin typeface="Courier New" pitchFamily="34" charset="0"/>
-                <a:ea typeface="Courier New" pitchFamily="34" charset="-122"/>
-                <a:cs typeface="Courier New" pitchFamily="34" charset="-120"/>
-              </a:rPr>
-              <a:t>python3 -m prg32 cartridge build work/hello/hello.S \</a:t>
-            </a:r>
-            <a:endParaRPr lang="en-US" sz="1650" dirty="0"/>
-          </a:p>
-          <a:p>
-            <a:pPr indent="0" marL="0">
-              <a:buNone/>
-            </a:pPr>
-            <a:r>
-              <a:rPr lang="en-US" sz="1650" dirty="0">
-                <a:solidFill>
-                  <a:srgbClr val="E6EDF2"/>
-                </a:solidFill>
-                <a:latin typeface="Courier New" pitchFamily="34" charset="0"/>
-                <a:ea typeface="Courier New" pitchFamily="34" charset="-122"/>
-                <a:cs typeface="Courier New" pitchFamily="34" charset="-120"/>
-              </a:rPr>
-              <a:t>  --portable \</a:t>
-            </a:r>
-            <a:endParaRPr lang="en-US" sz="1650" dirty="0"/>
-          </a:p>
-          <a:p>
-            <a:pPr indent="0" marL="0">
-              <a:buNone/>
-            </a:pPr>
-            <a:r>
-              <a:rPr lang="en-US" sz="1650" dirty="0">
-                <a:solidFill>
-                  <a:srgbClr val="E6EDF2"/>
-                </a:solidFill>
-                <a:latin typeface="Courier New" pitchFamily="34" charset="0"/>
-                <a:ea typeface="Courier New" pitchFamily="34" charset="-122"/>
-                <a:cs typeface="Courier New" pitchFamily="34" charset="-120"/>
-              </a:rPr>
-              <a:t>  --entry-prefix hello \</a:t>
-            </a:r>
-            <a:endParaRPr lang="en-US" sz="1650" dirty="0"/>
-          </a:p>
-          <a:p>
-            <a:pPr indent="0" marL="0">
-              <a:buNone/>
-            </a:pPr>
-            <a:r>
-              <a:rPr lang="en-US" sz="1650" dirty="0">
-                <a:solidFill>
-                  <a:srgbClr val="E6EDF2"/>
-                </a:solidFill>
-                <a:latin typeface="Courier New" pitchFamily="34" charset="0"/>
-                <a:ea typeface="Courier New" pitchFamily="34" charset="-122"/>
-                <a:cs typeface="Courier New" pitchFamily="34" charset="-120"/>
-              </a:rPr>
-              <a:t>  --name hello \</a:t>
-            </a:r>
-            <a:endParaRPr lang="en-US" sz="1650" dirty="0"/>
-          </a:p>
-          <a:p>
-            <a:pPr indent="0" marL="0">
-              <a:buNone/>
-            </a:pPr>
-            <a:r>
-              <a:rPr lang="en-US" sz="1650" dirty="0">
-                <a:solidFill>
-                  <a:srgbClr val="E6EDF2"/>
-                </a:solidFill>
-                <a:latin typeface="Courier New" pitchFamily="34" charset="0"/>
-                <a:ea typeface="Courier New" pitchFamily="34" charset="-122"/>
-                <a:cs typeface="Courier New" pitchFamily="34" charset="-120"/>
-              </a:rPr>
-              <a:t>  --out work/hello/hello.prg32</a:t>
-            </a:r>
-            <a:endParaRPr lang="en-US" sz="1650" dirty="0"/>
-          </a:p>
-        </p:txBody>
-      </p:sp>
-      <p:sp>
-        <p:nvSpPr>
-          <p:cNvPr id="5" name="Shape 3"/>
-          <p:cNvSpPr/>
-          <p:nvPr/>
-        </p:nvSpPr>
-        <p:spPr>
-          <a:xfrm>
-            <a:off x="8229600" y="1463040"/>
-            <a:ext cx="3413455" cy="1037844"/>
-          </a:xfrm>
-          <a:prstGeom prst="roundRect">
-            <a:avLst>
-              <a:gd name="adj" fmla="val 7048"/>
-            </a:avLst>
-          </a:prstGeom>
-          <a:solidFill>
-            <a:srgbClr val="EEF2F4"/>
-          </a:solidFill>
-          <a:ln w="12700">
-            <a:solidFill>
-              <a:srgbClr val="EEF2F4"/>
-            </a:solidFill>
-            <a:prstDash val="solid"/>
-          </a:ln>
-        </p:spPr>
-      </p:sp>
-      <p:sp>
-        <p:nvSpPr>
-          <p:cNvPr id="6" name="Text 4"/>
-          <p:cNvSpPr txBox="1"/>
-          <p:nvPr/>
-        </p:nvSpPr>
-        <p:spPr>
-          <a:xfrm>
-            <a:off x="8394192" y="1627632"/>
-            <a:ext cx="365760" cy="365760"/>
-          </a:xfrm>
-          <a:prstGeom prst="roundRect">
-            <a:avLst>
-              <a:gd name="adj" fmla="val 20000"/>
-            </a:avLst>
-          </a:prstGeom>
-          <a:solidFill>
-            <a:srgbClr val="C7791B"/>
-          </a:solidFill>
-          <a:ln>
-            <a:solidFill>
-              <a:srgbClr val="C7791B"/>
-            </a:solidFill>
-          </a:ln>
-        </p:spPr>
-        <p:txBody>
-          <a:bodyPr wrap="square" lIns="0" tIns="0" rIns="0" bIns="0" rtlCol="0" anchor="ctr"/>
-          <a:lstStyle/>
-          <a:p>
-            <a:pPr algn="ctr" indent="0" marL="0">
-              <a:buNone/>
-            </a:pPr>
-            <a:r>
-              <a:rPr lang="en-US" sz="1400" b="1" dirty="0">
-                <a:solidFill>
-                  <a:srgbClr val="FFFFFF"/>
-                </a:solidFill>
-                <a:latin typeface="Calibri" pitchFamily="34" charset="0"/>
-                <a:ea typeface="Calibri" pitchFamily="34" charset="-122"/>
-                <a:cs typeface="Calibri" pitchFamily="34" charset="-120"/>
-              </a:rPr>
-              <a:t>1</a:t>
-            </a:r>
-            <a:endParaRPr lang="en-US" sz="1400" dirty="0"/>
-          </a:p>
-        </p:txBody>
-      </p:sp>
-      <p:sp>
-        <p:nvSpPr>
-          <p:cNvPr id="7" name="Text 5"/>
-          <p:cNvSpPr txBox="1"/>
-          <p:nvPr/>
-        </p:nvSpPr>
-        <p:spPr>
-          <a:xfrm>
-            <a:off x="8915400" y="1600200"/>
-            <a:ext cx="2544775" cy="763524"/>
-          </a:xfrm>
-          <a:prstGeom prst="rect">
-            <a:avLst/>
-          </a:prstGeom>
-          <a:noFill/>
-          <a:ln/>
-        </p:spPr>
-        <p:txBody>
-          <a:bodyPr wrap="square" lIns="0" tIns="0" rIns="0" bIns="0" rtlCol="0" anchor="ctr"/>
-          <a:lstStyle/>
-          <a:p>
-            <a:pPr indent="0" marL="0">
-              <a:buNone/>
-            </a:pPr>
-            <a:r>
-              <a:rPr lang="en-US" sz="1600" dirty="0">
-                <a:solidFill>
-                  <a:srgbClr val="1B2530"/>
-                </a:solidFill>
-                <a:latin typeface="Calibri" pitchFamily="34" charset="0"/>
-                <a:ea typeface="Calibri" pitchFamily="34" charset="-122"/>
-                <a:cs typeface="Calibri" pitchFamily="34" charset="-120"/>
-              </a:rPr>
-              <a:t>--portable: use the ABI table. Always.</a:t>
-            </a:r>
-            <a:endParaRPr lang="en-US" sz="1600" dirty="0"/>
-          </a:p>
-        </p:txBody>
-      </p:sp>
-      <p:sp>
-        <p:nvSpPr>
-          <p:cNvPr id="8" name="Shape 6"/>
-          <p:cNvSpPr/>
-          <p:nvPr/>
-        </p:nvSpPr>
-        <p:spPr>
-          <a:xfrm>
-            <a:off x="8229600" y="2702052"/>
-            <a:ext cx="3413455" cy="1037844"/>
-          </a:xfrm>
-          <a:prstGeom prst="roundRect">
-            <a:avLst>
-              <a:gd name="adj" fmla="val 7048"/>
-            </a:avLst>
-          </a:prstGeom>
-          <a:solidFill>
-            <a:srgbClr val="EEF2F4"/>
-          </a:solidFill>
-          <a:ln w="12700">
-            <a:solidFill>
-              <a:srgbClr val="EEF2F4"/>
-            </a:solidFill>
-            <a:prstDash val="solid"/>
-          </a:ln>
-        </p:spPr>
-      </p:sp>
-      <p:sp>
-        <p:nvSpPr>
-          <p:cNvPr id="9" name="Text 7"/>
-          <p:cNvSpPr txBox="1"/>
-          <p:nvPr/>
-        </p:nvSpPr>
-        <p:spPr>
-          <a:xfrm>
-            <a:off x="8394192" y="2866644"/>
-            <a:ext cx="365760" cy="365760"/>
-          </a:xfrm>
-          <a:prstGeom prst="roundRect">
-            <a:avLst>
-              <a:gd name="adj" fmla="val 20000"/>
-            </a:avLst>
-          </a:prstGeom>
-          <a:solidFill>
-            <a:srgbClr val="C7791B"/>
-          </a:solidFill>
-          <a:ln>
-            <a:solidFill>
-              <a:srgbClr val="C7791B"/>
-            </a:solidFill>
-          </a:ln>
-        </p:spPr>
-        <p:txBody>
-          <a:bodyPr wrap="square" lIns="0" tIns="0" rIns="0" bIns="0" rtlCol="0" anchor="ctr"/>
-          <a:lstStyle/>
-          <a:p>
-            <a:pPr algn="ctr" indent="0" marL="0">
-              <a:buNone/>
-            </a:pPr>
-            <a:r>
-              <a:rPr lang="en-US" sz="1400" b="1" dirty="0">
-                <a:solidFill>
-                  <a:srgbClr val="FFFFFF"/>
-                </a:solidFill>
-                <a:latin typeface="Calibri" pitchFamily="34" charset="0"/>
-                <a:ea typeface="Calibri" pitchFamily="34" charset="-122"/>
-                <a:cs typeface="Calibri" pitchFamily="34" charset="-120"/>
-              </a:rPr>
-              <a:t>2</a:t>
-            </a:r>
-            <a:endParaRPr lang="en-US" sz="1400" dirty="0"/>
-          </a:p>
-        </p:txBody>
-      </p:sp>
-      <p:sp>
-        <p:nvSpPr>
-          <p:cNvPr id="10" name="Text 8"/>
-          <p:cNvSpPr txBox="1"/>
-          <p:nvPr/>
-        </p:nvSpPr>
-        <p:spPr>
-          <a:xfrm>
-            <a:off x="8915400" y="2839212"/>
-            <a:ext cx="2544775" cy="763524"/>
-          </a:xfrm>
-          <a:prstGeom prst="rect">
-            <a:avLst/>
-          </a:prstGeom>
-          <a:noFill/>
-          <a:ln/>
-        </p:spPr>
-        <p:txBody>
-          <a:bodyPr wrap="square" lIns="0" tIns="0" rIns="0" bIns="0" rtlCol="0" anchor="ctr"/>
-          <a:lstStyle/>
-          <a:p>
-            <a:pPr indent="0" marL="0">
-              <a:buNone/>
-            </a:pPr>
-            <a:r>
-              <a:rPr lang="en-US" sz="1600" dirty="0">
-                <a:solidFill>
-                  <a:srgbClr val="1B2530"/>
-                </a:solidFill>
-                <a:latin typeface="Calibri" pitchFamily="34" charset="0"/>
-                <a:ea typeface="Calibri" pitchFamily="34" charset="-122"/>
-                <a:cs typeface="Calibri" pitchFamily="34" charset="-120"/>
-              </a:rPr>
-              <a:t>--entry-prefix: must match your three function names</a:t>
-            </a:r>
-            <a:endParaRPr lang="en-US" sz="1600" dirty="0"/>
-          </a:p>
-        </p:txBody>
-      </p:sp>
-      <p:sp>
-        <p:nvSpPr>
-          <p:cNvPr id="11" name="Shape 9"/>
-          <p:cNvSpPr/>
-          <p:nvPr/>
-        </p:nvSpPr>
-        <p:spPr>
-          <a:xfrm>
-            <a:off x="8229600" y="3941064"/>
-            <a:ext cx="3413455" cy="1037844"/>
-          </a:xfrm>
-          <a:prstGeom prst="roundRect">
-            <a:avLst>
-              <a:gd name="adj" fmla="val 7048"/>
-            </a:avLst>
-          </a:prstGeom>
-          <a:solidFill>
-            <a:srgbClr val="EEF2F4"/>
-          </a:solidFill>
-          <a:ln w="12700">
-            <a:solidFill>
-              <a:srgbClr val="EEF2F4"/>
-            </a:solidFill>
-            <a:prstDash val="solid"/>
-          </a:ln>
-        </p:spPr>
-      </p:sp>
-      <p:sp>
-        <p:nvSpPr>
-          <p:cNvPr id="12" name="Text 10"/>
-          <p:cNvSpPr txBox="1"/>
-          <p:nvPr/>
-        </p:nvSpPr>
-        <p:spPr>
-          <a:xfrm>
-            <a:off x="8394192" y="4105656"/>
-            <a:ext cx="365760" cy="365760"/>
-          </a:xfrm>
-          <a:prstGeom prst="roundRect">
-            <a:avLst>
-              <a:gd name="adj" fmla="val 20000"/>
-            </a:avLst>
-          </a:prstGeom>
-          <a:solidFill>
-            <a:srgbClr val="C7791B"/>
-          </a:solidFill>
-          <a:ln>
-            <a:solidFill>
-              <a:srgbClr val="C7791B"/>
-            </a:solidFill>
-          </a:ln>
-        </p:spPr>
-        <p:txBody>
-          <a:bodyPr wrap="square" lIns="0" tIns="0" rIns="0" bIns="0" rtlCol="0" anchor="ctr"/>
-          <a:lstStyle/>
-          <a:p>
-            <a:pPr algn="ctr" indent="0" marL="0">
-              <a:buNone/>
-            </a:pPr>
-            <a:r>
-              <a:rPr lang="en-US" sz="1400" b="1" dirty="0">
-                <a:solidFill>
-                  <a:srgbClr val="FFFFFF"/>
-                </a:solidFill>
-                <a:latin typeface="Calibri" pitchFamily="34" charset="0"/>
-                <a:ea typeface="Calibri" pitchFamily="34" charset="-122"/>
-                <a:cs typeface="Calibri" pitchFamily="34" charset="-120"/>
-              </a:rPr>
-              <a:t>3</a:t>
-            </a:r>
-            <a:endParaRPr lang="en-US" sz="1400" dirty="0"/>
-          </a:p>
-        </p:txBody>
-      </p:sp>
-      <p:sp>
-        <p:nvSpPr>
-          <p:cNvPr id="13" name="Text 11"/>
-          <p:cNvSpPr txBox="1"/>
-          <p:nvPr/>
-        </p:nvSpPr>
-        <p:spPr>
-          <a:xfrm>
-            <a:off x="8915400" y="4078224"/>
-            <a:ext cx="2544775" cy="763524"/>
-          </a:xfrm>
-          <a:prstGeom prst="rect">
-            <a:avLst/>
-          </a:prstGeom>
-          <a:noFill/>
-          <a:ln/>
-        </p:spPr>
-        <p:txBody>
-          <a:bodyPr wrap="square" lIns="0" tIns="0" rIns="0" bIns="0" rtlCol="0" anchor="ctr"/>
-          <a:lstStyle/>
-          <a:p>
-            <a:pPr indent="0" marL="0">
-              <a:buNone/>
-            </a:pPr>
-            <a:r>
-              <a:rPr lang="en-US" sz="1600" dirty="0">
-                <a:solidFill>
-                  <a:srgbClr val="1B2530"/>
-                </a:solidFill>
-                <a:latin typeface="Calibri" pitchFamily="34" charset="0"/>
-                <a:ea typeface="Calibri" pitchFamily="34" charset="-122"/>
-                <a:cs typeface="Calibri" pitchFamily="34" charset="-120"/>
-              </a:rPr>
-              <a:t>--name: what the menu shows</a:t>
-            </a:r>
-            <a:endParaRPr lang="en-US" sz="1600" dirty="0"/>
-          </a:p>
-        </p:txBody>
-      </p:sp>
-      <p:sp>
-        <p:nvSpPr>
-          <p:cNvPr id="14" name="Shape 12"/>
-          <p:cNvSpPr/>
-          <p:nvPr/>
-        </p:nvSpPr>
-        <p:spPr>
-          <a:xfrm>
-            <a:off x="8229600" y="5180076"/>
-            <a:ext cx="3413455" cy="1037844"/>
-          </a:xfrm>
-          <a:prstGeom prst="roundRect">
-            <a:avLst>
-              <a:gd name="adj" fmla="val 7048"/>
-            </a:avLst>
-          </a:prstGeom>
-          <a:solidFill>
-            <a:srgbClr val="EEF2F4"/>
-          </a:solidFill>
-          <a:ln w="12700">
-            <a:solidFill>
-              <a:srgbClr val="EEF2F4"/>
-            </a:solidFill>
-            <a:prstDash val="solid"/>
-          </a:ln>
-        </p:spPr>
-      </p:sp>
-      <p:sp>
-        <p:nvSpPr>
-          <p:cNvPr id="15" name="Text 13"/>
-          <p:cNvSpPr txBox="1"/>
-          <p:nvPr/>
-        </p:nvSpPr>
-        <p:spPr>
-          <a:xfrm>
-            <a:off x="8394192" y="5344668"/>
-            <a:ext cx="365760" cy="365760"/>
-          </a:xfrm>
-          <a:prstGeom prst="roundRect">
-            <a:avLst>
-              <a:gd name="adj" fmla="val 20000"/>
-            </a:avLst>
-          </a:prstGeom>
-          <a:solidFill>
-            <a:srgbClr val="C7791B"/>
-          </a:solidFill>
-          <a:ln>
-            <a:solidFill>
-              <a:srgbClr val="C7791B"/>
-            </a:solidFill>
-          </a:ln>
-        </p:spPr>
-        <p:txBody>
-          <a:bodyPr wrap="square" lIns="0" tIns="0" rIns="0" bIns="0" rtlCol="0" anchor="ctr"/>
-          <a:lstStyle/>
-          <a:p>
-            <a:pPr algn="ctr" indent="0" marL="0">
-              <a:buNone/>
-            </a:pPr>
-            <a:r>
-              <a:rPr lang="en-US" sz="1400" b="1" dirty="0">
-                <a:solidFill>
-                  <a:srgbClr val="FFFFFF"/>
-                </a:solidFill>
-                <a:latin typeface="Calibri" pitchFamily="34" charset="0"/>
-                <a:ea typeface="Calibri" pitchFamily="34" charset="-122"/>
-                <a:cs typeface="Calibri" pitchFamily="34" charset="-120"/>
-              </a:rPr>
-              <a:t>4</a:t>
-            </a:r>
-            <a:endParaRPr lang="en-US" sz="1400" dirty="0"/>
-          </a:p>
-        </p:txBody>
-      </p:sp>
-      <p:sp>
-        <p:nvSpPr>
-          <p:cNvPr id="16" name="Text 14"/>
-          <p:cNvSpPr txBox="1"/>
-          <p:nvPr/>
-        </p:nvSpPr>
-        <p:spPr>
-          <a:xfrm>
-            <a:off x="8915400" y="5317236"/>
-            <a:ext cx="2544775" cy="763524"/>
-          </a:xfrm>
-          <a:prstGeom prst="rect">
-            <a:avLst/>
-          </a:prstGeom>
-          <a:noFill/>
-          <a:ln/>
-        </p:spPr>
-        <p:txBody>
-          <a:bodyPr wrap="square" lIns="0" tIns="0" rIns="0" bIns="0" rtlCol="0" anchor="ctr"/>
-          <a:lstStyle/>
-          <a:p>
-            <a:pPr indent="0" marL="0">
-              <a:buNone/>
-            </a:pPr>
-            <a:r>
-              <a:rPr lang="en-US" sz="1600" dirty="0">
-                <a:solidFill>
-                  <a:srgbClr val="1B2530"/>
-                </a:solidFill>
-                <a:latin typeface="Calibri" pitchFamily="34" charset="0"/>
-                <a:ea typeface="Calibri" pitchFamily="34" charset="-122"/>
-                <a:cs typeface="Calibri" pitchFamily="34" charset="-120"/>
-              </a:rPr>
-              <a:t>--out: the cartridge file</a:t>
-            </a:r>
-            <a:endParaRPr lang="en-US" sz="1600" dirty="0"/>
-          </a:p>
-        </p:txBody>
-      </p:sp>
+      <p:graphicFrame>
+        <p:nvGraphicFramePr>
+          <p:cNvPr id="23" name="Table 0"/>
+          <p:cNvGraphicFramePr>
+            <a:graphicFrameLocks noGrp="1"/>
+          </p:cNvGraphicFramePr>
+          <p:nvPr>
+            <p:extLst>
+              <p:ext uri="{D42A27DB-BD31-4B8C-83A1-F6EECF244321}">
+                <p14:modId xmlns:p14="http://schemas.microsoft.com/office/powerpoint/2010/main" val="1579011935"/>
+              </p:ext>
+            </p:extLst>
+          </p:nvPr>
+        </p:nvGraphicFramePr>
+        <p:xfrm>
+          <a:off x="548640" y="1463040"/>
+          <a:ext cx="11094415" cy="914400"/>
+        </p:xfrm>
+        <a:graphic>
+          <a:graphicData uri="http://schemas.openxmlformats.org/drawingml/2006/table">
+            <a:tbl>
+              <a:tblPr/>
+              <a:tblGrid>
+                <a:gridCol w="1849069"/>
+                <a:gridCol w="5547208"/>
+                <a:gridCol w="3698138"/>
+              </a:tblGrid>
+              <a:tr h="0">
+                <a:tc>
+                  <a:txBody>
+                    <a:bodyPr/>
+                    <a:lstStyle/>
+                    <a:p>
+                      <a:pPr indent="0" marL="0">
+                        <a:buNone/>
+                      </a:pPr>
+                      <a:r>
+                        <a:rPr lang="en-US" sz="2200" b="1" dirty="0">
+                          <a:solidFill>
+                            <a:srgbClr val="FFFFFF"/>
+                          </a:solidFill>
+                          <a:latin typeface="Calibri" pitchFamily="34" charset="0"/>
+                          <a:ea typeface="Calibri" pitchFamily="34" charset="-122"/>
+                          <a:cs typeface="Calibri" pitchFamily="34" charset="-120"/>
+                        </a:rPr>
+                        <a:t>Stage</a:t>
+                      </a:r>
+                      <a:endParaRPr lang="en-US" sz="2200" dirty="0">
+                        <a:latin typeface="Calibri" charset="0"/>
+                        <a:ea typeface="Calibri" charset="0"/>
+                        <a:cs typeface="Calibri" charset="0"/>
+                      </a:endParaRPr>
+                    </a:p>
+                  </a:txBody>
+                  <a:tcPr marL="101600" marR="101600" marT="50800" marB="50800" anchor="ctr">
+                    <a:lnL w="6350" cap="flat" cmpd="sng" algn="ctr">
+                      <a:solidFill>
+                        <a:srgbClr val="C9D2D8"/>
+                      </a:solidFill>
+                      <a:prstDash val="solid"/>
+                      <a:round/>
+                      <a:headEnd type="none" w="med" len="med"/>
+                      <a:tailEnd type="none" w="med" len="med"/>
+                    </a:lnL>
+                    <a:lnR w="6350" cap="flat" cmpd="sng" algn="ctr">
+                      <a:solidFill>
+                        <a:srgbClr val="C9D2D8"/>
+                      </a:solidFill>
+                      <a:prstDash val="solid"/>
+                      <a:round/>
+                      <a:headEnd type="none" w="med" len="med"/>
+                      <a:tailEnd type="none" w="med" len="med"/>
+                    </a:lnR>
+                    <a:lnT w="6350" cap="flat" cmpd="sng" algn="ctr">
+                      <a:solidFill>
+                        <a:srgbClr val="C9D2D8"/>
+                      </a:solidFill>
+                      <a:prstDash val="solid"/>
+                      <a:round/>
+                      <a:headEnd type="none" w="med" len="med"/>
+                      <a:tailEnd type="none" w="med" len="med"/>
+                    </a:lnT>
+                    <a:lnB w="6350" cap="flat" cmpd="sng" algn="ctr">
+                      <a:solidFill>
+                        <a:srgbClr val="C9D2D8"/>
+                      </a:solidFill>
+                      <a:prstDash val="solid"/>
+                      <a:round/>
+                      <a:headEnd type="none" w="med" len="med"/>
+                      <a:tailEnd type="none" w="med" len="med"/>
+                    </a:lnB>
+                    <a:solidFill>
+                      <a:srgbClr val="2E4A62"/>
+                    </a:solidFill>
+                  </a:tcPr>
+                </a:tc>
+                <a:tc>
+                  <a:txBody>
+                    <a:bodyPr/>
+                    <a:lstStyle/>
+                    <a:p>
+                      <a:pPr indent="0" marL="0">
+                        <a:buNone/>
+                      </a:pPr>
+                      <a:r>
+                        <a:rPr lang="en-US" sz="2200" b="1" dirty="0">
+                          <a:solidFill>
+                            <a:srgbClr val="FFFFFF"/>
+                          </a:solidFill>
+                          <a:latin typeface="Calibri" pitchFamily="34" charset="0"/>
+                          <a:ea typeface="Calibri" pitchFamily="34" charset="-122"/>
+                          <a:cs typeface="Calibri" pitchFamily="34" charset="-120"/>
+                        </a:rPr>
+                        <a:t>Tool</a:t>
+                      </a:r>
+                      <a:endParaRPr lang="en-US" sz="2200" dirty="0">
+                        <a:latin typeface="Calibri" charset="0"/>
+                        <a:ea typeface="Calibri" charset="0"/>
+                        <a:cs typeface="Calibri" charset="0"/>
+                      </a:endParaRPr>
+                    </a:p>
+                  </a:txBody>
+                  <a:tcPr marL="101600" marR="101600" marT="50800" marB="50800" anchor="ctr">
+                    <a:lnL w="6350" cap="flat" cmpd="sng" algn="ctr">
+                      <a:solidFill>
+                        <a:srgbClr val="C9D2D8"/>
+                      </a:solidFill>
+                      <a:prstDash val="solid"/>
+                      <a:round/>
+                      <a:headEnd type="none" w="med" len="med"/>
+                      <a:tailEnd type="none" w="med" len="med"/>
+                    </a:lnL>
+                    <a:lnR w="6350" cap="flat" cmpd="sng" algn="ctr">
+                      <a:solidFill>
+                        <a:srgbClr val="C9D2D8"/>
+                      </a:solidFill>
+                      <a:prstDash val="solid"/>
+                      <a:round/>
+                      <a:headEnd type="none" w="med" len="med"/>
+                      <a:tailEnd type="none" w="med" len="med"/>
+                    </a:lnR>
+                    <a:lnT w="6350" cap="flat" cmpd="sng" algn="ctr">
+                      <a:solidFill>
+                        <a:srgbClr val="C9D2D8"/>
+                      </a:solidFill>
+                      <a:prstDash val="solid"/>
+                      <a:round/>
+                      <a:headEnd type="none" w="med" len="med"/>
+                      <a:tailEnd type="none" w="med" len="med"/>
+                    </a:lnT>
+                    <a:lnB w="6350" cap="flat" cmpd="sng" algn="ctr">
+                      <a:solidFill>
+                        <a:srgbClr val="C9D2D8"/>
+                      </a:solidFill>
+                      <a:prstDash val="solid"/>
+                      <a:round/>
+                      <a:headEnd type="none" w="med" len="med"/>
+                      <a:tailEnd type="none" w="med" len="med"/>
+                    </a:lnB>
+                    <a:solidFill>
+                      <a:srgbClr val="2E4A62"/>
+                    </a:solidFill>
+                  </a:tcPr>
+                </a:tc>
+                <a:tc>
+                  <a:txBody>
+                    <a:bodyPr/>
+                    <a:lstStyle/>
+                    <a:p>
+                      <a:pPr indent="0" marL="0">
+                        <a:buNone/>
+                      </a:pPr>
+                      <a:r>
+                        <a:rPr lang="en-US" sz="2200" b="1" dirty="0">
+                          <a:solidFill>
+                            <a:srgbClr val="FFFFFF"/>
+                          </a:solidFill>
+                          <a:latin typeface="Calibri" pitchFamily="34" charset="0"/>
+                          <a:ea typeface="Calibri" pitchFamily="34" charset="-122"/>
+                          <a:cs typeface="Calibri" pitchFamily="34" charset="-120"/>
+                        </a:rPr>
+                        <a:t>Result</a:t>
+                      </a:r>
+                      <a:endParaRPr lang="en-US" sz="2200" dirty="0">
+                        <a:latin typeface="Calibri" charset="0"/>
+                        <a:ea typeface="Calibri" charset="0"/>
+                        <a:cs typeface="Calibri" charset="0"/>
+                      </a:endParaRPr>
+                    </a:p>
+                  </a:txBody>
+                  <a:tcPr marL="101600" marR="101600" marT="50800" marB="50800" anchor="ctr">
+                    <a:lnL w="6350" cap="flat" cmpd="sng" algn="ctr">
+                      <a:solidFill>
+                        <a:srgbClr val="C9D2D8"/>
+                      </a:solidFill>
+                      <a:prstDash val="solid"/>
+                      <a:round/>
+                      <a:headEnd type="none" w="med" len="med"/>
+                      <a:tailEnd type="none" w="med" len="med"/>
+                    </a:lnL>
+                    <a:lnR w="6350" cap="flat" cmpd="sng" algn="ctr">
+                      <a:solidFill>
+                        <a:srgbClr val="C9D2D8"/>
+                      </a:solidFill>
+                      <a:prstDash val="solid"/>
+                      <a:round/>
+                      <a:headEnd type="none" w="med" len="med"/>
+                      <a:tailEnd type="none" w="med" len="med"/>
+                    </a:lnR>
+                    <a:lnT w="6350" cap="flat" cmpd="sng" algn="ctr">
+                      <a:solidFill>
+                        <a:srgbClr val="C9D2D8"/>
+                      </a:solidFill>
+                      <a:prstDash val="solid"/>
+                      <a:round/>
+                      <a:headEnd type="none" w="med" len="med"/>
+                      <a:tailEnd type="none" w="med" len="med"/>
+                    </a:lnT>
+                    <a:lnB w="6350" cap="flat" cmpd="sng" algn="ctr">
+                      <a:solidFill>
+                        <a:srgbClr val="C9D2D8"/>
+                      </a:solidFill>
+                      <a:prstDash val="solid"/>
+                      <a:round/>
+                      <a:headEnd type="none" w="med" len="med"/>
+                      <a:tailEnd type="none" w="med" len="med"/>
+                    </a:lnB>
+                    <a:solidFill>
+                      <a:srgbClr val="2E4A62"/>
+                    </a:solidFill>
+                  </a:tcPr>
+                </a:tc>
+              </a:tr>
+              <a:tr h="0">
+                <a:tc>
+                  <a:txBody>
+                    <a:bodyPr/>
+                    <a:lstStyle/>
+                    <a:p>
+                      <a:pPr indent="0" marL="0">
+                        <a:buNone/>
+                      </a:pPr>
+                      <a:r>
+                        <a:rPr lang="en-US" sz="2200" b="1" dirty="0">
+                          <a:solidFill>
+                            <a:srgbClr val="1B2530"/>
+                          </a:solidFill>
+                          <a:latin typeface="Calibri" pitchFamily="34" charset="0"/>
+                          <a:ea typeface="Calibri" pitchFamily="34" charset="-122"/>
+                          <a:cs typeface="Calibri" pitchFamily="34" charset="-120"/>
+                        </a:rPr>
+                        <a:t>Compile</a:t>
+                      </a:r>
+                      <a:endParaRPr lang="en-US" sz="2200" dirty="0">
+                        <a:latin typeface="Calibri" charset="0"/>
+                        <a:ea typeface="Calibri" charset="0"/>
+                        <a:cs typeface="Calibri" charset="0"/>
+                      </a:endParaRPr>
+                    </a:p>
+                  </a:txBody>
+                  <a:tcPr marL="101600" marR="101600" marT="50800" marB="50800" anchor="ctr">
+                    <a:lnL w="6350" cap="flat" cmpd="sng" algn="ctr">
+                      <a:solidFill>
+                        <a:srgbClr val="C9D2D8"/>
+                      </a:solidFill>
+                      <a:prstDash val="solid"/>
+                      <a:round/>
+                      <a:headEnd type="none" w="med" len="med"/>
+                      <a:tailEnd type="none" w="med" len="med"/>
+                    </a:lnL>
+                    <a:lnR w="6350" cap="flat" cmpd="sng" algn="ctr">
+                      <a:solidFill>
+                        <a:srgbClr val="C9D2D8"/>
+                      </a:solidFill>
+                      <a:prstDash val="solid"/>
+                      <a:round/>
+                      <a:headEnd type="none" w="med" len="med"/>
+                      <a:tailEnd type="none" w="med" len="med"/>
+                    </a:lnR>
+                    <a:lnT w="6350" cap="flat" cmpd="sng" algn="ctr">
+                      <a:solidFill>
+                        <a:srgbClr val="C9D2D8"/>
+                      </a:solidFill>
+                      <a:prstDash val="solid"/>
+                      <a:round/>
+                      <a:headEnd type="none" w="med" len="med"/>
+                      <a:tailEnd type="none" w="med" len="med"/>
+                    </a:lnT>
+                    <a:lnB w="6350" cap="flat" cmpd="sng" algn="ctr">
+                      <a:solidFill>
+                        <a:srgbClr val="C9D2D8"/>
+                      </a:solidFill>
+                      <a:prstDash val="solid"/>
+                      <a:round/>
+                      <a:headEnd type="none" w="med" len="med"/>
+                      <a:tailEnd type="none" w="med" len="med"/>
+                    </a:lnB>
+                    <a:solidFill>
+                      <a:srgbClr val="EEF2F4"/>
+                    </a:solidFill>
+                  </a:tcPr>
+                </a:tc>
+                <a:tc>
+                  <a:txBody>
+                    <a:bodyPr/>
+                    <a:lstStyle/>
+                    <a:p>
+                      <a:pPr indent="0" marL="0">
+                        <a:buNone/>
+                      </a:pPr>
+                      <a:r>
+                        <a:rPr lang="en-US" sz="2200" dirty="0">
+                          <a:solidFill>
+                            <a:srgbClr val="1B2530"/>
+                          </a:solidFill>
+                          <a:latin typeface="Calibri" pitchFamily="34" charset="0"/>
+                          <a:ea typeface="Calibri" pitchFamily="34" charset="-122"/>
+                          <a:cs typeface="Calibri" pitchFamily="34" charset="-120"/>
+                        </a:rPr>
+                        <a:t>riscv32-esp-elf-gcc -march=rv32imac -mabi=ilp32</a:t>
+                      </a:r>
+                      <a:endParaRPr lang="en-US" sz="2200" dirty="0">
+                        <a:latin typeface="Calibri" charset="0"/>
+                        <a:ea typeface="Calibri" charset="0"/>
+                        <a:cs typeface="Calibri" charset="0"/>
+                      </a:endParaRPr>
+                    </a:p>
+                  </a:txBody>
+                  <a:tcPr marL="101600" marR="101600" marT="50800" marB="50800" anchor="ctr">
+                    <a:lnL w="6350" cap="flat" cmpd="sng" algn="ctr">
+                      <a:solidFill>
+                        <a:srgbClr val="C9D2D8"/>
+                      </a:solidFill>
+                      <a:prstDash val="solid"/>
+                      <a:round/>
+                      <a:headEnd type="none" w="med" len="med"/>
+                      <a:tailEnd type="none" w="med" len="med"/>
+                    </a:lnL>
+                    <a:lnR w="6350" cap="flat" cmpd="sng" algn="ctr">
+                      <a:solidFill>
+                        <a:srgbClr val="C9D2D8"/>
+                      </a:solidFill>
+                      <a:prstDash val="solid"/>
+                      <a:round/>
+                      <a:headEnd type="none" w="med" len="med"/>
+                      <a:tailEnd type="none" w="med" len="med"/>
+                    </a:lnR>
+                    <a:lnT w="6350" cap="flat" cmpd="sng" algn="ctr">
+                      <a:solidFill>
+                        <a:srgbClr val="C9D2D8"/>
+                      </a:solidFill>
+                      <a:prstDash val="solid"/>
+                      <a:round/>
+                      <a:headEnd type="none" w="med" len="med"/>
+                      <a:tailEnd type="none" w="med" len="med"/>
+                    </a:lnT>
+                    <a:lnB w="6350" cap="flat" cmpd="sng" algn="ctr">
+                      <a:solidFill>
+                        <a:srgbClr val="C9D2D8"/>
+                      </a:solidFill>
+                      <a:prstDash val="solid"/>
+                      <a:round/>
+                      <a:headEnd type="none" w="med" len="med"/>
+                      <a:tailEnd type="none" w="med" len="med"/>
+                    </a:lnB>
+                    <a:solidFill>
+                      <a:srgbClr val="EEF2F4"/>
+                    </a:solidFill>
+                  </a:tcPr>
+                </a:tc>
+                <a:tc>
+                  <a:txBody>
+                    <a:bodyPr/>
+                    <a:lstStyle/>
+                    <a:p>
+                      <a:pPr indent="0" marL="0">
+                        <a:buNone/>
+                      </a:pPr>
+                      <a:r>
+                        <a:rPr lang="en-US" sz="2200" dirty="0">
+                          <a:solidFill>
+                            <a:srgbClr val="1B2530"/>
+                          </a:solidFill>
+                          <a:latin typeface="Calibri" pitchFamily="34" charset="0"/>
+                          <a:ea typeface="Calibri" pitchFamily="34" charset="-122"/>
+                          <a:cs typeface="Calibri" pitchFamily="34" charset="-120"/>
+                        </a:rPr>
+                        <a:t>game.o</a:t>
+                      </a:r>
+                      <a:endParaRPr lang="en-US" sz="2200" dirty="0">
+                        <a:latin typeface="Calibri" charset="0"/>
+                        <a:ea typeface="Calibri" charset="0"/>
+                        <a:cs typeface="Calibri" charset="0"/>
+                      </a:endParaRPr>
+                    </a:p>
+                  </a:txBody>
+                  <a:tcPr marL="101600" marR="101600" marT="50800" marB="50800" anchor="ctr">
+                    <a:lnL w="6350" cap="flat" cmpd="sng" algn="ctr">
+                      <a:solidFill>
+                        <a:srgbClr val="C9D2D8"/>
+                      </a:solidFill>
+                      <a:prstDash val="solid"/>
+                      <a:round/>
+                      <a:headEnd type="none" w="med" len="med"/>
+                      <a:tailEnd type="none" w="med" len="med"/>
+                    </a:lnL>
+                    <a:lnR w="6350" cap="flat" cmpd="sng" algn="ctr">
+                      <a:solidFill>
+                        <a:srgbClr val="C9D2D8"/>
+                      </a:solidFill>
+                      <a:prstDash val="solid"/>
+                      <a:round/>
+                      <a:headEnd type="none" w="med" len="med"/>
+                      <a:tailEnd type="none" w="med" len="med"/>
+                    </a:lnR>
+                    <a:lnT w="6350" cap="flat" cmpd="sng" algn="ctr">
+                      <a:solidFill>
+                        <a:srgbClr val="C9D2D8"/>
+                      </a:solidFill>
+                      <a:prstDash val="solid"/>
+                      <a:round/>
+                      <a:headEnd type="none" w="med" len="med"/>
+                      <a:tailEnd type="none" w="med" len="med"/>
+                    </a:lnT>
+                    <a:lnB w="6350" cap="flat" cmpd="sng" algn="ctr">
+                      <a:solidFill>
+                        <a:srgbClr val="C9D2D8"/>
+                      </a:solidFill>
+                      <a:prstDash val="solid"/>
+                      <a:round/>
+                      <a:headEnd type="none" w="med" len="med"/>
+                      <a:tailEnd type="none" w="med" len="med"/>
+                    </a:lnB>
+                    <a:solidFill>
+                      <a:srgbClr val="EEF2F4"/>
+                    </a:solidFill>
+                  </a:tcPr>
+                </a:tc>
+              </a:tr>
+              <a:tr h="0">
+                <a:tc>
+                  <a:txBody>
+                    <a:bodyPr/>
+                    <a:lstStyle/>
+                    <a:p>
+                      <a:pPr indent="0" marL="0">
+                        <a:buNone/>
+                      </a:pPr>
+                      <a:r>
+                        <a:rPr lang="en-US" sz="2200" b="1" dirty="0">
+                          <a:solidFill>
+                            <a:srgbClr val="1B2530"/>
+                          </a:solidFill>
+                          <a:latin typeface="Calibri" pitchFamily="34" charset="0"/>
+                          <a:ea typeface="Calibri" pitchFamily="34" charset="-122"/>
+                          <a:cs typeface="Calibri" pitchFamily="34" charset="-120"/>
+                        </a:rPr>
+                        <a:t>C only</a:t>
+                      </a:r>
+                      <a:endParaRPr lang="en-US" sz="2200" dirty="0">
+                        <a:latin typeface="Calibri" charset="0"/>
+                        <a:ea typeface="Calibri" charset="0"/>
+                        <a:cs typeface="Calibri" charset="0"/>
+                      </a:endParaRPr>
+                    </a:p>
+                  </a:txBody>
+                  <a:tcPr marL="101600" marR="101600" marT="50800" marB="50800" anchor="ctr">
+                    <a:lnL w="6350" cap="flat" cmpd="sng" algn="ctr">
+                      <a:solidFill>
+                        <a:srgbClr val="C9D2D8"/>
+                      </a:solidFill>
+                      <a:prstDash val="solid"/>
+                      <a:round/>
+                      <a:headEnd type="none" w="med" len="med"/>
+                      <a:tailEnd type="none" w="med" len="med"/>
+                    </a:lnL>
+                    <a:lnR w="6350" cap="flat" cmpd="sng" algn="ctr">
+                      <a:solidFill>
+                        <a:srgbClr val="C9D2D8"/>
+                      </a:solidFill>
+                      <a:prstDash val="solid"/>
+                      <a:round/>
+                      <a:headEnd type="none" w="med" len="med"/>
+                      <a:tailEnd type="none" w="med" len="med"/>
+                    </a:lnR>
+                    <a:lnT w="6350" cap="flat" cmpd="sng" algn="ctr">
+                      <a:solidFill>
+                        <a:srgbClr val="C9D2D8"/>
+                      </a:solidFill>
+                      <a:prstDash val="solid"/>
+                      <a:round/>
+                      <a:headEnd type="none" w="med" len="med"/>
+                      <a:tailEnd type="none" w="med" len="med"/>
+                    </a:lnT>
+                    <a:lnB w="6350" cap="flat" cmpd="sng" algn="ctr">
+                      <a:solidFill>
+                        <a:srgbClr val="C9D2D8"/>
+                      </a:solidFill>
+                      <a:prstDash val="solid"/>
+                      <a:round/>
+                      <a:headEnd type="none" w="med" len="med"/>
+                      <a:tailEnd type="none" w="med" len="med"/>
+                    </a:lnB>
+                    <a:solidFill>
+                      <a:srgbClr val="FFFFFF"/>
+                    </a:solidFill>
+                  </a:tcPr>
+                </a:tc>
+                <a:tc>
+                  <a:txBody>
+                    <a:bodyPr/>
+                    <a:lstStyle/>
+                    <a:p>
+                      <a:pPr indent="0" marL="0">
+                        <a:buNone/>
+                      </a:pPr>
+                      <a:r>
+                        <a:rPr lang="en-US" sz="2200" dirty="0">
+                          <a:solidFill>
+                            <a:srgbClr val="1B2530"/>
+                          </a:solidFill>
+                          <a:latin typeface="Calibri" pitchFamily="34" charset="0"/>
+                          <a:ea typeface="Calibri" pitchFamily="34" charset="-122"/>
+                          <a:cs typeface="Calibri" pitchFamily="34" charset="-120"/>
+                        </a:rPr>
+                        <a:t>-Os -ffreestanding -fno-builtin -mcmodel=medany</a:t>
+                      </a:r>
+                      <a:endParaRPr lang="en-US" sz="2200" dirty="0">
+                        <a:latin typeface="Calibri" charset="0"/>
+                        <a:ea typeface="Calibri" charset="0"/>
+                        <a:cs typeface="Calibri" charset="0"/>
+                      </a:endParaRPr>
+                    </a:p>
+                  </a:txBody>
+                  <a:tcPr marL="101600" marR="101600" marT="50800" marB="50800" anchor="ctr">
+                    <a:lnL w="6350" cap="flat" cmpd="sng" algn="ctr">
+                      <a:solidFill>
+                        <a:srgbClr val="C9D2D8"/>
+                      </a:solidFill>
+                      <a:prstDash val="solid"/>
+                      <a:round/>
+                      <a:headEnd type="none" w="med" len="med"/>
+                      <a:tailEnd type="none" w="med" len="med"/>
+                    </a:lnL>
+                    <a:lnR w="6350" cap="flat" cmpd="sng" algn="ctr">
+                      <a:solidFill>
+                        <a:srgbClr val="C9D2D8"/>
+                      </a:solidFill>
+                      <a:prstDash val="solid"/>
+                      <a:round/>
+                      <a:headEnd type="none" w="med" len="med"/>
+                      <a:tailEnd type="none" w="med" len="med"/>
+                    </a:lnR>
+                    <a:lnT w="6350" cap="flat" cmpd="sng" algn="ctr">
+                      <a:solidFill>
+                        <a:srgbClr val="C9D2D8"/>
+                      </a:solidFill>
+                      <a:prstDash val="solid"/>
+                      <a:round/>
+                      <a:headEnd type="none" w="med" len="med"/>
+                      <a:tailEnd type="none" w="med" len="med"/>
+                    </a:lnT>
+                    <a:lnB w="6350" cap="flat" cmpd="sng" algn="ctr">
+                      <a:solidFill>
+                        <a:srgbClr val="C9D2D8"/>
+                      </a:solidFill>
+                      <a:prstDash val="solid"/>
+                      <a:round/>
+                      <a:headEnd type="none" w="med" len="med"/>
+                      <a:tailEnd type="none" w="med" len="med"/>
+                    </a:lnB>
+                    <a:solidFill>
+                      <a:srgbClr val="FFFFFF"/>
+                    </a:solidFill>
+                  </a:tcPr>
+                </a:tc>
+                <a:tc>
+                  <a:txBody>
+                    <a:bodyPr/>
+                    <a:lstStyle/>
+                    <a:p>
+                      <a:pPr indent="0" marL="0">
+                        <a:buNone/>
+                      </a:pPr>
+                      <a:r>
+                        <a:rPr lang="en-US" sz="2200" dirty="0">
+                          <a:solidFill>
+                            <a:srgbClr val="1B2530"/>
+                          </a:solidFill>
+                          <a:latin typeface="Calibri" pitchFamily="34" charset="0"/>
+                          <a:ea typeface="Calibri" pitchFamily="34" charset="-122"/>
+                          <a:cs typeface="Calibri" pitchFamily="34" charset="-120"/>
+                        </a:rPr>
+                        <a:t>small, position-tolerant code</a:t>
+                      </a:r>
+                      <a:endParaRPr lang="en-US" sz="2200" dirty="0">
+                        <a:latin typeface="Calibri" charset="0"/>
+                        <a:ea typeface="Calibri" charset="0"/>
+                        <a:cs typeface="Calibri" charset="0"/>
+                      </a:endParaRPr>
+                    </a:p>
+                  </a:txBody>
+                  <a:tcPr marL="101600" marR="101600" marT="50800" marB="50800" anchor="ctr">
+                    <a:lnL w="6350" cap="flat" cmpd="sng" algn="ctr">
+                      <a:solidFill>
+                        <a:srgbClr val="C9D2D8"/>
+                      </a:solidFill>
+                      <a:prstDash val="solid"/>
+                      <a:round/>
+                      <a:headEnd type="none" w="med" len="med"/>
+                      <a:tailEnd type="none" w="med" len="med"/>
+                    </a:lnL>
+                    <a:lnR w="6350" cap="flat" cmpd="sng" algn="ctr">
+                      <a:solidFill>
+                        <a:srgbClr val="C9D2D8"/>
+                      </a:solidFill>
+                      <a:prstDash val="solid"/>
+                      <a:round/>
+                      <a:headEnd type="none" w="med" len="med"/>
+                      <a:tailEnd type="none" w="med" len="med"/>
+                    </a:lnR>
+                    <a:lnT w="6350" cap="flat" cmpd="sng" algn="ctr">
+                      <a:solidFill>
+                        <a:srgbClr val="C9D2D8"/>
+                      </a:solidFill>
+                      <a:prstDash val="solid"/>
+                      <a:round/>
+                      <a:headEnd type="none" w="med" len="med"/>
+                      <a:tailEnd type="none" w="med" len="med"/>
+                    </a:lnT>
+                    <a:lnB w="6350" cap="flat" cmpd="sng" algn="ctr">
+                      <a:solidFill>
+                        <a:srgbClr val="C9D2D8"/>
+                      </a:solidFill>
+                      <a:prstDash val="solid"/>
+                      <a:round/>
+                      <a:headEnd type="none" w="med" len="med"/>
+                      <a:tailEnd type="none" w="med" len="med"/>
+                    </a:lnB>
+                    <a:solidFill>
+                      <a:srgbClr val="FFFFFF"/>
+                    </a:solidFill>
+                  </a:tcPr>
+                </a:tc>
+              </a:tr>
+              <a:tr h="0">
+                <a:tc>
+                  <a:txBody>
+                    <a:bodyPr/>
+                    <a:lstStyle/>
+                    <a:p>
+                      <a:pPr indent="0" marL="0">
+                        <a:buNone/>
+                      </a:pPr>
+                      <a:r>
+                        <a:rPr lang="en-US" sz="2200" b="1" dirty="0">
+                          <a:solidFill>
+                            <a:srgbClr val="1B2530"/>
+                          </a:solidFill>
+                          <a:latin typeface="Calibri" pitchFamily="34" charset="0"/>
+                          <a:ea typeface="Calibri" pitchFamily="34" charset="-122"/>
+                          <a:cs typeface="Calibri" pitchFamily="34" charset="-120"/>
+                        </a:rPr>
+                        <a:t>Stubs</a:t>
+                      </a:r>
+                      <a:endParaRPr lang="en-US" sz="2200" dirty="0">
+                        <a:latin typeface="Calibri" charset="0"/>
+                        <a:ea typeface="Calibri" charset="0"/>
+                        <a:cs typeface="Calibri" charset="0"/>
+                      </a:endParaRPr>
+                    </a:p>
+                  </a:txBody>
+                  <a:tcPr marL="101600" marR="101600" marT="50800" marB="50800" anchor="ctr">
+                    <a:lnL w="6350" cap="flat" cmpd="sng" algn="ctr">
+                      <a:solidFill>
+                        <a:srgbClr val="C9D2D8"/>
+                      </a:solidFill>
+                      <a:prstDash val="solid"/>
+                      <a:round/>
+                      <a:headEnd type="none" w="med" len="med"/>
+                      <a:tailEnd type="none" w="med" len="med"/>
+                    </a:lnL>
+                    <a:lnR w="6350" cap="flat" cmpd="sng" algn="ctr">
+                      <a:solidFill>
+                        <a:srgbClr val="C9D2D8"/>
+                      </a:solidFill>
+                      <a:prstDash val="solid"/>
+                      <a:round/>
+                      <a:headEnd type="none" w="med" len="med"/>
+                      <a:tailEnd type="none" w="med" len="med"/>
+                    </a:lnR>
+                    <a:lnT w="6350" cap="flat" cmpd="sng" algn="ctr">
+                      <a:solidFill>
+                        <a:srgbClr val="C9D2D8"/>
+                      </a:solidFill>
+                      <a:prstDash val="solid"/>
+                      <a:round/>
+                      <a:headEnd type="none" w="med" len="med"/>
+                      <a:tailEnd type="none" w="med" len="med"/>
+                    </a:lnT>
+                    <a:lnB w="6350" cap="flat" cmpd="sng" algn="ctr">
+                      <a:solidFill>
+                        <a:srgbClr val="C9D2D8"/>
+                      </a:solidFill>
+                      <a:prstDash val="solid"/>
+                      <a:round/>
+                      <a:headEnd type="none" w="med" len="med"/>
+                      <a:tailEnd type="none" w="med" len="med"/>
+                    </a:lnB>
+                    <a:solidFill>
+                      <a:srgbClr val="EEF2F4"/>
+                    </a:solidFill>
+                  </a:tcPr>
+                </a:tc>
+                <a:tc>
+                  <a:txBody>
+                    <a:bodyPr/>
+                    <a:lstStyle/>
+                    <a:p>
+                      <a:pPr indent="0" marL="0">
+                        <a:buNone/>
+                      </a:pPr>
+                      <a:r>
+                        <a:rPr lang="en-US" sz="2200" dirty="0">
+                          <a:solidFill>
+                            <a:srgbClr val="1B2530"/>
+                          </a:solidFill>
+                          <a:latin typeface="Calibri" pitchFamily="34" charset="0"/>
+                          <a:ea typeface="Calibri" pitchFamily="34" charset="-122"/>
+                          <a:cs typeface="Calibri" pitchFamily="34" charset="-120"/>
+                        </a:rPr>
+                        <a:t>generated portable_stubs.S</a:t>
+                      </a:r>
+                      <a:endParaRPr lang="en-US" sz="2200" dirty="0">
+                        <a:latin typeface="Calibri" charset="0"/>
+                        <a:ea typeface="Calibri" charset="0"/>
+                        <a:cs typeface="Calibri" charset="0"/>
+                      </a:endParaRPr>
+                    </a:p>
+                  </a:txBody>
+                  <a:tcPr marL="101600" marR="101600" marT="50800" marB="50800" anchor="ctr">
+                    <a:lnL w="6350" cap="flat" cmpd="sng" algn="ctr">
+                      <a:solidFill>
+                        <a:srgbClr val="C9D2D8"/>
+                      </a:solidFill>
+                      <a:prstDash val="solid"/>
+                      <a:round/>
+                      <a:headEnd type="none" w="med" len="med"/>
+                      <a:tailEnd type="none" w="med" len="med"/>
+                    </a:lnL>
+                    <a:lnR w="6350" cap="flat" cmpd="sng" algn="ctr">
+                      <a:solidFill>
+                        <a:srgbClr val="C9D2D8"/>
+                      </a:solidFill>
+                      <a:prstDash val="solid"/>
+                      <a:round/>
+                      <a:headEnd type="none" w="med" len="med"/>
+                      <a:tailEnd type="none" w="med" len="med"/>
+                    </a:lnR>
+                    <a:lnT w="6350" cap="flat" cmpd="sng" algn="ctr">
+                      <a:solidFill>
+                        <a:srgbClr val="C9D2D8"/>
+                      </a:solidFill>
+                      <a:prstDash val="solid"/>
+                      <a:round/>
+                      <a:headEnd type="none" w="med" len="med"/>
+                      <a:tailEnd type="none" w="med" len="med"/>
+                    </a:lnT>
+                    <a:lnB w="6350" cap="flat" cmpd="sng" algn="ctr">
+                      <a:solidFill>
+                        <a:srgbClr val="C9D2D8"/>
+                      </a:solidFill>
+                      <a:prstDash val="solid"/>
+                      <a:round/>
+                      <a:headEnd type="none" w="med" len="med"/>
+                      <a:tailEnd type="none" w="med" len="med"/>
+                    </a:lnB>
+                    <a:solidFill>
+                      <a:srgbClr val="EEF2F4"/>
+                    </a:solidFill>
+                  </a:tcPr>
+                </a:tc>
+                <a:tc>
+                  <a:txBody>
+                    <a:bodyPr/>
+                    <a:lstStyle/>
+                    <a:p>
+                      <a:pPr indent="0" marL="0">
+                        <a:buNone/>
+                      </a:pPr>
+                      <a:r>
+                        <a:rPr lang="en-US" sz="2200" dirty="0">
+                          <a:solidFill>
+                            <a:srgbClr val="1B2530"/>
+                          </a:solidFill>
+                          <a:latin typeface="Calibri" pitchFamily="34" charset="0"/>
+                          <a:ea typeface="Calibri" pitchFamily="34" charset="-122"/>
+                          <a:cs typeface="Calibri" pitchFamily="34" charset="-120"/>
+                        </a:rPr>
+                        <a:t>139 ABI stubs + 3 trampolines</a:t>
+                      </a:r>
+                      <a:endParaRPr lang="en-US" sz="2200" dirty="0">
+                        <a:latin typeface="Calibri" charset="0"/>
+                        <a:ea typeface="Calibri" charset="0"/>
+                        <a:cs typeface="Calibri" charset="0"/>
+                      </a:endParaRPr>
+                    </a:p>
+                  </a:txBody>
+                  <a:tcPr marL="101600" marR="101600" marT="50800" marB="50800" anchor="ctr">
+                    <a:lnL w="6350" cap="flat" cmpd="sng" algn="ctr">
+                      <a:solidFill>
+                        <a:srgbClr val="C9D2D8"/>
+                      </a:solidFill>
+                      <a:prstDash val="solid"/>
+                      <a:round/>
+                      <a:headEnd type="none" w="med" len="med"/>
+                      <a:tailEnd type="none" w="med" len="med"/>
+                    </a:lnL>
+                    <a:lnR w="6350" cap="flat" cmpd="sng" algn="ctr">
+                      <a:solidFill>
+                        <a:srgbClr val="C9D2D8"/>
+                      </a:solidFill>
+                      <a:prstDash val="solid"/>
+                      <a:round/>
+                      <a:headEnd type="none" w="med" len="med"/>
+                      <a:tailEnd type="none" w="med" len="med"/>
+                    </a:lnR>
+                    <a:lnT w="6350" cap="flat" cmpd="sng" algn="ctr">
+                      <a:solidFill>
+                        <a:srgbClr val="C9D2D8"/>
+                      </a:solidFill>
+                      <a:prstDash val="solid"/>
+                      <a:round/>
+                      <a:headEnd type="none" w="med" len="med"/>
+                      <a:tailEnd type="none" w="med" len="med"/>
+                    </a:lnT>
+                    <a:lnB w="6350" cap="flat" cmpd="sng" algn="ctr">
+                      <a:solidFill>
+                        <a:srgbClr val="C9D2D8"/>
+                      </a:solidFill>
+                      <a:prstDash val="solid"/>
+                      <a:round/>
+                      <a:headEnd type="none" w="med" len="med"/>
+                      <a:tailEnd type="none" w="med" len="med"/>
+                    </a:lnB>
+                    <a:solidFill>
+                      <a:srgbClr val="EEF2F4"/>
+                    </a:solidFill>
+                  </a:tcPr>
+                </a:tc>
+              </a:tr>
+              <a:tr h="0">
+                <a:tc>
+                  <a:txBody>
+                    <a:bodyPr/>
+                    <a:lstStyle/>
+                    <a:p>
+                      <a:pPr indent="0" marL="0">
+                        <a:buNone/>
+                      </a:pPr>
+                      <a:r>
+                        <a:rPr lang="en-US" sz="2200" b="1" dirty="0">
+                          <a:solidFill>
+                            <a:srgbClr val="1B2530"/>
+                          </a:solidFill>
+                          <a:latin typeface="Calibri" pitchFamily="34" charset="0"/>
+                          <a:ea typeface="Calibri" pitchFamily="34" charset="-122"/>
+                          <a:cs typeface="Calibri" pitchFamily="34" charset="-120"/>
+                        </a:rPr>
+                        <a:t>Link</a:t>
+                      </a:r>
+                      <a:endParaRPr lang="en-US" sz="2200" dirty="0">
+                        <a:latin typeface="Calibri" charset="0"/>
+                        <a:ea typeface="Calibri" charset="0"/>
+                        <a:cs typeface="Calibri" charset="0"/>
+                      </a:endParaRPr>
+                    </a:p>
+                  </a:txBody>
+                  <a:tcPr marL="101600" marR="101600" marT="50800" marB="50800" anchor="ctr">
+                    <a:lnL w="6350" cap="flat" cmpd="sng" algn="ctr">
+                      <a:solidFill>
+                        <a:srgbClr val="C9D2D8"/>
+                      </a:solidFill>
+                      <a:prstDash val="solid"/>
+                      <a:round/>
+                      <a:headEnd type="none" w="med" len="med"/>
+                      <a:tailEnd type="none" w="med" len="med"/>
+                    </a:lnL>
+                    <a:lnR w="6350" cap="flat" cmpd="sng" algn="ctr">
+                      <a:solidFill>
+                        <a:srgbClr val="C9D2D8"/>
+                      </a:solidFill>
+                      <a:prstDash val="solid"/>
+                      <a:round/>
+                      <a:headEnd type="none" w="med" len="med"/>
+                      <a:tailEnd type="none" w="med" len="med"/>
+                    </a:lnR>
+                    <a:lnT w="6350" cap="flat" cmpd="sng" algn="ctr">
+                      <a:solidFill>
+                        <a:srgbClr val="C9D2D8"/>
+                      </a:solidFill>
+                      <a:prstDash val="solid"/>
+                      <a:round/>
+                      <a:headEnd type="none" w="med" len="med"/>
+                      <a:tailEnd type="none" w="med" len="med"/>
+                    </a:lnT>
+                    <a:lnB w="6350" cap="flat" cmpd="sng" algn="ctr">
+                      <a:solidFill>
+                        <a:srgbClr val="C9D2D8"/>
+                      </a:solidFill>
+                      <a:prstDash val="solid"/>
+                      <a:round/>
+                      <a:headEnd type="none" w="med" len="med"/>
+                      <a:tailEnd type="none" w="med" len="med"/>
+                    </a:lnB>
+                    <a:solidFill>
+                      <a:srgbClr val="FFFFFF"/>
+                    </a:solidFill>
+                  </a:tcPr>
+                </a:tc>
+                <a:tc>
+                  <a:txBody>
+                    <a:bodyPr/>
+                    <a:lstStyle/>
+                    <a:p>
+                      <a:pPr indent="0" marL="0">
+                        <a:buNone/>
+                      </a:pPr>
+                      <a:r>
+                        <a:rPr lang="en-US" sz="2200" dirty="0">
+                          <a:solidFill>
+                            <a:srgbClr val="1B2530"/>
+                          </a:solidFill>
+                          <a:latin typeface="Calibri" pitchFamily="34" charset="0"/>
+                          <a:ea typeface="Calibri" pitchFamily="34" charset="-122"/>
+                          <a:cs typeface="Calibri" pitchFamily="34" charset="-120"/>
+                        </a:rPr>
+                        <a:t>generated linker script at 0x40800000</a:t>
+                      </a:r>
+                      <a:endParaRPr lang="en-US" sz="2200" dirty="0">
+                        <a:latin typeface="Calibri" charset="0"/>
+                        <a:ea typeface="Calibri" charset="0"/>
+                        <a:cs typeface="Calibri" charset="0"/>
+                      </a:endParaRPr>
+                    </a:p>
+                  </a:txBody>
+                  <a:tcPr marL="101600" marR="101600" marT="50800" marB="50800" anchor="ctr">
+                    <a:lnL w="6350" cap="flat" cmpd="sng" algn="ctr">
+                      <a:solidFill>
+                        <a:srgbClr val="C9D2D8"/>
+                      </a:solidFill>
+                      <a:prstDash val="solid"/>
+                      <a:round/>
+                      <a:headEnd type="none" w="med" len="med"/>
+                      <a:tailEnd type="none" w="med" len="med"/>
+                    </a:lnL>
+                    <a:lnR w="6350" cap="flat" cmpd="sng" algn="ctr">
+                      <a:solidFill>
+                        <a:srgbClr val="C9D2D8"/>
+                      </a:solidFill>
+                      <a:prstDash val="solid"/>
+                      <a:round/>
+                      <a:headEnd type="none" w="med" len="med"/>
+                      <a:tailEnd type="none" w="med" len="med"/>
+                    </a:lnR>
+                    <a:lnT w="6350" cap="flat" cmpd="sng" algn="ctr">
+                      <a:solidFill>
+                        <a:srgbClr val="C9D2D8"/>
+                      </a:solidFill>
+                      <a:prstDash val="solid"/>
+                      <a:round/>
+                      <a:headEnd type="none" w="med" len="med"/>
+                      <a:tailEnd type="none" w="med" len="med"/>
+                    </a:lnT>
+                    <a:lnB w="6350" cap="flat" cmpd="sng" algn="ctr">
+                      <a:solidFill>
+                        <a:srgbClr val="C9D2D8"/>
+                      </a:solidFill>
+                      <a:prstDash val="solid"/>
+                      <a:round/>
+                      <a:headEnd type="none" w="med" len="med"/>
+                      <a:tailEnd type="none" w="med" len="med"/>
+                    </a:lnB>
+                    <a:solidFill>
+                      <a:srgbClr val="FFFFFF"/>
+                    </a:solidFill>
+                  </a:tcPr>
+                </a:tc>
+                <a:tc>
+                  <a:txBody>
+                    <a:bodyPr/>
+                    <a:lstStyle/>
+                    <a:p>
+                      <a:pPr indent="0" marL="0">
+                        <a:buNone/>
+                      </a:pPr>
+                      <a:r>
+                        <a:rPr lang="en-US" sz="2200" dirty="0">
+                          <a:solidFill>
+                            <a:srgbClr val="1B2530"/>
+                          </a:solidFill>
+                          <a:latin typeface="Calibri" pitchFamily="34" charset="0"/>
+                          <a:ea typeface="Calibri" pitchFamily="34" charset="-122"/>
+                          <a:cs typeface="Calibri" pitchFamily="34" charset="-120"/>
+                        </a:rPr>
+                        <a:t>game.elf</a:t>
+                      </a:r>
+                      <a:endParaRPr lang="en-US" sz="2200" dirty="0">
+                        <a:latin typeface="Calibri" charset="0"/>
+                        <a:ea typeface="Calibri" charset="0"/>
+                        <a:cs typeface="Calibri" charset="0"/>
+                      </a:endParaRPr>
+                    </a:p>
+                  </a:txBody>
+                  <a:tcPr marL="101600" marR="101600" marT="50800" marB="50800" anchor="ctr">
+                    <a:lnL w="6350" cap="flat" cmpd="sng" algn="ctr">
+                      <a:solidFill>
+                        <a:srgbClr val="C9D2D8"/>
+                      </a:solidFill>
+                      <a:prstDash val="solid"/>
+                      <a:round/>
+                      <a:headEnd type="none" w="med" len="med"/>
+                      <a:tailEnd type="none" w="med" len="med"/>
+                    </a:lnL>
+                    <a:lnR w="6350" cap="flat" cmpd="sng" algn="ctr">
+                      <a:solidFill>
+                        <a:srgbClr val="C9D2D8"/>
+                      </a:solidFill>
+                      <a:prstDash val="solid"/>
+                      <a:round/>
+                      <a:headEnd type="none" w="med" len="med"/>
+                      <a:tailEnd type="none" w="med" len="med"/>
+                    </a:lnR>
+                    <a:lnT w="6350" cap="flat" cmpd="sng" algn="ctr">
+                      <a:solidFill>
+                        <a:srgbClr val="C9D2D8"/>
+                      </a:solidFill>
+                      <a:prstDash val="solid"/>
+                      <a:round/>
+                      <a:headEnd type="none" w="med" len="med"/>
+                      <a:tailEnd type="none" w="med" len="med"/>
+                    </a:lnT>
+                    <a:lnB w="6350" cap="flat" cmpd="sng" algn="ctr">
+                      <a:solidFill>
+                        <a:srgbClr val="C9D2D8"/>
+                      </a:solidFill>
+                      <a:prstDash val="solid"/>
+                      <a:round/>
+                      <a:headEnd type="none" w="med" len="med"/>
+                      <a:tailEnd type="none" w="med" len="med"/>
+                    </a:lnB>
+                    <a:solidFill>
+                      <a:srgbClr val="FFFFFF"/>
+                    </a:solidFill>
+                  </a:tcPr>
+                </a:tc>
+              </a:tr>
+              <a:tr h="0">
+                <a:tc>
+                  <a:txBody>
+                    <a:bodyPr/>
+                    <a:lstStyle/>
+                    <a:p>
+                      <a:pPr indent="0" marL="0">
+                        <a:buNone/>
+                      </a:pPr>
+                      <a:r>
+                        <a:rPr lang="en-US" sz="2200" b="1" dirty="0">
+                          <a:solidFill>
+                            <a:srgbClr val="1B2530"/>
+                          </a:solidFill>
+                          <a:latin typeface="Calibri" pitchFamily="34" charset="0"/>
+                          <a:ea typeface="Calibri" pitchFamily="34" charset="-122"/>
+                          <a:cs typeface="Calibri" pitchFamily="34" charset="-120"/>
+                        </a:rPr>
+                        <a:t>Package</a:t>
+                      </a:r>
+                      <a:endParaRPr lang="en-US" sz="2200" dirty="0">
+                        <a:latin typeface="Calibri" charset="0"/>
+                        <a:ea typeface="Calibri" charset="0"/>
+                        <a:cs typeface="Calibri" charset="0"/>
+                      </a:endParaRPr>
+                    </a:p>
+                  </a:txBody>
+                  <a:tcPr marL="101600" marR="101600" marT="50800" marB="50800" anchor="ctr">
+                    <a:lnL w="6350" cap="flat" cmpd="sng" algn="ctr">
+                      <a:solidFill>
+                        <a:srgbClr val="C9D2D8"/>
+                      </a:solidFill>
+                      <a:prstDash val="solid"/>
+                      <a:round/>
+                      <a:headEnd type="none" w="med" len="med"/>
+                      <a:tailEnd type="none" w="med" len="med"/>
+                    </a:lnL>
+                    <a:lnR w="6350" cap="flat" cmpd="sng" algn="ctr">
+                      <a:solidFill>
+                        <a:srgbClr val="C9D2D8"/>
+                      </a:solidFill>
+                      <a:prstDash val="solid"/>
+                      <a:round/>
+                      <a:headEnd type="none" w="med" len="med"/>
+                      <a:tailEnd type="none" w="med" len="med"/>
+                    </a:lnR>
+                    <a:lnT w="6350" cap="flat" cmpd="sng" algn="ctr">
+                      <a:solidFill>
+                        <a:srgbClr val="C9D2D8"/>
+                      </a:solidFill>
+                      <a:prstDash val="solid"/>
+                      <a:round/>
+                      <a:headEnd type="none" w="med" len="med"/>
+                      <a:tailEnd type="none" w="med" len="med"/>
+                    </a:lnT>
+                    <a:lnB w="6350" cap="flat" cmpd="sng" algn="ctr">
+                      <a:solidFill>
+                        <a:srgbClr val="C9D2D8"/>
+                      </a:solidFill>
+                      <a:prstDash val="solid"/>
+                      <a:round/>
+                      <a:headEnd type="none" w="med" len="med"/>
+                      <a:tailEnd type="none" w="med" len="med"/>
+                    </a:lnB>
+                    <a:solidFill>
+                      <a:srgbClr val="EEF2F4"/>
+                    </a:solidFill>
+                  </a:tcPr>
+                </a:tc>
+                <a:tc>
+                  <a:txBody>
+                    <a:bodyPr/>
+                    <a:lstStyle/>
+                    <a:p>
+                      <a:pPr indent="0" marL="0">
+                        <a:buNone/>
+                      </a:pPr>
+                      <a:r>
+                        <a:rPr lang="en-US" sz="2200" dirty="0">
+                          <a:solidFill>
+                            <a:srgbClr val="1B2530"/>
+                          </a:solidFill>
+                          <a:latin typeface="Calibri" pitchFamily="34" charset="0"/>
+                          <a:ea typeface="Calibri" pitchFamily="34" charset="-122"/>
+                          <a:cs typeface="Calibri" pitchFamily="34" charset="-120"/>
+                        </a:rPr>
+                        <a:t>header + payload + CRC32</a:t>
+                      </a:r>
+                      <a:endParaRPr lang="en-US" sz="2200" dirty="0">
+                        <a:latin typeface="Calibri" charset="0"/>
+                        <a:ea typeface="Calibri" charset="0"/>
+                        <a:cs typeface="Calibri" charset="0"/>
+                      </a:endParaRPr>
+                    </a:p>
+                  </a:txBody>
+                  <a:tcPr marL="101600" marR="101600" marT="50800" marB="50800" anchor="ctr">
+                    <a:lnL w="6350" cap="flat" cmpd="sng" algn="ctr">
+                      <a:solidFill>
+                        <a:srgbClr val="C9D2D8"/>
+                      </a:solidFill>
+                      <a:prstDash val="solid"/>
+                      <a:round/>
+                      <a:headEnd type="none" w="med" len="med"/>
+                      <a:tailEnd type="none" w="med" len="med"/>
+                    </a:lnL>
+                    <a:lnR w="6350" cap="flat" cmpd="sng" algn="ctr">
+                      <a:solidFill>
+                        <a:srgbClr val="C9D2D8"/>
+                      </a:solidFill>
+                      <a:prstDash val="solid"/>
+                      <a:round/>
+                      <a:headEnd type="none" w="med" len="med"/>
+                      <a:tailEnd type="none" w="med" len="med"/>
+                    </a:lnR>
+                    <a:lnT w="6350" cap="flat" cmpd="sng" algn="ctr">
+                      <a:solidFill>
+                        <a:srgbClr val="C9D2D8"/>
+                      </a:solidFill>
+                      <a:prstDash val="solid"/>
+                      <a:round/>
+                      <a:headEnd type="none" w="med" len="med"/>
+                      <a:tailEnd type="none" w="med" len="med"/>
+                    </a:lnT>
+                    <a:lnB w="6350" cap="flat" cmpd="sng" algn="ctr">
+                      <a:solidFill>
+                        <a:srgbClr val="C9D2D8"/>
+                      </a:solidFill>
+                      <a:prstDash val="solid"/>
+                      <a:round/>
+                      <a:headEnd type="none" w="med" len="med"/>
+                      <a:tailEnd type="none" w="med" len="med"/>
+                    </a:lnB>
+                    <a:solidFill>
+                      <a:srgbClr val="EEF2F4"/>
+                    </a:solidFill>
+                  </a:tcPr>
+                </a:tc>
+                <a:tc>
+                  <a:txBody>
+                    <a:bodyPr/>
+                    <a:lstStyle/>
+                    <a:p>
+                      <a:pPr indent="0" marL="0">
+                        <a:buNone/>
+                      </a:pPr>
+                      <a:r>
+                        <a:rPr lang="en-US" sz="2200" dirty="0">
+                          <a:solidFill>
+                            <a:srgbClr val="1B2530"/>
+                          </a:solidFill>
+                          <a:latin typeface="Calibri" pitchFamily="34" charset="0"/>
+                          <a:ea typeface="Calibri" pitchFamily="34" charset="-122"/>
+                          <a:cs typeface="Calibri" pitchFamily="34" charset="-120"/>
+                        </a:rPr>
+                        <a:t>game.prg32</a:t>
+                      </a:r>
+                      <a:endParaRPr lang="en-US" sz="2200" dirty="0">
+                        <a:latin typeface="Calibri" charset="0"/>
+                        <a:ea typeface="Calibri" charset="0"/>
+                        <a:cs typeface="Calibri" charset="0"/>
+                      </a:endParaRPr>
+                    </a:p>
+                  </a:txBody>
+                  <a:tcPr marL="101600" marR="101600" marT="50800" marB="50800" anchor="ctr">
+                    <a:lnL w="6350" cap="flat" cmpd="sng" algn="ctr">
+                      <a:solidFill>
+                        <a:srgbClr val="C9D2D8"/>
+                      </a:solidFill>
+                      <a:prstDash val="solid"/>
+                      <a:round/>
+                      <a:headEnd type="none" w="med" len="med"/>
+                      <a:tailEnd type="none" w="med" len="med"/>
+                    </a:lnL>
+                    <a:lnR w="6350" cap="flat" cmpd="sng" algn="ctr">
+                      <a:solidFill>
+                        <a:srgbClr val="C9D2D8"/>
+                      </a:solidFill>
+                      <a:prstDash val="solid"/>
+                      <a:round/>
+                      <a:headEnd type="none" w="med" len="med"/>
+                      <a:tailEnd type="none" w="med" len="med"/>
+                    </a:lnR>
+                    <a:lnT w="6350" cap="flat" cmpd="sng" algn="ctr">
+                      <a:solidFill>
+                        <a:srgbClr val="C9D2D8"/>
+                      </a:solidFill>
+                      <a:prstDash val="solid"/>
+                      <a:round/>
+                      <a:headEnd type="none" w="med" len="med"/>
+                      <a:tailEnd type="none" w="med" len="med"/>
+                    </a:lnT>
+                    <a:lnB w="6350" cap="flat" cmpd="sng" algn="ctr">
+                      <a:solidFill>
+                        <a:srgbClr val="C9D2D8"/>
+                      </a:solidFill>
+                      <a:prstDash val="solid"/>
+                      <a:round/>
+                      <a:headEnd type="none" w="med" len="med"/>
+                      <a:tailEnd type="none" w="med" len="med"/>
+                    </a:lnB>
+                    <a:solidFill>
+                      <a:srgbClr val="EEF2F4"/>
+                    </a:solidFill>
+                  </a:tcPr>
+                </a:tc>
+              </a:tr>
+            </a:tbl>
+          </a:graphicData>
+        </a:graphic>
+      </p:graphicFrame>
       <p:sp>
         <p:nvSpPr>
           <p:cNvPr id="25" name="Slide Number Placeholder 0"/>
@@ -13934,7 +14781,7 @@
                 <a:ea typeface="Cambria" pitchFamily="34" charset="-122"/>
                 <a:cs typeface="Cambria" pitchFamily="34" charset="-120"/>
               </a:rPr>
-              <a:t>QEMU reads the keyboard from the terminal</a:t>
+              <a:t>Flash once, upload often</a:t>
             </a:r>
             <a:endParaRPr lang="en-US" sz="3000" dirty="0"/>
           </a:p>
@@ -13942,28 +14789,47 @@
       </p:sp>
       <p:sp>
         <p:nvSpPr>
-          <p:cNvPr id="3" name="Text 1"/>
-          <p:cNvSpPr txBox="1"/>
-          <p:nvPr/>
-        </p:nvSpPr>
-        <p:spPr>
-          <a:xfrm>
-            <a:off x="548640" y="1481328"/>
-            <a:ext cx="457200" cy="457200"/>
+          <p:cNvPr id="3" name="Shape 1"/>
+          <p:cNvSpPr/>
+          <p:nvPr/>
+        </p:nvSpPr>
+        <p:spPr>
+          <a:xfrm>
+            <a:off x="548640" y="1920240"/>
+            <a:ext cx="1853123" cy="1737360"/>
           </a:xfrm>
           <a:prstGeom prst="roundRect">
             <a:avLst>
-              <a:gd name="adj" fmla="val 16000"/>
+              <a:gd name="adj" fmla="val 4211"/>
             </a:avLst>
           </a:prstGeom>
           <a:solidFill>
-            <a:srgbClr val="0E7C86"/>
+            <a:srgbClr val="2E4A62"/>
           </a:solidFill>
-          <a:ln>
+          <a:ln w="12700">
             <a:solidFill>
-              <a:srgbClr val="0E7C86"/>
+              <a:srgbClr val="2E4A62"/>
             </a:solidFill>
+            <a:prstDash val="solid"/>
           </a:ln>
+        </p:spPr>
+      </p:sp>
+      <p:sp>
+        <p:nvSpPr>
+          <p:cNvPr id="4" name="Text 2"/>
+          <p:cNvSpPr txBox="1"/>
+          <p:nvPr/>
+        </p:nvSpPr>
+        <p:spPr>
+          <a:xfrm>
+            <a:off x="658368" y="2103120"/>
+            <a:ext cx="1633667" cy="731520"/>
+          </a:xfrm>
+          <a:prstGeom prst="rect">
+            <a:avLst/>
+          </a:prstGeom>
+          <a:noFill/>
+          <a:ln/>
         </p:spPr>
         <p:txBody>
           <a:bodyPr wrap="square" lIns="0" tIns="0" rIns="0" bIns="0" rtlCol="0" anchor="ctr"/>
@@ -13973,7 +14839,7 @@
               <a:buNone/>
             </a:pPr>
             <a:r>
-              <a:rPr lang="en-US" sz="1700" b="1" dirty="0">
+              <a:rPr lang="en-US" sz="2000" b="1" dirty="0">
                 <a:solidFill>
                   <a:srgbClr val="FFFFFF"/>
                 </a:solidFill>
@@ -13981,22 +14847,22 @@
                 <a:ea typeface="Calibri" pitchFamily="34" charset="-122"/>
                 <a:cs typeface="Calibri" pitchFamily="34" charset="-120"/>
               </a:rPr>
-              <a:t>1</a:t>
-            </a:r>
-            <a:endParaRPr lang="en-US" sz="1700" dirty="0"/>
-          </a:p>
-        </p:txBody>
-      </p:sp>
-      <p:sp>
-        <p:nvSpPr>
-          <p:cNvPr id="4" name="Text 2"/>
+              <a:t>Build firmware</a:t>
+            </a:r>
+            <a:endParaRPr lang="en-US" sz="2000" dirty="0"/>
+          </a:p>
+        </p:txBody>
+      </p:sp>
+      <p:sp>
+        <p:nvSpPr>
+          <p:cNvPr id="5" name="Text 3"/>
           <p:cNvSpPr txBox="1"/>
           <p:nvPr/>
         </p:nvSpPr>
         <p:spPr>
           <a:xfrm>
-            <a:off x="1280160" y="1463040"/>
-            <a:ext cx="10362895" cy="493776"/>
+            <a:off x="658368" y="2834640"/>
+            <a:ext cx="1633667" cy="731520"/>
           </a:xfrm>
           <a:prstGeom prst="rect">
             <a:avLst/>
@@ -14005,51 +14871,95 @@
           <a:ln/>
         </p:spPr>
         <p:txBody>
-          <a:bodyPr wrap="square" lIns="0" tIns="0" rIns="0" bIns="0" rtlCol="0" anchor="ctr"/>
-          <a:lstStyle/>
-          <a:p>
-            <a:pPr indent="0" marL="0">
+          <a:bodyPr wrap="square" lIns="0" tIns="0" rIns="0" bIns="0" rtlCol="0" anchor="t"/>
+          <a:lstStyle/>
+          <a:p>
+            <a:pPr algn="ctr" indent="0" marL="0">
               <a:buNone/>
             </a:pPr>
             <a:r>
-              <a:rPr lang="en-US" sz="2400" dirty="0">
-                <a:solidFill>
-                  <a:srgbClr val="1B2530"/>
+              <a:rPr lang="en-US" sz="1500" dirty="0">
+                <a:solidFill>
+                  <a:srgbClr val="FFFFFF"/>
                 </a:solidFill>
                 <a:latin typeface="Calibri" pitchFamily="34" charset="0"/>
                 <a:ea typeface="Calibri" pitchFamily="34" charset="-122"/>
                 <a:cs typeface="Calibri" pitchFamily="34" charset="-120"/>
               </a:rPr>
-              <a:t>Click the terminal that launched QEMU, not the screen window</a:t>
-            </a:r>
-            <a:endParaRPr lang="en-US" sz="2400" dirty="0"/>
-          </a:p>
-        </p:txBody>
-      </p:sp>
-      <p:sp>
-        <p:nvSpPr>
-          <p:cNvPr id="5" name="Text 3"/>
-          <p:cNvSpPr txBox="1"/>
-          <p:nvPr/>
-        </p:nvSpPr>
-        <p:spPr>
-          <a:xfrm>
-            <a:off x="548640" y="2711196"/>
-            <a:ext cx="457200" cy="457200"/>
+              <a:t>once per course</a:t>
+            </a:r>
+            <a:endParaRPr lang="en-US" sz="1500" dirty="0"/>
+          </a:p>
+        </p:txBody>
+      </p:sp>
+      <p:sp>
+        <p:nvSpPr>
+          <p:cNvPr id="6" name="Shape 4"/>
+          <p:cNvSpPr/>
+          <p:nvPr/>
+        </p:nvSpPr>
+        <p:spPr>
+          <a:xfrm>
+            <a:off x="2474915" y="2633472"/>
+            <a:ext cx="310896" cy="310896"/>
+          </a:xfrm>
+          <a:prstGeom prst="rightArrow">
+            <a:avLst/>
+          </a:prstGeom>
+          <a:solidFill>
+            <a:srgbClr val="C9D2D8"/>
+          </a:solidFill>
+          <a:ln w="12700">
+            <a:solidFill>
+              <a:srgbClr val="C9D2D8"/>
+            </a:solidFill>
+            <a:prstDash val="solid"/>
+          </a:ln>
+        </p:spPr>
+      </p:sp>
+      <p:sp>
+        <p:nvSpPr>
+          <p:cNvPr id="7" name="Shape 5"/>
+          <p:cNvSpPr/>
+          <p:nvPr/>
+        </p:nvSpPr>
+        <p:spPr>
+          <a:xfrm>
+            <a:off x="2858963" y="1920240"/>
+            <a:ext cx="1853123" cy="1737360"/>
           </a:xfrm>
           <a:prstGeom prst="roundRect">
             <a:avLst>
-              <a:gd name="adj" fmla="val 16000"/>
+              <a:gd name="adj" fmla="val 4211"/>
             </a:avLst>
           </a:prstGeom>
           <a:solidFill>
             <a:srgbClr val="0E7C86"/>
           </a:solidFill>
-          <a:ln>
+          <a:ln w="12700">
             <a:solidFill>
               <a:srgbClr val="0E7C86"/>
             </a:solidFill>
+            <a:prstDash val="solid"/>
           </a:ln>
+        </p:spPr>
+      </p:sp>
+      <p:sp>
+        <p:nvSpPr>
+          <p:cNvPr id="8" name="Text 6"/>
+          <p:cNvSpPr txBox="1"/>
+          <p:nvPr/>
+        </p:nvSpPr>
+        <p:spPr>
+          <a:xfrm>
+            <a:off x="2968691" y="2103120"/>
+            <a:ext cx="1633667" cy="731520"/>
+          </a:xfrm>
+          <a:prstGeom prst="rect">
+            <a:avLst/>
+          </a:prstGeom>
+          <a:noFill/>
+          <a:ln/>
         </p:spPr>
         <p:txBody>
           <a:bodyPr wrap="square" lIns="0" tIns="0" rIns="0" bIns="0" rtlCol="0" anchor="ctr"/>
@@ -14059,7 +14969,7 @@
               <a:buNone/>
             </a:pPr>
             <a:r>
-              <a:rPr lang="en-US" sz="1700" b="1" dirty="0">
+              <a:rPr lang="en-US" sz="2000" b="1" dirty="0">
                 <a:solidFill>
                   <a:srgbClr val="FFFFFF"/>
                 </a:solidFill>
@@ -14067,22 +14977,22 @@
                 <a:ea typeface="Calibri" pitchFamily="34" charset="-122"/>
                 <a:cs typeface="Calibri" pitchFamily="34" charset="-120"/>
               </a:rPr>
-              <a:t>2</a:t>
-            </a:r>
-            <a:endParaRPr lang="en-US" sz="1700" dirty="0"/>
-          </a:p>
-        </p:txBody>
-      </p:sp>
-      <p:sp>
-        <p:nvSpPr>
-          <p:cNvPr id="6" name="Text 4"/>
+              <a:t>Flash board</a:t>
+            </a:r>
+            <a:endParaRPr lang="en-US" sz="2000" dirty="0"/>
+          </a:p>
+        </p:txBody>
+      </p:sp>
+      <p:sp>
+        <p:nvSpPr>
+          <p:cNvPr id="9" name="Text 7"/>
           <p:cNvSpPr txBox="1"/>
           <p:nvPr/>
         </p:nvSpPr>
         <p:spPr>
           <a:xfrm>
-            <a:off x="1280160" y="2692908"/>
-            <a:ext cx="10362895" cy="493776"/>
+            <a:off x="2968691" y="2834640"/>
+            <a:ext cx="1633667" cy="731520"/>
           </a:xfrm>
           <a:prstGeom prst="rect">
             <a:avLst/>
@@ -14091,51 +15001,95 @@
           <a:ln/>
         </p:spPr>
         <p:txBody>
-          <a:bodyPr wrap="square" lIns="0" tIns="0" rIns="0" bIns="0" rtlCol="0" anchor="ctr"/>
-          <a:lstStyle/>
-          <a:p>
-            <a:pPr indent="0" marL="0">
+          <a:bodyPr wrap="square" lIns="0" tIns="0" rIns="0" bIns="0" rtlCol="0" anchor="t"/>
+          <a:lstStyle/>
+          <a:p>
+            <a:pPr algn="ctr" indent="0" marL="0">
               <a:buNone/>
             </a:pPr>
             <a:r>
-              <a:rPr lang="en-US" sz="2400" dirty="0">
-                <a:solidFill>
-                  <a:srgbClr val="1B2530"/>
+              <a:rPr lang="en-US" sz="1500" dirty="0">
+                <a:solidFill>
+                  <a:srgbClr val="FFFFFF"/>
                 </a:solidFill>
                 <a:latin typeface="Calibri" pitchFamily="34" charset="0"/>
                 <a:ea typeface="Calibri" pitchFamily="34" charset="-122"/>
                 <a:cs typeface="Calibri" pitchFamily="34" charset="-120"/>
               </a:rPr>
-              <a:t>Arrows or W A S D move; Z or J is A; X or K is B</a:t>
-            </a:r>
-            <a:endParaRPr lang="en-US" sz="2400" dirty="0"/>
-          </a:p>
-        </p:txBody>
-      </p:sp>
-      <p:sp>
-        <p:nvSpPr>
-          <p:cNvPr id="7" name="Text 5"/>
-          <p:cNvSpPr txBox="1"/>
-          <p:nvPr/>
-        </p:nvSpPr>
-        <p:spPr>
-          <a:xfrm>
-            <a:off x="548640" y="3941064"/>
-            <a:ext cx="457200" cy="457200"/>
+              <a:t>once</a:t>
+            </a:r>
+            <a:endParaRPr lang="en-US" sz="1500" dirty="0"/>
+          </a:p>
+        </p:txBody>
+      </p:sp>
+      <p:sp>
+        <p:nvSpPr>
+          <p:cNvPr id="10" name="Shape 8"/>
+          <p:cNvSpPr/>
+          <p:nvPr/>
+        </p:nvSpPr>
+        <p:spPr>
+          <a:xfrm>
+            <a:off x="4785238" y="2633472"/>
+            <a:ext cx="310896" cy="310896"/>
+          </a:xfrm>
+          <a:prstGeom prst="rightArrow">
+            <a:avLst/>
+          </a:prstGeom>
+          <a:solidFill>
+            <a:srgbClr val="C9D2D8"/>
+          </a:solidFill>
+          <a:ln w="12700">
+            <a:solidFill>
+              <a:srgbClr val="C9D2D8"/>
+            </a:solidFill>
+            <a:prstDash val="solid"/>
+          </a:ln>
+        </p:spPr>
+      </p:sp>
+      <p:sp>
+        <p:nvSpPr>
+          <p:cNvPr id="11" name="Shape 9"/>
+          <p:cNvSpPr/>
+          <p:nvPr/>
+        </p:nvSpPr>
+        <p:spPr>
+          <a:xfrm>
+            <a:off x="5169286" y="1920240"/>
+            <a:ext cx="1853123" cy="1737360"/>
           </a:xfrm>
           <a:prstGeom prst="roundRect">
             <a:avLst>
-              <a:gd name="adj" fmla="val 16000"/>
+              <a:gd name="adj" fmla="val 4211"/>
             </a:avLst>
           </a:prstGeom>
           <a:solidFill>
-            <a:srgbClr val="0E7C86"/>
+            <a:srgbClr val="6B4FA0"/>
           </a:solidFill>
-          <a:ln>
+          <a:ln w="12700">
             <a:solidFill>
-              <a:srgbClr val="0E7C86"/>
+              <a:srgbClr val="6B4FA0"/>
             </a:solidFill>
+            <a:prstDash val="solid"/>
           </a:ln>
+        </p:spPr>
+      </p:sp>
+      <p:sp>
+        <p:nvSpPr>
+          <p:cNvPr id="12" name="Text 10"/>
+          <p:cNvSpPr txBox="1"/>
+          <p:nvPr/>
+        </p:nvSpPr>
+        <p:spPr>
+          <a:xfrm>
+            <a:off x="5279014" y="2103120"/>
+            <a:ext cx="1633667" cy="731520"/>
+          </a:xfrm>
+          <a:prstGeom prst="rect">
+            <a:avLst/>
+          </a:prstGeom>
+          <a:noFill/>
+          <a:ln/>
         </p:spPr>
         <p:txBody>
           <a:bodyPr wrap="square" lIns="0" tIns="0" rIns="0" bIns="0" rtlCol="0" anchor="ctr"/>
@@ -14145,7 +15099,7 @@
               <a:buNone/>
             </a:pPr>
             <a:r>
-              <a:rPr lang="en-US" sz="1700" b="1" dirty="0">
+              <a:rPr lang="en-US" sz="2000" b="1" dirty="0">
                 <a:solidFill>
                   <a:srgbClr val="FFFFFF"/>
                 </a:solidFill>
@@ -14153,22 +15107,22 @@
                 <a:ea typeface="Calibri" pitchFamily="34" charset="-122"/>
                 <a:cs typeface="Calibri" pitchFamily="34" charset="-120"/>
               </a:rPr>
-              <a:t>3</a:t>
-            </a:r>
-            <a:endParaRPr lang="en-US" sz="1700" dirty="0"/>
-          </a:p>
-        </p:txBody>
-      </p:sp>
-      <p:sp>
-        <p:nvSpPr>
-          <p:cNvPr id="8" name="Text 6"/>
+              <a:t>Build cartridge</a:t>
+            </a:r>
+            <a:endParaRPr lang="en-US" sz="2000" dirty="0"/>
+          </a:p>
+        </p:txBody>
+      </p:sp>
+      <p:sp>
+        <p:nvSpPr>
+          <p:cNvPr id="13" name="Text 11"/>
           <p:cNvSpPr txBox="1"/>
           <p:nvPr/>
         </p:nvSpPr>
         <p:spPr>
           <a:xfrm>
-            <a:off x="1280160" y="3922776"/>
-            <a:ext cx="10362895" cy="493776"/>
+            <a:off x="5279014" y="2834640"/>
+            <a:ext cx="1633667" cy="731520"/>
           </a:xfrm>
           <a:prstGeom prst="rect">
             <a:avLst/>
@@ -14177,51 +15131,95 @@
           <a:ln/>
         </p:spPr>
         <p:txBody>
-          <a:bodyPr wrap="square" lIns="0" tIns="0" rIns="0" bIns="0" rtlCol="0" anchor="ctr"/>
-          <a:lstStyle/>
-          <a:p>
-            <a:pPr indent="0" marL="0">
+          <a:bodyPr wrap="square" lIns="0" tIns="0" rIns="0" bIns="0" rtlCol="0" anchor="t"/>
+          <a:lstStyle/>
+          <a:p>
+            <a:pPr algn="ctr" indent="0" marL="0">
               <a:buNone/>
             </a:pPr>
             <a:r>
-              <a:rPr lang="en-US" sz="2400" dirty="0">
-                <a:solidFill>
-                  <a:srgbClr val="1B2530"/>
+              <a:rPr lang="en-US" sz="1500" dirty="0">
+                <a:solidFill>
+                  <a:srgbClr val="FFFFFF"/>
                 </a:solidFill>
                 <a:latin typeface="Calibri" pitchFamily="34" charset="0"/>
                 <a:ea typeface="Calibri" pitchFamily="34" charset="-122"/>
                 <a:cs typeface="Calibri" pitchFamily="34" charset="-120"/>
               </a:rPr>
-              <a:t>Enter or Space is Start/Select</a:t>
-            </a:r>
-            <a:endParaRPr lang="en-US" sz="2400" dirty="0"/>
-          </a:p>
-        </p:txBody>
-      </p:sp>
-      <p:sp>
-        <p:nvSpPr>
-          <p:cNvPr id="9" name="Text 7"/>
-          <p:cNvSpPr txBox="1"/>
-          <p:nvPr/>
-        </p:nvSpPr>
-        <p:spPr>
-          <a:xfrm>
-            <a:off x="548640" y="5170932"/>
-            <a:ext cx="457200" cy="457200"/>
+              <a:t>seconds</a:t>
+            </a:r>
+            <a:endParaRPr lang="en-US" sz="1500" dirty="0"/>
+          </a:p>
+        </p:txBody>
+      </p:sp>
+      <p:sp>
+        <p:nvSpPr>
+          <p:cNvPr id="14" name="Shape 12"/>
+          <p:cNvSpPr/>
+          <p:nvPr/>
+        </p:nvSpPr>
+        <p:spPr>
+          <a:xfrm>
+            <a:off x="7095561" y="2633472"/>
+            <a:ext cx="310896" cy="310896"/>
+          </a:xfrm>
+          <a:prstGeom prst="rightArrow">
+            <a:avLst/>
+          </a:prstGeom>
+          <a:solidFill>
+            <a:srgbClr val="C9D2D8"/>
+          </a:solidFill>
+          <a:ln w="12700">
+            <a:solidFill>
+              <a:srgbClr val="C9D2D8"/>
+            </a:solidFill>
+            <a:prstDash val="solid"/>
+          </a:ln>
+        </p:spPr>
+      </p:sp>
+      <p:sp>
+        <p:nvSpPr>
+          <p:cNvPr id="15" name="Shape 13"/>
+          <p:cNvSpPr/>
+          <p:nvPr/>
+        </p:nvSpPr>
+        <p:spPr>
+          <a:xfrm>
+            <a:off x="7479609" y="1920240"/>
+            <a:ext cx="1853123" cy="1737360"/>
           </a:xfrm>
           <a:prstGeom prst="roundRect">
             <a:avLst>
-              <a:gd name="adj" fmla="val 16000"/>
+              <a:gd name="adj" fmla="val 4211"/>
             </a:avLst>
           </a:prstGeom>
           <a:solidFill>
-            <a:srgbClr val="0E7C86"/>
+            <a:srgbClr val="C7791B"/>
           </a:solidFill>
-          <a:ln>
+          <a:ln w="12700">
             <a:solidFill>
-              <a:srgbClr val="0E7C86"/>
+              <a:srgbClr val="C7791B"/>
             </a:solidFill>
+            <a:prstDash val="solid"/>
           </a:ln>
+        </p:spPr>
+      </p:sp>
+      <p:sp>
+        <p:nvSpPr>
+          <p:cNvPr id="16" name="Text 14"/>
+          <p:cNvSpPr txBox="1"/>
+          <p:nvPr/>
+        </p:nvSpPr>
+        <p:spPr>
+          <a:xfrm>
+            <a:off x="7589337" y="2103120"/>
+            <a:ext cx="1633667" cy="731520"/>
+          </a:xfrm>
+          <a:prstGeom prst="rect">
+            <a:avLst/>
+          </a:prstGeom>
+          <a:noFill/>
+          <a:ln/>
         </p:spPr>
         <p:txBody>
           <a:bodyPr wrap="square" lIns="0" tIns="0" rIns="0" bIns="0" rtlCol="0" anchor="ctr"/>
@@ -14231,7 +15229,7 @@
               <a:buNone/>
             </a:pPr>
             <a:r>
-              <a:rPr lang="en-US" sz="1700" b="1" dirty="0">
+              <a:rPr lang="en-US" sz="2000" b="1" dirty="0">
                 <a:solidFill>
                   <a:srgbClr val="FFFFFF"/>
                 </a:solidFill>
@@ -14239,22 +15237,22 @@
                 <a:ea typeface="Calibri" pitchFamily="34" charset="-122"/>
                 <a:cs typeface="Calibri" pitchFamily="34" charset="-120"/>
               </a:rPr>
-              <a:t>4</a:t>
-            </a:r>
-            <a:endParaRPr lang="en-US" sz="1700" dirty="0"/>
-          </a:p>
-        </p:txBody>
-      </p:sp>
-      <p:sp>
-        <p:nvSpPr>
-          <p:cNvPr id="10" name="Text 8"/>
+              <a:t>Upload or stage</a:t>
+            </a:r>
+            <a:endParaRPr lang="en-US" sz="2000" dirty="0"/>
+          </a:p>
+        </p:txBody>
+      </p:sp>
+      <p:sp>
+        <p:nvSpPr>
+          <p:cNvPr id="17" name="Text 15"/>
           <p:cNvSpPr txBox="1"/>
           <p:nvPr/>
         </p:nvSpPr>
         <p:spPr>
           <a:xfrm>
-            <a:off x="1280160" y="5152644"/>
-            <a:ext cx="10362895" cy="493776"/>
+            <a:off x="7589337" y="2834640"/>
+            <a:ext cx="1633667" cy="731520"/>
           </a:xfrm>
           <a:prstGeom prst="rect">
             <a:avLst/>
@@ -14263,24 +15261,220 @@
           <a:ln/>
         </p:spPr>
         <p:txBody>
-          <a:bodyPr wrap="square" lIns="0" tIns="0" rIns="0" bIns="0" rtlCol="0" anchor="ctr"/>
-          <a:lstStyle/>
-          <a:p>
-            <a:pPr indent="0" marL="0">
+          <a:bodyPr wrap="square" lIns="0" tIns="0" rIns="0" bIns="0" rtlCol="0" anchor="t"/>
+          <a:lstStyle/>
+          <a:p>
+            <a:pPr algn="ctr" indent="0" marL="0">
               <a:buNone/>
             </a:pPr>
             <a:r>
-              <a:rPr lang="en-US" sz="2400" dirty="0">
-                <a:solidFill>
-                  <a:srgbClr val="1B2530"/>
+              <a:rPr lang="en-US" sz="1500" dirty="0">
+                <a:solidFill>
+                  <a:srgbClr val="FFFFFF"/>
                 </a:solidFill>
                 <a:latin typeface="Calibri" pitchFamily="34" charset="0"/>
                 <a:ea typeface="Calibri" pitchFamily="34" charset="-122"/>
                 <a:cs typeface="Calibri" pitchFamily="34" charset="-120"/>
               </a:rPr>
-              <a:t>Close QEMU before staging a new cartridge</a:t>
-            </a:r>
-            <a:endParaRPr lang="en-US" sz="2400" dirty="0"/>
+              <a:t>seconds</a:t>
+            </a:r>
+            <a:endParaRPr lang="en-US" sz="1500" dirty="0"/>
+          </a:p>
+        </p:txBody>
+      </p:sp>
+      <p:sp>
+        <p:nvSpPr>
+          <p:cNvPr id="18" name="Shape 16"/>
+          <p:cNvSpPr/>
+          <p:nvPr/>
+        </p:nvSpPr>
+        <p:spPr>
+          <a:xfrm>
+            <a:off x="9405884" y="2633472"/>
+            <a:ext cx="310896" cy="310896"/>
+          </a:xfrm>
+          <a:prstGeom prst="rightArrow">
+            <a:avLst/>
+          </a:prstGeom>
+          <a:solidFill>
+            <a:srgbClr val="C9D2D8"/>
+          </a:solidFill>
+          <a:ln w="12700">
+            <a:solidFill>
+              <a:srgbClr val="C9D2D8"/>
+            </a:solidFill>
+            <a:prstDash val="solid"/>
+          </a:ln>
+        </p:spPr>
+      </p:sp>
+      <p:sp>
+        <p:nvSpPr>
+          <p:cNvPr id="19" name="Shape 17"/>
+          <p:cNvSpPr/>
+          <p:nvPr/>
+        </p:nvSpPr>
+        <p:spPr>
+          <a:xfrm>
+            <a:off x="9789932" y="1920240"/>
+            <a:ext cx="1853123" cy="1737360"/>
+          </a:xfrm>
+          <a:prstGeom prst="roundRect">
+            <a:avLst>
+              <a:gd name="adj" fmla="val 4211"/>
+            </a:avLst>
+          </a:prstGeom>
+          <a:solidFill>
+            <a:srgbClr val="2F7D4F"/>
+          </a:solidFill>
+          <a:ln w="12700">
+            <a:solidFill>
+              <a:srgbClr val="2F7D4F"/>
+            </a:solidFill>
+            <a:prstDash val="solid"/>
+          </a:ln>
+        </p:spPr>
+      </p:sp>
+      <p:sp>
+        <p:nvSpPr>
+          <p:cNvPr id="20" name="Text 18"/>
+          <p:cNvSpPr txBox="1"/>
+          <p:nvPr/>
+        </p:nvSpPr>
+        <p:spPr>
+          <a:xfrm>
+            <a:off x="9899660" y="2103120"/>
+            <a:ext cx="1633667" cy="731520"/>
+          </a:xfrm>
+          <a:prstGeom prst="rect">
+            <a:avLst/>
+          </a:prstGeom>
+          <a:noFill/>
+          <a:ln/>
+        </p:spPr>
+        <p:txBody>
+          <a:bodyPr wrap="square" lIns="0" tIns="0" rIns="0" bIns="0" rtlCol="0" anchor="ctr"/>
+          <a:lstStyle/>
+          <a:p>
+            <a:pPr algn="ctr" indent="0" marL="0">
+              <a:buNone/>
+            </a:pPr>
+            <a:r>
+              <a:rPr lang="en-US" sz="2000" b="1" dirty="0">
+                <a:solidFill>
+                  <a:srgbClr val="FFFFFF"/>
+                </a:solidFill>
+                <a:latin typeface="Calibri" pitchFamily="34" charset="0"/>
+                <a:ea typeface="Calibri" pitchFamily="34" charset="-122"/>
+                <a:cs typeface="Calibri" pitchFamily="34" charset="-120"/>
+              </a:rPr>
+              <a:t>Play</a:t>
+            </a:r>
+            <a:endParaRPr lang="en-US" sz="2000" dirty="0"/>
+          </a:p>
+        </p:txBody>
+      </p:sp>
+      <p:sp>
+        <p:nvSpPr>
+          <p:cNvPr id="21" name="Text 19"/>
+          <p:cNvSpPr txBox="1"/>
+          <p:nvPr/>
+        </p:nvSpPr>
+        <p:spPr>
+          <a:xfrm>
+            <a:off x="9899660" y="2834640"/>
+            <a:ext cx="1633667" cy="731520"/>
+          </a:xfrm>
+          <a:prstGeom prst="rect">
+            <a:avLst/>
+          </a:prstGeom>
+          <a:noFill/>
+          <a:ln/>
+        </p:spPr>
+        <p:txBody>
+          <a:bodyPr wrap="square" lIns="0" tIns="0" rIns="0" bIns="0" rtlCol="0" anchor="t"/>
+          <a:lstStyle/>
+          <a:p>
+            <a:pPr algn="ctr" indent="0" marL="0">
+              <a:buNone/>
+            </a:pPr>
+            <a:r>
+              <a:rPr lang="en-US" sz="1500" dirty="0">
+                <a:solidFill>
+                  <a:srgbClr val="FFFFFF"/>
+                </a:solidFill>
+                <a:latin typeface="Calibri" pitchFamily="34" charset="0"/>
+                <a:ea typeface="Calibri" pitchFamily="34" charset="-122"/>
+                <a:cs typeface="Calibri" pitchFamily="34" charset="-120"/>
+              </a:rPr>
+              <a:t>and repeat</a:t>
+            </a:r>
+            <a:endParaRPr lang="en-US" sz="1500" dirty="0"/>
+          </a:p>
+        </p:txBody>
+      </p:sp>
+      <p:sp>
+        <p:nvSpPr>
+          <p:cNvPr id="22" name="Shape 20"/>
+          <p:cNvSpPr/>
+          <p:nvPr/>
+        </p:nvSpPr>
+        <p:spPr>
+          <a:xfrm>
+            <a:off x="548640" y="4114800"/>
+            <a:ext cx="11094415" cy="2103120"/>
+          </a:xfrm>
+          <a:prstGeom prst="roundRect">
+            <a:avLst>
+              <a:gd name="adj" fmla="val 3478"/>
+            </a:avLst>
+          </a:prstGeom>
+          <a:solidFill>
+            <a:srgbClr val="EEF2F4"/>
+          </a:solidFill>
+          <a:ln w="12700">
+            <a:solidFill>
+              <a:srgbClr val="EEF2F4"/>
+            </a:solidFill>
+            <a:prstDash val="solid"/>
+          </a:ln>
+        </p:spPr>
+      </p:sp>
+      <p:sp>
+        <p:nvSpPr>
+          <p:cNvPr id="23" name="Text 21"/>
+          <p:cNvSpPr txBox="1"/>
+          <p:nvPr/>
+        </p:nvSpPr>
+        <p:spPr>
+          <a:xfrm>
+            <a:off x="868680" y="4251960"/>
+            <a:ext cx="10454335" cy="1828800"/>
+          </a:xfrm>
+          <a:prstGeom prst="rect">
+            <a:avLst/>
+          </a:prstGeom>
+          <a:noFill/>
+          <a:ln/>
+        </p:spPr>
+        <p:txBody>
+          <a:bodyPr wrap="square" lIns="0" tIns="0" rIns="0" bIns="0" rtlCol="0" anchor="ctr"/>
+          <a:lstStyle/>
+          <a:p>
+            <a:pPr indent="0" marL="0">
+              <a:buNone/>
+            </a:pPr>
+            <a:r>
+              <a:rPr lang="en-US" sz="2200" dirty="0">
+                <a:solidFill>
+                  <a:srgbClr val="1B2530"/>
+                </a:solidFill>
+                <a:latin typeface="Calibri" pitchFamily="34" charset="0"/>
+                <a:ea typeface="Calibri" pitchFamily="34" charset="-122"/>
+                <a:cs typeface="Calibri" pitchFamily="34" charset="-120"/>
+              </a:rPr>
+              <a:t>The resident firmware stays on the board. Your edit-build-run loop touches only the cartridge.</a:t>
+            </a:r>
+            <a:endParaRPr lang="en-US" sz="2200" dirty="0"/>
           </a:p>
         </p:txBody>
       </p:sp>
@@ -14359,14 +15553,16 @@
       </p:grpSpPr>
       <p:sp>
         <p:nvSpPr>
-          <p:cNvPr id="2" name="Text 0"/>
-          <p:cNvSpPr txBox="1"/>
-          <p:nvPr/>
-        </p:nvSpPr>
-        <p:spPr>
-          <a:xfrm>
-            <a:off x="548640" y="1371600"/>
-            <a:ext cx="2743200" cy="1188720"/>
+          <p:cNvPr id="2" name="Text 1"/>
+          <p:cNvSpPr/>
+          <p:nvPr>
+            <p:ph idx="101" type="title" hasCustomPrompt="1"/>
+          </p:nvPr>
+        </p:nvSpPr>
+        <p:spPr>
+          <a:xfrm>
+            <a:off x="548640" y="384048"/>
+            <a:ext cx="11094415" cy="868680"/>
           </a:xfrm>
           <a:prstGeom prst="rect">
             <a:avLst/>
@@ -14375,37 +15571,64 @@
           <a:ln/>
         </p:spPr>
         <p:txBody>
-          <a:bodyPr wrap="square" lIns="0" tIns="0" rIns="0" bIns="0" rtlCol="0" anchor="t"/>
-          <a:lstStyle/>
-          <a:p>
-            <a:pPr indent="0" marL="0">
+          <a:bodyPr wrap="square" lIns="0" tIns="0" rIns="0" bIns="0" rtlCol="0" anchor="ctr"/>
+          <a:lstStyle/>
+          <a:p>
+            <a:pPr algn="l" indent="0" marL="0">
               <a:buNone/>
             </a:pPr>
             <a:r>
-              <a:rPr lang="en-US" sz="8000" b="1" dirty="0">
-                <a:solidFill>
-                  <a:srgbClr val="5CC7D1"/>
+              <a:rPr lang="en-US" sz="3000" b="1" dirty="0">
+                <a:solidFill>
+                  <a:srgbClr val="2E4A62"/>
                 </a:solidFill>
                 <a:latin typeface="Cambria" pitchFamily="34" charset="0"/>
                 <a:ea typeface="Cambria" pitchFamily="34" charset="-122"/>
                 <a:cs typeface="Cambria" pitchFamily="34" charset="-120"/>
               </a:rPr>
-              <a:t>04</a:t>
-            </a:r>
-            <a:endParaRPr lang="en-US" sz="8000" dirty="0"/>
-          </a:p>
-        </p:txBody>
-      </p:sp>
-      <p:sp>
-        <p:nvSpPr>
-          <p:cNvPr id="3" name="Text 1"/>
+              <a:t>The build command, option by option</a:t>
+            </a:r>
+            <a:endParaRPr lang="en-US" sz="3000" dirty="0"/>
+          </a:p>
+        </p:txBody>
+      </p:sp>
+      <p:sp>
+        <p:nvSpPr>
+          <p:cNvPr id="3" name="Shape 1"/>
+          <p:cNvSpPr/>
+          <p:nvPr/>
+        </p:nvSpPr>
+        <p:spPr>
+          <a:xfrm>
+            <a:off x="548640" y="1463040"/>
+            <a:ext cx="7406640" cy="4754880"/>
+          </a:xfrm>
+          <a:prstGeom prst="roundRect">
+            <a:avLst>
+              <a:gd name="adj" fmla="val 1538"/>
+            </a:avLst>
+          </a:prstGeom>
+          <a:solidFill>
+            <a:srgbClr val="12202B"/>
+          </a:solidFill>
+          <a:ln w="12700">
+            <a:solidFill>
+              <a:srgbClr val="12202B"/>
+            </a:solidFill>
+            <a:prstDash val="solid"/>
+          </a:ln>
+        </p:spPr>
+      </p:sp>
+      <p:sp>
+        <p:nvSpPr>
+          <p:cNvPr id="4" name="Text 2"/>
           <p:cNvSpPr txBox="1"/>
           <p:nvPr/>
         </p:nvSpPr>
         <p:spPr>
           <a:xfrm>
-            <a:off x="548640" y="2834640"/>
-            <a:ext cx="11094415" cy="1371600"/>
+            <a:off x="777240" y="1645920"/>
+            <a:ext cx="6949440" cy="4389120"/>
           </a:xfrm>
           <a:prstGeom prst="rect">
             <a:avLst/>
@@ -14414,63 +15637,544 @@
           <a:ln/>
         </p:spPr>
         <p:txBody>
-          <a:bodyPr wrap="square" lIns="0" tIns="0" rIns="0" bIns="0" rtlCol="0" anchor="ctr"/>
+          <a:bodyPr wrap="square" lIns="0" tIns="0" rIns="0" bIns="0" rtlCol="0" anchor="t"/>
           <a:lstStyle/>
           <a:p>
             <a:pPr indent="0" marL="0">
               <a:buNone/>
             </a:pPr>
             <a:r>
-              <a:rPr lang="en-US" sz="4200" b="1" dirty="0">
-                <a:solidFill>
-                  <a:srgbClr val="FFFFFF"/>
-                </a:solidFill>
-                <a:latin typeface="Cambria" pitchFamily="34" charset="0"/>
-                <a:ea typeface="Cambria" pitchFamily="34" charset="-122"/>
-                <a:cs typeface="Cambria" pitchFamily="34" charset="-120"/>
+              <a:rPr lang="en-US" sz="1600" dirty="0">
+                <a:solidFill>
+                  <a:srgbClr val="E6EDF2"/>
+                </a:solidFill>
+                <a:latin typeface="Courier New" pitchFamily="34" charset="0"/>
+                <a:ea typeface="Courier New" pitchFamily="34" charset="-122"/>
+                <a:cs typeface="Courier New" pitchFamily="34" charset="-120"/>
               </a:rPr>
-              <a:t>Profiles and diagnosis</a:t>
-            </a:r>
-            <a:endParaRPr lang="en-US" sz="4200" dirty="0"/>
-          </a:p>
-        </p:txBody>
-      </p:sp>
-      <p:sp>
-        <p:nvSpPr>
-          <p:cNvPr id="4" name="Text 2"/>
-          <p:cNvSpPr txBox="1"/>
-          <p:nvPr/>
-        </p:nvSpPr>
-        <p:spPr>
-          <a:xfrm>
-            <a:off x="548640" y="4389120"/>
-            <a:ext cx="11094415" cy="1097280"/>
-          </a:xfrm>
-          <a:prstGeom prst="rect">
-            <a:avLst/>
-          </a:prstGeom>
-          <a:noFill/>
-          <a:ln/>
-        </p:spPr>
-        <p:txBody>
-          <a:bodyPr wrap="square" lIns="0" tIns="0" rIns="0" bIns="0" rtlCol="0" anchor="t"/>
-          <a:lstStyle/>
+              <a:t>python3 -m prg32 cartridge build work/hello/hello.S \</a:t>
+            </a:r>
+            <a:endParaRPr lang="en-US" sz="1600" dirty="0"/>
+          </a:p>
           <a:p>
             <a:pPr indent="0" marL="0">
               <a:buNone/>
             </a:pPr>
             <a:r>
-              <a:rPr lang="en-US" sz="2200" dirty="0">
-                <a:solidFill>
-                  <a:srgbClr val="CFE3EA"/>
+              <a:rPr lang="en-US" sz="1600" dirty="0">
+                <a:solidFill>
+                  <a:srgbClr val="E6EDF2"/>
+                </a:solidFill>
+                <a:latin typeface="Courier New" pitchFamily="34" charset="0"/>
+                <a:ea typeface="Courier New" pitchFamily="34" charset="-122"/>
+                <a:cs typeface="Courier New" pitchFamily="34" charset="-120"/>
+              </a:rPr>
+              <a:t>  --portable \</a:t>
+            </a:r>
+            <a:endParaRPr lang="en-US" sz="1600" dirty="0"/>
+          </a:p>
+          <a:p>
+            <a:pPr indent="0" marL="0">
+              <a:buNone/>
+            </a:pPr>
+            <a:r>
+              <a:rPr lang="en-US" sz="1600" dirty="0">
+                <a:solidFill>
+                  <a:srgbClr val="E6EDF2"/>
+                </a:solidFill>
+                <a:latin typeface="Courier New" pitchFamily="34" charset="0"/>
+                <a:ea typeface="Courier New" pitchFamily="34" charset="-122"/>
+                <a:cs typeface="Courier New" pitchFamily="34" charset="-120"/>
+              </a:rPr>
+              <a:t>  --entry-prefix hello \</a:t>
+            </a:r>
+            <a:endParaRPr lang="en-US" sz="1600" dirty="0"/>
+          </a:p>
+          <a:p>
+            <a:pPr indent="0" marL="0">
+              <a:buNone/>
+            </a:pPr>
+            <a:r>
+              <a:rPr lang="en-US" sz="1600" dirty="0">
+                <a:solidFill>
+                  <a:srgbClr val="E6EDF2"/>
+                </a:solidFill>
+                <a:latin typeface="Courier New" pitchFamily="34" charset="0"/>
+                <a:ea typeface="Courier New" pitchFamily="34" charset="-122"/>
+                <a:cs typeface="Courier New" pitchFamily="34" charset="-120"/>
+              </a:rPr>
+              <a:t>  --name hello \</a:t>
+            </a:r>
+            <a:endParaRPr lang="en-US" sz="1600" dirty="0"/>
+          </a:p>
+          <a:p>
+            <a:pPr indent="0" marL="0">
+              <a:buNone/>
+            </a:pPr>
+            <a:r>
+              <a:rPr lang="en-US" sz="1600" dirty="0">
+                <a:solidFill>
+                  <a:srgbClr val="E6EDF2"/>
+                </a:solidFill>
+                <a:latin typeface="Courier New" pitchFamily="34" charset="0"/>
+                <a:ea typeface="Courier New" pitchFamily="34" charset="-122"/>
+                <a:cs typeface="Courier New" pitchFamily="34" charset="-120"/>
+              </a:rPr>
+              <a:t>  --out work/hello/hello.prg32</a:t>
+            </a:r>
+            <a:endParaRPr lang="en-US" sz="1600" dirty="0"/>
+          </a:p>
+        </p:txBody>
+      </p:sp>
+      <p:sp>
+        <p:nvSpPr>
+          <p:cNvPr id="5" name="Shape 3"/>
+          <p:cNvSpPr/>
+          <p:nvPr/>
+        </p:nvSpPr>
+        <p:spPr>
+          <a:xfrm>
+            <a:off x="8229600" y="1463040"/>
+            <a:ext cx="3413455" cy="1037844"/>
+          </a:xfrm>
+          <a:prstGeom prst="roundRect">
+            <a:avLst>
+              <a:gd name="adj" fmla="val 7048"/>
+            </a:avLst>
+          </a:prstGeom>
+          <a:solidFill>
+            <a:srgbClr val="EEF2F4"/>
+          </a:solidFill>
+          <a:ln w="12700">
+            <a:solidFill>
+              <a:srgbClr val="EEF2F4"/>
+            </a:solidFill>
+            <a:prstDash val="solid"/>
+          </a:ln>
+        </p:spPr>
+      </p:sp>
+      <p:sp>
+        <p:nvSpPr>
+          <p:cNvPr id="6" name="Text 4"/>
+          <p:cNvSpPr txBox="1"/>
+          <p:nvPr/>
+        </p:nvSpPr>
+        <p:spPr>
+          <a:xfrm>
+            <a:off x="8394192" y="1627632"/>
+            <a:ext cx="365760" cy="365760"/>
+          </a:xfrm>
+          <a:prstGeom prst="roundRect">
+            <a:avLst>
+              <a:gd name="adj" fmla="val 20000"/>
+            </a:avLst>
+          </a:prstGeom>
+          <a:solidFill>
+            <a:srgbClr val="C7791B"/>
+          </a:solidFill>
+          <a:ln>
+            <a:solidFill>
+              <a:srgbClr val="C7791B"/>
+            </a:solidFill>
+          </a:ln>
+        </p:spPr>
+        <p:txBody>
+          <a:bodyPr wrap="square" lIns="0" tIns="0" rIns="0" bIns="0" rtlCol="0" anchor="ctr"/>
+          <a:lstStyle/>
+          <a:p>
+            <a:pPr algn="ctr" indent="0" marL="0">
+              <a:buNone/>
+            </a:pPr>
+            <a:r>
+              <a:rPr lang="en-US" sz="1400" b="1" dirty="0">
+                <a:solidFill>
+                  <a:srgbClr val="FFFFFF"/>
                 </a:solidFill>
                 <a:latin typeface="Calibri" pitchFamily="34" charset="0"/>
                 <a:ea typeface="Calibri" pitchFamily="34" charset="-122"/>
                 <a:cs typeface="Calibri" pitchFamily="34" charset="-120"/>
               </a:rPr>
-              <a:t>Limits you should recognise, errors you will meet</a:t>
-            </a:r>
-            <a:endParaRPr lang="en-US" sz="2200" dirty="0"/>
+              <a:t>1</a:t>
+            </a:r>
+            <a:endParaRPr lang="en-US" sz="1400" dirty="0"/>
+          </a:p>
+        </p:txBody>
+      </p:sp>
+      <p:sp>
+        <p:nvSpPr>
+          <p:cNvPr id="7" name="Text 5"/>
+          <p:cNvSpPr txBox="1"/>
+          <p:nvPr/>
+        </p:nvSpPr>
+        <p:spPr>
+          <a:xfrm>
+            <a:off x="8915400" y="1600200"/>
+            <a:ext cx="2544775" cy="763524"/>
+          </a:xfrm>
+          <a:prstGeom prst="rect">
+            <a:avLst/>
+          </a:prstGeom>
+          <a:noFill/>
+          <a:ln/>
+        </p:spPr>
+        <p:txBody>
+          <a:bodyPr wrap="square" lIns="0" tIns="0" rIns="0" bIns="0" rtlCol="0" anchor="ctr"/>
+          <a:lstStyle/>
+          <a:p>
+            <a:pPr indent="0" marL="0">
+              <a:buNone/>
+            </a:pPr>
+            <a:r>
+              <a:rPr lang="en-US" sz="1600" dirty="0">
+                <a:solidFill>
+                  <a:srgbClr val="1B2530"/>
+                </a:solidFill>
+                <a:latin typeface="Calibri" pitchFamily="34" charset="0"/>
+                <a:ea typeface="Calibri" pitchFamily="34" charset="-122"/>
+                <a:cs typeface="Calibri" pitchFamily="34" charset="-120"/>
+              </a:rPr>
+              <a:t>--portable: use the ABI table. Always.</a:t>
+            </a:r>
+            <a:endParaRPr lang="en-US" sz="1600" dirty="0"/>
+          </a:p>
+        </p:txBody>
+      </p:sp>
+      <p:sp>
+        <p:nvSpPr>
+          <p:cNvPr id="8" name="Shape 6"/>
+          <p:cNvSpPr/>
+          <p:nvPr/>
+        </p:nvSpPr>
+        <p:spPr>
+          <a:xfrm>
+            <a:off x="8229600" y="2702052"/>
+            <a:ext cx="3413455" cy="1037844"/>
+          </a:xfrm>
+          <a:prstGeom prst="roundRect">
+            <a:avLst>
+              <a:gd name="adj" fmla="val 7048"/>
+            </a:avLst>
+          </a:prstGeom>
+          <a:solidFill>
+            <a:srgbClr val="EEF2F4"/>
+          </a:solidFill>
+          <a:ln w="12700">
+            <a:solidFill>
+              <a:srgbClr val="EEF2F4"/>
+            </a:solidFill>
+            <a:prstDash val="solid"/>
+          </a:ln>
+        </p:spPr>
+      </p:sp>
+      <p:sp>
+        <p:nvSpPr>
+          <p:cNvPr id="9" name="Text 7"/>
+          <p:cNvSpPr txBox="1"/>
+          <p:nvPr/>
+        </p:nvSpPr>
+        <p:spPr>
+          <a:xfrm>
+            <a:off x="8394192" y="2866644"/>
+            <a:ext cx="365760" cy="365760"/>
+          </a:xfrm>
+          <a:prstGeom prst="roundRect">
+            <a:avLst>
+              <a:gd name="adj" fmla="val 20000"/>
+            </a:avLst>
+          </a:prstGeom>
+          <a:solidFill>
+            <a:srgbClr val="C7791B"/>
+          </a:solidFill>
+          <a:ln>
+            <a:solidFill>
+              <a:srgbClr val="C7791B"/>
+            </a:solidFill>
+          </a:ln>
+        </p:spPr>
+        <p:txBody>
+          <a:bodyPr wrap="square" lIns="0" tIns="0" rIns="0" bIns="0" rtlCol="0" anchor="ctr"/>
+          <a:lstStyle/>
+          <a:p>
+            <a:pPr algn="ctr" indent="0" marL="0">
+              <a:buNone/>
+            </a:pPr>
+            <a:r>
+              <a:rPr lang="en-US" sz="1400" b="1" dirty="0">
+                <a:solidFill>
+                  <a:srgbClr val="FFFFFF"/>
+                </a:solidFill>
+                <a:latin typeface="Calibri" pitchFamily="34" charset="0"/>
+                <a:ea typeface="Calibri" pitchFamily="34" charset="-122"/>
+                <a:cs typeface="Calibri" pitchFamily="34" charset="-120"/>
+              </a:rPr>
+              <a:t>2</a:t>
+            </a:r>
+            <a:endParaRPr lang="en-US" sz="1400" dirty="0"/>
+          </a:p>
+        </p:txBody>
+      </p:sp>
+      <p:sp>
+        <p:nvSpPr>
+          <p:cNvPr id="10" name="Text 8"/>
+          <p:cNvSpPr txBox="1"/>
+          <p:nvPr/>
+        </p:nvSpPr>
+        <p:spPr>
+          <a:xfrm>
+            <a:off x="8915400" y="2839212"/>
+            <a:ext cx="2544775" cy="763524"/>
+          </a:xfrm>
+          <a:prstGeom prst="rect">
+            <a:avLst/>
+          </a:prstGeom>
+          <a:noFill/>
+          <a:ln/>
+        </p:spPr>
+        <p:txBody>
+          <a:bodyPr wrap="square" lIns="0" tIns="0" rIns="0" bIns="0" rtlCol="0" anchor="ctr"/>
+          <a:lstStyle/>
+          <a:p>
+            <a:pPr indent="0" marL="0">
+              <a:buNone/>
+            </a:pPr>
+            <a:r>
+              <a:rPr lang="en-US" sz="1600" dirty="0">
+                <a:solidFill>
+                  <a:srgbClr val="1B2530"/>
+                </a:solidFill>
+                <a:latin typeface="Calibri" pitchFamily="34" charset="0"/>
+                <a:ea typeface="Calibri" pitchFamily="34" charset="-122"/>
+                <a:cs typeface="Calibri" pitchFamily="34" charset="-120"/>
+              </a:rPr>
+              <a:t>--entry-prefix: must match your three function names</a:t>
+            </a:r>
+            <a:endParaRPr lang="en-US" sz="1600" dirty="0"/>
+          </a:p>
+        </p:txBody>
+      </p:sp>
+      <p:sp>
+        <p:nvSpPr>
+          <p:cNvPr id="11" name="Shape 9"/>
+          <p:cNvSpPr/>
+          <p:nvPr/>
+        </p:nvSpPr>
+        <p:spPr>
+          <a:xfrm>
+            <a:off x="8229600" y="3941064"/>
+            <a:ext cx="3413455" cy="1037844"/>
+          </a:xfrm>
+          <a:prstGeom prst="roundRect">
+            <a:avLst>
+              <a:gd name="adj" fmla="val 7048"/>
+            </a:avLst>
+          </a:prstGeom>
+          <a:solidFill>
+            <a:srgbClr val="EEF2F4"/>
+          </a:solidFill>
+          <a:ln w="12700">
+            <a:solidFill>
+              <a:srgbClr val="EEF2F4"/>
+            </a:solidFill>
+            <a:prstDash val="solid"/>
+          </a:ln>
+        </p:spPr>
+      </p:sp>
+      <p:sp>
+        <p:nvSpPr>
+          <p:cNvPr id="12" name="Text 10"/>
+          <p:cNvSpPr txBox="1"/>
+          <p:nvPr/>
+        </p:nvSpPr>
+        <p:spPr>
+          <a:xfrm>
+            <a:off x="8394192" y="4105656"/>
+            <a:ext cx="365760" cy="365760"/>
+          </a:xfrm>
+          <a:prstGeom prst="roundRect">
+            <a:avLst>
+              <a:gd name="adj" fmla="val 20000"/>
+            </a:avLst>
+          </a:prstGeom>
+          <a:solidFill>
+            <a:srgbClr val="C7791B"/>
+          </a:solidFill>
+          <a:ln>
+            <a:solidFill>
+              <a:srgbClr val="C7791B"/>
+            </a:solidFill>
+          </a:ln>
+        </p:spPr>
+        <p:txBody>
+          <a:bodyPr wrap="square" lIns="0" tIns="0" rIns="0" bIns="0" rtlCol="0" anchor="ctr"/>
+          <a:lstStyle/>
+          <a:p>
+            <a:pPr algn="ctr" indent="0" marL="0">
+              <a:buNone/>
+            </a:pPr>
+            <a:r>
+              <a:rPr lang="en-US" sz="1400" b="1" dirty="0">
+                <a:solidFill>
+                  <a:srgbClr val="FFFFFF"/>
+                </a:solidFill>
+                <a:latin typeface="Calibri" pitchFamily="34" charset="0"/>
+                <a:ea typeface="Calibri" pitchFamily="34" charset="-122"/>
+                <a:cs typeface="Calibri" pitchFamily="34" charset="-120"/>
+              </a:rPr>
+              <a:t>3</a:t>
+            </a:r>
+            <a:endParaRPr lang="en-US" sz="1400" dirty="0"/>
+          </a:p>
+        </p:txBody>
+      </p:sp>
+      <p:sp>
+        <p:nvSpPr>
+          <p:cNvPr id="13" name="Text 11"/>
+          <p:cNvSpPr txBox="1"/>
+          <p:nvPr/>
+        </p:nvSpPr>
+        <p:spPr>
+          <a:xfrm>
+            <a:off x="8915400" y="4078224"/>
+            <a:ext cx="2544775" cy="763524"/>
+          </a:xfrm>
+          <a:prstGeom prst="rect">
+            <a:avLst/>
+          </a:prstGeom>
+          <a:noFill/>
+          <a:ln/>
+        </p:spPr>
+        <p:txBody>
+          <a:bodyPr wrap="square" lIns="0" tIns="0" rIns="0" bIns="0" rtlCol="0" anchor="ctr"/>
+          <a:lstStyle/>
+          <a:p>
+            <a:pPr indent="0" marL="0">
+              <a:buNone/>
+            </a:pPr>
+            <a:r>
+              <a:rPr lang="en-US" sz="1600" dirty="0">
+                <a:solidFill>
+                  <a:srgbClr val="1B2530"/>
+                </a:solidFill>
+                <a:latin typeface="Calibri" pitchFamily="34" charset="0"/>
+                <a:ea typeface="Calibri" pitchFamily="34" charset="-122"/>
+                <a:cs typeface="Calibri" pitchFamily="34" charset="-120"/>
+              </a:rPr>
+              <a:t>--name: what the menu shows</a:t>
+            </a:r>
+            <a:endParaRPr lang="en-US" sz="1600" dirty="0"/>
+          </a:p>
+        </p:txBody>
+      </p:sp>
+      <p:sp>
+        <p:nvSpPr>
+          <p:cNvPr id="14" name="Shape 12"/>
+          <p:cNvSpPr/>
+          <p:nvPr/>
+        </p:nvSpPr>
+        <p:spPr>
+          <a:xfrm>
+            <a:off x="8229600" y="5180076"/>
+            <a:ext cx="3413455" cy="1037844"/>
+          </a:xfrm>
+          <a:prstGeom prst="roundRect">
+            <a:avLst>
+              <a:gd name="adj" fmla="val 7048"/>
+            </a:avLst>
+          </a:prstGeom>
+          <a:solidFill>
+            <a:srgbClr val="EEF2F4"/>
+          </a:solidFill>
+          <a:ln w="12700">
+            <a:solidFill>
+              <a:srgbClr val="EEF2F4"/>
+            </a:solidFill>
+            <a:prstDash val="solid"/>
+          </a:ln>
+        </p:spPr>
+      </p:sp>
+      <p:sp>
+        <p:nvSpPr>
+          <p:cNvPr id="15" name="Text 13"/>
+          <p:cNvSpPr txBox="1"/>
+          <p:nvPr/>
+        </p:nvSpPr>
+        <p:spPr>
+          <a:xfrm>
+            <a:off x="8394192" y="5344668"/>
+            <a:ext cx="365760" cy="365760"/>
+          </a:xfrm>
+          <a:prstGeom prst="roundRect">
+            <a:avLst>
+              <a:gd name="adj" fmla="val 20000"/>
+            </a:avLst>
+          </a:prstGeom>
+          <a:solidFill>
+            <a:srgbClr val="C7791B"/>
+          </a:solidFill>
+          <a:ln>
+            <a:solidFill>
+              <a:srgbClr val="C7791B"/>
+            </a:solidFill>
+          </a:ln>
+        </p:spPr>
+        <p:txBody>
+          <a:bodyPr wrap="square" lIns="0" tIns="0" rIns="0" bIns="0" rtlCol="0" anchor="ctr"/>
+          <a:lstStyle/>
+          <a:p>
+            <a:pPr algn="ctr" indent="0" marL="0">
+              <a:buNone/>
+            </a:pPr>
+            <a:r>
+              <a:rPr lang="en-US" sz="1400" b="1" dirty="0">
+                <a:solidFill>
+                  <a:srgbClr val="FFFFFF"/>
+                </a:solidFill>
+                <a:latin typeface="Calibri" pitchFamily="34" charset="0"/>
+                <a:ea typeface="Calibri" pitchFamily="34" charset="-122"/>
+                <a:cs typeface="Calibri" pitchFamily="34" charset="-120"/>
+              </a:rPr>
+              <a:t>4</a:t>
+            </a:r>
+            <a:endParaRPr lang="en-US" sz="1400" dirty="0"/>
+          </a:p>
+        </p:txBody>
+      </p:sp>
+      <p:sp>
+        <p:nvSpPr>
+          <p:cNvPr id="16" name="Text 14"/>
+          <p:cNvSpPr txBox="1"/>
+          <p:nvPr/>
+        </p:nvSpPr>
+        <p:spPr>
+          <a:xfrm>
+            <a:off x="8915400" y="5317236"/>
+            <a:ext cx="2544775" cy="763524"/>
+          </a:xfrm>
+          <a:prstGeom prst="rect">
+            <a:avLst/>
+          </a:prstGeom>
+          <a:noFill/>
+          <a:ln/>
+        </p:spPr>
+        <p:txBody>
+          <a:bodyPr wrap="square" lIns="0" tIns="0" rIns="0" bIns="0" rtlCol="0" anchor="ctr"/>
+          <a:lstStyle/>
+          <a:p>
+            <a:pPr indent="0" marL="0">
+              <a:buNone/>
+            </a:pPr>
+            <a:r>
+              <a:rPr lang="en-US" sz="1600" dirty="0">
+                <a:solidFill>
+                  <a:srgbClr val="1B2530"/>
+                </a:solidFill>
+                <a:latin typeface="Calibri" pitchFamily="34" charset="0"/>
+                <a:ea typeface="Calibri" pitchFamily="34" charset="-122"/>
+                <a:cs typeface="Calibri" pitchFamily="34" charset="-120"/>
+              </a:rPr>
+              <a:t>--out: the cartridge file</a:t>
+            </a:r>
+            <a:endParaRPr lang="en-US" sz="1600" dirty="0"/>
           </a:p>
         </p:txBody>
       </p:sp>
@@ -14504,7 +16208,7 @@
             <a:lvl1pPr>
               <a:defRPr sz="1000">
                 <a:solidFill>
-                  <a:srgbClr val="CFE3EA"/>
+                  <a:srgbClr val="5B6B78"/>
                 </a:solidFill>
                 <a:latin typeface="Calibri"/>
                 <a:ea typeface="Calibri"/>
@@ -14582,6 +16286,654 @@
                 <a:ea typeface="Cambria" pitchFamily="34" charset="-122"/>
                 <a:cs typeface="Cambria" pitchFamily="34" charset="-120"/>
               </a:rPr>
+              <a:t>QEMU reads the keyboard from the terminal</a:t>
+            </a:r>
+            <a:endParaRPr lang="en-US" sz="3000" dirty="0"/>
+          </a:p>
+        </p:txBody>
+      </p:sp>
+      <p:sp>
+        <p:nvSpPr>
+          <p:cNvPr id="3" name="Text 1"/>
+          <p:cNvSpPr txBox="1"/>
+          <p:nvPr/>
+        </p:nvSpPr>
+        <p:spPr>
+          <a:xfrm>
+            <a:off x="548640" y="1481328"/>
+            <a:ext cx="457200" cy="457200"/>
+          </a:xfrm>
+          <a:prstGeom prst="roundRect">
+            <a:avLst>
+              <a:gd name="adj" fmla="val 16000"/>
+            </a:avLst>
+          </a:prstGeom>
+          <a:solidFill>
+            <a:srgbClr val="0E7C86"/>
+          </a:solidFill>
+          <a:ln>
+            <a:solidFill>
+              <a:srgbClr val="0E7C86"/>
+            </a:solidFill>
+          </a:ln>
+        </p:spPr>
+        <p:txBody>
+          <a:bodyPr wrap="square" lIns="0" tIns="0" rIns="0" bIns="0" rtlCol="0" anchor="ctr"/>
+          <a:lstStyle/>
+          <a:p>
+            <a:pPr algn="ctr" indent="0" marL="0">
+              <a:buNone/>
+            </a:pPr>
+            <a:r>
+              <a:rPr lang="en-US" sz="1700" b="1" dirty="0">
+                <a:solidFill>
+                  <a:srgbClr val="FFFFFF"/>
+                </a:solidFill>
+                <a:latin typeface="Calibri" pitchFamily="34" charset="0"/>
+                <a:ea typeface="Calibri" pitchFamily="34" charset="-122"/>
+                <a:cs typeface="Calibri" pitchFamily="34" charset="-120"/>
+              </a:rPr>
+              <a:t>1</a:t>
+            </a:r>
+            <a:endParaRPr lang="en-US" sz="1700" dirty="0"/>
+          </a:p>
+        </p:txBody>
+      </p:sp>
+      <p:sp>
+        <p:nvSpPr>
+          <p:cNvPr id="4" name="Text 2"/>
+          <p:cNvSpPr txBox="1"/>
+          <p:nvPr/>
+        </p:nvSpPr>
+        <p:spPr>
+          <a:xfrm>
+            <a:off x="1280160" y="1463040"/>
+            <a:ext cx="10362895" cy="493776"/>
+          </a:xfrm>
+          <a:prstGeom prst="rect">
+            <a:avLst/>
+          </a:prstGeom>
+          <a:noFill/>
+          <a:ln/>
+        </p:spPr>
+        <p:txBody>
+          <a:bodyPr wrap="square" lIns="0" tIns="0" rIns="0" bIns="0" rtlCol="0" anchor="ctr"/>
+          <a:lstStyle/>
+          <a:p>
+            <a:pPr indent="0" marL="0">
+              <a:buNone/>
+            </a:pPr>
+            <a:r>
+              <a:rPr lang="en-US" sz="2400" dirty="0">
+                <a:solidFill>
+                  <a:srgbClr val="1B2530"/>
+                </a:solidFill>
+                <a:latin typeface="Calibri" pitchFamily="34" charset="0"/>
+                <a:ea typeface="Calibri" pitchFamily="34" charset="-122"/>
+                <a:cs typeface="Calibri" pitchFamily="34" charset="-120"/>
+              </a:rPr>
+              <a:t>Click the terminal that launched QEMU, not the screen window</a:t>
+            </a:r>
+            <a:endParaRPr lang="en-US" sz="2400" dirty="0"/>
+          </a:p>
+        </p:txBody>
+      </p:sp>
+      <p:sp>
+        <p:nvSpPr>
+          <p:cNvPr id="5" name="Text 3"/>
+          <p:cNvSpPr txBox="1"/>
+          <p:nvPr/>
+        </p:nvSpPr>
+        <p:spPr>
+          <a:xfrm>
+            <a:off x="548640" y="2711196"/>
+            <a:ext cx="457200" cy="457200"/>
+          </a:xfrm>
+          <a:prstGeom prst="roundRect">
+            <a:avLst>
+              <a:gd name="adj" fmla="val 16000"/>
+            </a:avLst>
+          </a:prstGeom>
+          <a:solidFill>
+            <a:srgbClr val="0E7C86"/>
+          </a:solidFill>
+          <a:ln>
+            <a:solidFill>
+              <a:srgbClr val="0E7C86"/>
+            </a:solidFill>
+          </a:ln>
+        </p:spPr>
+        <p:txBody>
+          <a:bodyPr wrap="square" lIns="0" tIns="0" rIns="0" bIns="0" rtlCol="0" anchor="ctr"/>
+          <a:lstStyle/>
+          <a:p>
+            <a:pPr algn="ctr" indent="0" marL="0">
+              <a:buNone/>
+            </a:pPr>
+            <a:r>
+              <a:rPr lang="en-US" sz="1700" b="1" dirty="0">
+                <a:solidFill>
+                  <a:srgbClr val="FFFFFF"/>
+                </a:solidFill>
+                <a:latin typeface="Calibri" pitchFamily="34" charset="0"/>
+                <a:ea typeface="Calibri" pitchFamily="34" charset="-122"/>
+                <a:cs typeface="Calibri" pitchFamily="34" charset="-120"/>
+              </a:rPr>
+              <a:t>2</a:t>
+            </a:r>
+            <a:endParaRPr lang="en-US" sz="1700" dirty="0"/>
+          </a:p>
+        </p:txBody>
+      </p:sp>
+      <p:sp>
+        <p:nvSpPr>
+          <p:cNvPr id="6" name="Text 4"/>
+          <p:cNvSpPr txBox="1"/>
+          <p:nvPr/>
+        </p:nvSpPr>
+        <p:spPr>
+          <a:xfrm>
+            <a:off x="1280160" y="2692908"/>
+            <a:ext cx="10362895" cy="493776"/>
+          </a:xfrm>
+          <a:prstGeom prst="rect">
+            <a:avLst/>
+          </a:prstGeom>
+          <a:noFill/>
+          <a:ln/>
+        </p:spPr>
+        <p:txBody>
+          <a:bodyPr wrap="square" lIns="0" tIns="0" rIns="0" bIns="0" rtlCol="0" anchor="ctr"/>
+          <a:lstStyle/>
+          <a:p>
+            <a:pPr indent="0" marL="0">
+              <a:buNone/>
+            </a:pPr>
+            <a:r>
+              <a:rPr lang="en-US" sz="2400" dirty="0">
+                <a:solidFill>
+                  <a:srgbClr val="1B2530"/>
+                </a:solidFill>
+                <a:latin typeface="Calibri" pitchFamily="34" charset="0"/>
+                <a:ea typeface="Calibri" pitchFamily="34" charset="-122"/>
+                <a:cs typeface="Calibri" pitchFamily="34" charset="-120"/>
+              </a:rPr>
+              <a:t>Arrows or W A S D move; Z or J is A; X or K is B</a:t>
+            </a:r>
+            <a:endParaRPr lang="en-US" sz="2400" dirty="0"/>
+          </a:p>
+        </p:txBody>
+      </p:sp>
+      <p:sp>
+        <p:nvSpPr>
+          <p:cNvPr id="7" name="Text 5"/>
+          <p:cNvSpPr txBox="1"/>
+          <p:nvPr/>
+        </p:nvSpPr>
+        <p:spPr>
+          <a:xfrm>
+            <a:off x="548640" y="3941064"/>
+            <a:ext cx="457200" cy="457200"/>
+          </a:xfrm>
+          <a:prstGeom prst="roundRect">
+            <a:avLst>
+              <a:gd name="adj" fmla="val 16000"/>
+            </a:avLst>
+          </a:prstGeom>
+          <a:solidFill>
+            <a:srgbClr val="0E7C86"/>
+          </a:solidFill>
+          <a:ln>
+            <a:solidFill>
+              <a:srgbClr val="0E7C86"/>
+            </a:solidFill>
+          </a:ln>
+        </p:spPr>
+        <p:txBody>
+          <a:bodyPr wrap="square" lIns="0" tIns="0" rIns="0" bIns="0" rtlCol="0" anchor="ctr"/>
+          <a:lstStyle/>
+          <a:p>
+            <a:pPr algn="ctr" indent="0" marL="0">
+              <a:buNone/>
+            </a:pPr>
+            <a:r>
+              <a:rPr lang="en-US" sz="1700" b="1" dirty="0">
+                <a:solidFill>
+                  <a:srgbClr val="FFFFFF"/>
+                </a:solidFill>
+                <a:latin typeface="Calibri" pitchFamily="34" charset="0"/>
+                <a:ea typeface="Calibri" pitchFamily="34" charset="-122"/>
+                <a:cs typeface="Calibri" pitchFamily="34" charset="-120"/>
+              </a:rPr>
+              <a:t>3</a:t>
+            </a:r>
+            <a:endParaRPr lang="en-US" sz="1700" dirty="0"/>
+          </a:p>
+        </p:txBody>
+      </p:sp>
+      <p:sp>
+        <p:nvSpPr>
+          <p:cNvPr id="8" name="Text 6"/>
+          <p:cNvSpPr txBox="1"/>
+          <p:nvPr/>
+        </p:nvSpPr>
+        <p:spPr>
+          <a:xfrm>
+            <a:off x="1280160" y="3922776"/>
+            <a:ext cx="10362895" cy="493776"/>
+          </a:xfrm>
+          <a:prstGeom prst="rect">
+            <a:avLst/>
+          </a:prstGeom>
+          <a:noFill/>
+          <a:ln/>
+        </p:spPr>
+        <p:txBody>
+          <a:bodyPr wrap="square" lIns="0" tIns="0" rIns="0" bIns="0" rtlCol="0" anchor="ctr"/>
+          <a:lstStyle/>
+          <a:p>
+            <a:pPr indent="0" marL="0">
+              <a:buNone/>
+            </a:pPr>
+            <a:r>
+              <a:rPr lang="en-US" sz="2400" dirty="0">
+                <a:solidFill>
+                  <a:srgbClr val="1B2530"/>
+                </a:solidFill>
+                <a:latin typeface="Calibri" pitchFamily="34" charset="0"/>
+                <a:ea typeface="Calibri" pitchFamily="34" charset="-122"/>
+                <a:cs typeface="Calibri" pitchFamily="34" charset="-120"/>
+              </a:rPr>
+              <a:t>Enter or Space is Start/Select</a:t>
+            </a:r>
+            <a:endParaRPr lang="en-US" sz="2400" dirty="0"/>
+          </a:p>
+        </p:txBody>
+      </p:sp>
+      <p:sp>
+        <p:nvSpPr>
+          <p:cNvPr id="9" name="Text 7"/>
+          <p:cNvSpPr txBox="1"/>
+          <p:nvPr/>
+        </p:nvSpPr>
+        <p:spPr>
+          <a:xfrm>
+            <a:off x="548640" y="5170932"/>
+            <a:ext cx="457200" cy="457200"/>
+          </a:xfrm>
+          <a:prstGeom prst="roundRect">
+            <a:avLst>
+              <a:gd name="adj" fmla="val 16000"/>
+            </a:avLst>
+          </a:prstGeom>
+          <a:solidFill>
+            <a:srgbClr val="0E7C86"/>
+          </a:solidFill>
+          <a:ln>
+            <a:solidFill>
+              <a:srgbClr val="0E7C86"/>
+            </a:solidFill>
+          </a:ln>
+        </p:spPr>
+        <p:txBody>
+          <a:bodyPr wrap="square" lIns="0" tIns="0" rIns="0" bIns="0" rtlCol="0" anchor="ctr"/>
+          <a:lstStyle/>
+          <a:p>
+            <a:pPr algn="ctr" indent="0" marL="0">
+              <a:buNone/>
+            </a:pPr>
+            <a:r>
+              <a:rPr lang="en-US" sz="1700" b="1" dirty="0">
+                <a:solidFill>
+                  <a:srgbClr val="FFFFFF"/>
+                </a:solidFill>
+                <a:latin typeface="Calibri" pitchFamily="34" charset="0"/>
+                <a:ea typeface="Calibri" pitchFamily="34" charset="-122"/>
+                <a:cs typeface="Calibri" pitchFamily="34" charset="-120"/>
+              </a:rPr>
+              <a:t>4</a:t>
+            </a:r>
+            <a:endParaRPr lang="en-US" sz="1700" dirty="0"/>
+          </a:p>
+        </p:txBody>
+      </p:sp>
+      <p:sp>
+        <p:nvSpPr>
+          <p:cNvPr id="10" name="Text 8"/>
+          <p:cNvSpPr txBox="1"/>
+          <p:nvPr/>
+        </p:nvSpPr>
+        <p:spPr>
+          <a:xfrm>
+            <a:off x="1280160" y="5152644"/>
+            <a:ext cx="10362895" cy="493776"/>
+          </a:xfrm>
+          <a:prstGeom prst="rect">
+            <a:avLst/>
+          </a:prstGeom>
+          <a:noFill/>
+          <a:ln/>
+        </p:spPr>
+        <p:txBody>
+          <a:bodyPr wrap="square" lIns="0" tIns="0" rIns="0" bIns="0" rtlCol="0" anchor="ctr"/>
+          <a:lstStyle/>
+          <a:p>
+            <a:pPr indent="0" marL="0">
+              <a:buNone/>
+            </a:pPr>
+            <a:r>
+              <a:rPr lang="en-US" sz="2400" dirty="0">
+                <a:solidFill>
+                  <a:srgbClr val="1B2530"/>
+                </a:solidFill>
+                <a:latin typeface="Calibri" pitchFamily="34" charset="0"/>
+                <a:ea typeface="Calibri" pitchFamily="34" charset="-122"/>
+                <a:cs typeface="Calibri" pitchFamily="34" charset="-120"/>
+              </a:rPr>
+              <a:t>Close QEMU before staging a new cartridge</a:t>
+            </a:r>
+            <a:endParaRPr lang="en-US" sz="2400" dirty="0"/>
+          </a:p>
+        </p:txBody>
+      </p:sp>
+      <p:sp>
+        <p:nvSpPr>
+          <p:cNvPr id="25" name="Slide Number Placeholder 0"/>
+          <p:cNvSpPr>
+            <a:spLocks noGrp="1"/>
+          </p:cNvSpPr>
+          <p:nvPr>
+            <p:ph type="sldNum" sz="quarter" idx="4294967295"/>
+          </p:nvPr>
+        </p:nvSpPr>
+        <p:spPr>
+          <a:xfrm>
+            <a:off x="11002975" y="6419088"/>
+            <a:ext cx="640080" cy="274320"/>
+          </a:xfrm>
+          <a:prstGeom prst="rect">
+            <a:avLst/>
+          </a:prstGeom>
+          <a:extLst>
+            <a:ext uri="{C572A759-6A51-4108-AA02-DFA0A04FC94B}">
+              <ma14:wrappingTextBoxFlag xmlns:ma14="http://schemas.microsoft.com/office/mac/drawingml/2011/main" val="0"/>
+            </a:ext>
+          </a:extLst>
+        </p:spPr>
+        <p:txBody>
+          <a:bodyPr/>
+          <a:lstStyle>
+            <a:lvl1pPr>
+              <a:defRPr sz="1000">
+                <a:solidFill>
+                  <a:srgbClr val="5B6B78"/>
+                </a:solidFill>
+                <a:latin typeface="Calibri"/>
+                <a:ea typeface="Calibri"/>
+                <a:cs typeface="Calibri"/>
+              </a:defRPr>
+            </a:lvl1pPr>
+          </a:lstStyle>
+          <a:p>
+            <a:pPr algn="r"/>
+            <a:fld id="{F7021451-1387-4CA6-816F-3879F97B5CBC}" type="slidenum">
+              <a:rPr b="0" lang="en-US"/>
+              <a:t>25</a:t>
+            </a:fld>
+            <a:endParaRPr lang="en-US"/>
+          </a:p>
+        </p:txBody>
+      </p:sp>
+    </p:spTree>
+  </p:cSld>
+  <p:clrMapOvr>
+    <a:masterClrMapping/>
+  </p:clrMapOvr>
+</p:sld>
+</file>
+
+<file path=ppt/slides/slide26.xml><?xml version="1.0" encoding="utf-8"?>
+<p:sld xmlns:a="http://schemas.openxmlformats.org/drawingml/2006/main" xmlns:r="http://schemas.openxmlformats.org/officeDocument/2006/relationships" xmlns:p="http://schemas.openxmlformats.org/presentationml/2006/main">
+  <p:cSld name="Slide 26">
+    <p:spTree>
+      <p:nvGrpSpPr>
+        <p:cNvPr id="1" name=""/>
+        <p:cNvGrpSpPr/>
+        <p:nvPr/>
+      </p:nvGrpSpPr>
+      <p:grpSpPr>
+        <a:xfrm>
+          <a:off x="0" y="0"/>
+          <a:ext cx="0" cy="0"/>
+          <a:chOff x="0" y="0"/>
+          <a:chExt cx="0" cy="0"/>
+        </a:xfrm>
+      </p:grpSpPr>
+      <p:sp>
+        <p:nvSpPr>
+          <p:cNvPr id="2" name="Text 0"/>
+          <p:cNvSpPr txBox="1"/>
+          <p:nvPr/>
+        </p:nvSpPr>
+        <p:spPr>
+          <a:xfrm>
+            <a:off x="548640" y="1371600"/>
+            <a:ext cx="2743200" cy="1188720"/>
+          </a:xfrm>
+          <a:prstGeom prst="rect">
+            <a:avLst/>
+          </a:prstGeom>
+          <a:noFill/>
+          <a:ln/>
+        </p:spPr>
+        <p:txBody>
+          <a:bodyPr wrap="square" lIns="0" tIns="0" rIns="0" bIns="0" rtlCol="0" anchor="t"/>
+          <a:lstStyle/>
+          <a:p>
+            <a:pPr indent="0" marL="0">
+              <a:buNone/>
+            </a:pPr>
+            <a:r>
+              <a:rPr lang="en-US" sz="8000" b="1" dirty="0">
+                <a:solidFill>
+                  <a:srgbClr val="5CC7D1"/>
+                </a:solidFill>
+                <a:latin typeface="Cambria" pitchFamily="34" charset="0"/>
+                <a:ea typeface="Cambria" pitchFamily="34" charset="-122"/>
+                <a:cs typeface="Cambria" pitchFamily="34" charset="-120"/>
+              </a:rPr>
+              <a:t>04</a:t>
+            </a:r>
+            <a:endParaRPr lang="en-US" sz="8000" dirty="0"/>
+          </a:p>
+        </p:txBody>
+      </p:sp>
+      <p:sp>
+        <p:nvSpPr>
+          <p:cNvPr id="3" name="Text 1"/>
+          <p:cNvSpPr txBox="1"/>
+          <p:nvPr/>
+        </p:nvSpPr>
+        <p:spPr>
+          <a:xfrm>
+            <a:off x="548640" y="2834640"/>
+            <a:ext cx="11094415" cy="1371600"/>
+          </a:xfrm>
+          <a:prstGeom prst="rect">
+            <a:avLst/>
+          </a:prstGeom>
+          <a:noFill/>
+          <a:ln/>
+        </p:spPr>
+        <p:txBody>
+          <a:bodyPr wrap="square" lIns="0" tIns="0" rIns="0" bIns="0" rtlCol="0" anchor="ctr"/>
+          <a:lstStyle/>
+          <a:p>
+            <a:pPr indent="0" marL="0">
+              <a:buNone/>
+            </a:pPr>
+            <a:r>
+              <a:rPr lang="en-US" sz="4200" b="1" dirty="0">
+                <a:solidFill>
+                  <a:srgbClr val="FFFFFF"/>
+                </a:solidFill>
+                <a:latin typeface="Cambria" pitchFamily="34" charset="0"/>
+                <a:ea typeface="Cambria" pitchFamily="34" charset="-122"/>
+                <a:cs typeface="Cambria" pitchFamily="34" charset="-120"/>
+              </a:rPr>
+              <a:t>Profiles and diagnosis</a:t>
+            </a:r>
+            <a:endParaRPr lang="en-US" sz="4200" dirty="0"/>
+          </a:p>
+        </p:txBody>
+      </p:sp>
+      <p:sp>
+        <p:nvSpPr>
+          <p:cNvPr id="4" name="Text 2"/>
+          <p:cNvSpPr txBox="1"/>
+          <p:nvPr/>
+        </p:nvSpPr>
+        <p:spPr>
+          <a:xfrm>
+            <a:off x="548640" y="4389120"/>
+            <a:ext cx="11094415" cy="1097280"/>
+          </a:xfrm>
+          <a:prstGeom prst="rect">
+            <a:avLst/>
+          </a:prstGeom>
+          <a:noFill/>
+          <a:ln/>
+        </p:spPr>
+        <p:txBody>
+          <a:bodyPr wrap="square" lIns="0" tIns="0" rIns="0" bIns="0" rtlCol="0" anchor="t"/>
+          <a:lstStyle/>
+          <a:p>
+            <a:pPr indent="0" marL="0">
+              <a:buNone/>
+            </a:pPr>
+            <a:r>
+              <a:rPr lang="en-US" sz="2200" dirty="0">
+                <a:solidFill>
+                  <a:srgbClr val="CFE3EA"/>
+                </a:solidFill>
+                <a:latin typeface="Calibri" pitchFamily="34" charset="0"/>
+                <a:ea typeface="Calibri" pitchFamily="34" charset="-122"/>
+                <a:cs typeface="Calibri" pitchFamily="34" charset="-120"/>
+              </a:rPr>
+              <a:t>Limits you should recognise, errors you will meet</a:t>
+            </a:r>
+            <a:endParaRPr lang="en-US" sz="2200" dirty="0"/>
+          </a:p>
+        </p:txBody>
+      </p:sp>
+      <p:sp>
+        <p:nvSpPr>
+          <p:cNvPr id="25" name="Slide Number Placeholder 0"/>
+          <p:cNvSpPr>
+            <a:spLocks noGrp="1"/>
+          </p:cNvSpPr>
+          <p:nvPr>
+            <p:ph type="sldNum" sz="quarter" idx="4294967295"/>
+          </p:nvPr>
+        </p:nvSpPr>
+        <p:spPr>
+          <a:xfrm>
+            <a:off x="11002975" y="6419088"/>
+            <a:ext cx="640080" cy="274320"/>
+          </a:xfrm>
+          <a:prstGeom prst="rect">
+            <a:avLst/>
+          </a:prstGeom>
+          <a:extLst>
+            <a:ext uri="{C572A759-6A51-4108-AA02-DFA0A04FC94B}">
+              <ma14:wrappingTextBoxFlag xmlns:ma14="http://schemas.microsoft.com/office/mac/drawingml/2011/main" val="0"/>
+            </a:ext>
+          </a:extLst>
+        </p:spPr>
+        <p:txBody>
+          <a:bodyPr/>
+          <a:lstStyle>
+            <a:lvl1pPr>
+              <a:defRPr sz="1000">
+                <a:solidFill>
+                  <a:srgbClr val="CFE3EA"/>
+                </a:solidFill>
+                <a:latin typeface="Calibri"/>
+                <a:ea typeface="Calibri"/>
+                <a:cs typeface="Calibri"/>
+              </a:defRPr>
+            </a:lvl1pPr>
+          </a:lstStyle>
+          <a:p>
+            <a:pPr algn="r"/>
+            <a:fld id="{F7021451-1387-4CA6-816F-3879F97B5CBC}" type="slidenum">
+              <a:rPr b="0" lang="en-US"/>
+              <a:t>26</a:t>
+            </a:fld>
+            <a:endParaRPr lang="en-US"/>
+          </a:p>
+        </p:txBody>
+      </p:sp>
+    </p:spTree>
+  </p:cSld>
+  <p:clrMapOvr>
+    <a:masterClrMapping/>
+  </p:clrMapOvr>
+</p:sld>
+</file>
+
+<file path=ppt/slides/slide27.xml><?xml version="1.0" encoding="utf-8"?>
+<p:sld xmlns:a="http://schemas.openxmlformats.org/drawingml/2006/main" xmlns:r="http://schemas.openxmlformats.org/officeDocument/2006/relationships" xmlns:p="http://schemas.openxmlformats.org/presentationml/2006/main">
+  <p:cSld name="Slide 27">
+    <p:spTree>
+      <p:nvGrpSpPr>
+        <p:cNvPr id="1" name=""/>
+        <p:cNvGrpSpPr/>
+        <p:nvPr/>
+      </p:nvGrpSpPr>
+      <p:grpSpPr>
+        <a:xfrm>
+          <a:off x="0" y="0"/>
+          <a:ext cx="0" cy="0"/>
+          <a:chOff x="0" y="0"/>
+          <a:chExt cx="0" cy="0"/>
+        </a:xfrm>
+      </p:grpSpPr>
+      <p:sp>
+        <p:nvSpPr>
+          <p:cNvPr id="2" name="Text 1"/>
+          <p:cNvSpPr/>
+          <p:nvPr>
+            <p:ph idx="101" type="title" hasCustomPrompt="1"/>
+          </p:nvPr>
+        </p:nvSpPr>
+        <p:spPr>
+          <a:xfrm>
+            <a:off x="548640" y="384048"/>
+            <a:ext cx="11094415" cy="868680"/>
+          </a:xfrm>
+          <a:prstGeom prst="rect">
+            <a:avLst/>
+          </a:prstGeom>
+          <a:noFill/>
+          <a:ln/>
+        </p:spPr>
+        <p:txBody>
+          <a:bodyPr wrap="square" lIns="0" tIns="0" rIns="0" bIns="0" rtlCol="0" anchor="ctr"/>
+          <a:lstStyle/>
+          <a:p>
+            <a:pPr algn="l" indent="0" marL="0">
+              <a:buNone/>
+            </a:pPr>
+            <a:r>
+              <a:rPr lang="en-US" sz="3000" b="1" dirty="0">
+                <a:solidFill>
+                  <a:srgbClr val="2E4A62"/>
+                </a:solidFill>
+                <a:latin typeface="Cambria" pitchFamily="34" charset="0"/>
+                <a:ea typeface="Cambria" pitchFamily="34" charset="-122"/>
+                <a:cs typeface="Cambria" pitchFamily="34" charset="-120"/>
+              </a:rPr>
               <a:t>Cartridge memory profiles</a:t>
             </a:r>
             <a:endParaRPr lang="en-US" sz="3000" dirty="0"/>
@@ -14590,7 +16942,7 @@
       </p:sp>
       <p:graphicFrame>
         <p:nvGraphicFramePr>
-          <p:cNvPr id="26" name="Table 0"/>
+          <p:cNvPr id="28" name="Table 0"/>
           <p:cNvGraphicFramePr>
             <a:graphicFrameLocks noGrp="1"/>
           </p:cNvGraphicFramePr>
@@ -15485,7 +17837,7 @@
             <a:pPr algn="r"/>
             <a:fld id="{F7021451-1387-4CA6-816F-3879F97B5CBC}" type="slidenum">
               <a:rPr b="0" lang="en-US"/>
-              <a:t>25</a:t>
+              <a:t>27</a:t>
             </a:fld>
             <a:endParaRPr lang="en-US"/>
           </a:p>
@@ -15499,9 +17851,9 @@
 </p:sld>
 </file>
 
-<file path=ppt/slides/slide26.xml><?xml version="1.0" encoding="utf-8"?>
+<file path=ppt/slides/slide28.xml><?xml version="1.0" encoding="utf-8"?>
 <p:sld xmlns:a="http://schemas.openxmlformats.org/drawingml/2006/main" xmlns:r="http://schemas.openxmlformats.org/officeDocument/2006/relationships" xmlns:p="http://schemas.openxmlformats.org/presentationml/2006/main">
-  <p:cSld name="Slide 26">
+  <p:cSld name="Slide 28">
     <p:spTree>
       <p:nvGrpSpPr>
         <p:cNvPr id="1" name=""/>
@@ -15551,6 +17903,655 @@
                 <a:ea typeface="Cambria" pitchFamily="34" charset="-122"/>
                 <a:cs typeface="Cambria" pitchFamily="34" charset="-120"/>
               </a:rPr>
+              <a:t>Sizes you will actually see</a:t>
+            </a:r>
+            <a:endParaRPr lang="en-US" sz="3000" dirty="0"/>
+          </a:p>
+        </p:txBody>
+      </p:sp>
+      <p:sp>
+        <p:nvSpPr>
+          <p:cNvPr id="3" name="Text 1"/>
+          <p:cNvSpPr txBox="1"/>
+          <p:nvPr/>
+        </p:nvSpPr>
+        <p:spPr>
+          <a:xfrm>
+            <a:off x="548640" y="1481328"/>
+            <a:ext cx="457200" cy="457200"/>
+          </a:xfrm>
+          <a:prstGeom prst="roundRect">
+            <a:avLst>
+              <a:gd name="adj" fmla="val 16000"/>
+            </a:avLst>
+          </a:prstGeom>
+          <a:solidFill>
+            <a:srgbClr val="0E7C86"/>
+          </a:solidFill>
+          <a:ln>
+            <a:solidFill>
+              <a:srgbClr val="0E7C86"/>
+            </a:solidFill>
+          </a:ln>
+        </p:spPr>
+        <p:txBody>
+          <a:bodyPr wrap="square" lIns="0" tIns="0" rIns="0" bIns="0" rtlCol="0" anchor="ctr"/>
+          <a:lstStyle/>
+          <a:p>
+            <a:pPr algn="ctr" indent="0" marL="0">
+              <a:buNone/>
+            </a:pPr>
+            <a:r>
+              <a:rPr lang="en-US" sz="1700" b="1" dirty="0">
+                <a:solidFill>
+                  <a:srgbClr val="FFFFFF"/>
+                </a:solidFill>
+                <a:latin typeface="Calibri" pitchFamily="34" charset="0"/>
+                <a:ea typeface="Calibri" pitchFamily="34" charset="-122"/>
+                <a:cs typeface="Calibri" pitchFamily="34" charset="-120"/>
+              </a:rPr>
+              <a:t>1</a:t>
+            </a:r>
+            <a:endParaRPr lang="en-US" sz="1700" dirty="0"/>
+          </a:p>
+        </p:txBody>
+      </p:sp>
+      <p:sp>
+        <p:nvSpPr>
+          <p:cNvPr id="4" name="Text 2"/>
+          <p:cNvSpPr txBox="1"/>
+          <p:nvPr/>
+        </p:nvSpPr>
+        <p:spPr>
+          <a:xfrm>
+            <a:off x="1280160" y="1463040"/>
+            <a:ext cx="6492240" cy="819302"/>
+          </a:xfrm>
+          <a:prstGeom prst="rect">
+            <a:avLst/>
+          </a:prstGeom>
+          <a:noFill/>
+          <a:ln/>
+        </p:spPr>
+        <p:txBody>
+          <a:bodyPr wrap="square" lIns="0" tIns="0" rIns="0" bIns="0" rtlCol="0" anchor="t"/>
+          <a:lstStyle/>
+          <a:p>
+            <a:pPr indent="0" marL="0">
+              <a:buNone/>
+            </a:pPr>
+            <a:r>
+              <a:rPr lang="en-US" sz="2200" dirty="0">
+                <a:solidFill>
+                  <a:srgbClr val="1B2530"/>
+                </a:solidFill>
+                <a:latin typeface="Calibri" pitchFamily="34" charset="0"/>
+                <a:ea typeface="Calibri" pitchFamily="34" charset="-122"/>
+                <a:cs typeface="Calibri" pitchFamily="34" charset="-120"/>
+              </a:rPr>
+              <a:t>Empty cartridge: 2604 bytes (stubs and trampolines)</a:t>
+            </a:r>
+            <a:endParaRPr lang="en-US" sz="2200" dirty="0"/>
+          </a:p>
+        </p:txBody>
+      </p:sp>
+      <p:sp>
+        <p:nvSpPr>
+          <p:cNvPr id="5" name="Text 3"/>
+          <p:cNvSpPr txBox="1"/>
+          <p:nvPr/>
+        </p:nvSpPr>
+        <p:spPr>
+          <a:xfrm>
+            <a:off x="548640" y="2465222"/>
+            <a:ext cx="457200" cy="457200"/>
+          </a:xfrm>
+          <a:prstGeom prst="roundRect">
+            <a:avLst>
+              <a:gd name="adj" fmla="val 16000"/>
+            </a:avLst>
+          </a:prstGeom>
+          <a:solidFill>
+            <a:srgbClr val="0E7C86"/>
+          </a:solidFill>
+          <a:ln>
+            <a:solidFill>
+              <a:srgbClr val="0E7C86"/>
+            </a:solidFill>
+          </a:ln>
+        </p:spPr>
+        <p:txBody>
+          <a:bodyPr wrap="square" lIns="0" tIns="0" rIns="0" bIns="0" rtlCol="0" anchor="ctr"/>
+          <a:lstStyle/>
+          <a:p>
+            <a:pPr algn="ctr" indent="0" marL="0">
+              <a:buNone/>
+            </a:pPr>
+            <a:r>
+              <a:rPr lang="en-US" sz="1700" b="1" dirty="0">
+                <a:solidFill>
+                  <a:srgbClr val="FFFFFF"/>
+                </a:solidFill>
+                <a:latin typeface="Calibri" pitchFamily="34" charset="0"/>
+                <a:ea typeface="Calibri" pitchFamily="34" charset="-122"/>
+                <a:cs typeface="Calibri" pitchFamily="34" charset="-120"/>
+              </a:rPr>
+              <a:t>2</a:t>
+            </a:r>
+            <a:endParaRPr lang="en-US" sz="1700" dirty="0"/>
+          </a:p>
+        </p:txBody>
+      </p:sp>
+      <p:sp>
+        <p:nvSpPr>
+          <p:cNvPr id="6" name="Text 4"/>
+          <p:cNvSpPr txBox="1"/>
+          <p:nvPr/>
+        </p:nvSpPr>
+        <p:spPr>
+          <a:xfrm>
+            <a:off x="1280160" y="2446934"/>
+            <a:ext cx="6492240" cy="493776"/>
+          </a:xfrm>
+          <a:prstGeom prst="rect">
+            <a:avLst/>
+          </a:prstGeom>
+          <a:noFill/>
+          <a:ln/>
+        </p:spPr>
+        <p:txBody>
+          <a:bodyPr wrap="square" lIns="0" tIns="0" rIns="0" bIns="0" rtlCol="0" anchor="ctr"/>
+          <a:lstStyle/>
+          <a:p>
+            <a:pPr indent="0" marL="0">
+              <a:buNone/>
+            </a:pPr>
+            <a:r>
+              <a:rPr lang="en-US" sz="2200" dirty="0">
+                <a:solidFill>
+                  <a:srgbClr val="1B2530"/>
+                </a:solidFill>
+                <a:latin typeface="Calibri" pitchFamily="34" charset="0"/>
+                <a:ea typeface="Calibri" pitchFamily="34" charset="-122"/>
+                <a:cs typeface="Calibri" pitchFamily="34" charset="-120"/>
+              </a:rPr>
+              <a:t>Hello world with one text call: 2664</a:t>
+            </a:r>
+            <a:endParaRPr lang="en-US" sz="2200" dirty="0"/>
+          </a:p>
+        </p:txBody>
+      </p:sp>
+      <p:sp>
+        <p:nvSpPr>
+          <p:cNvPr id="7" name="Text 5"/>
+          <p:cNvSpPr txBox="1"/>
+          <p:nvPr/>
+        </p:nvSpPr>
+        <p:spPr>
+          <a:xfrm>
+            <a:off x="548640" y="3449117"/>
+            <a:ext cx="457200" cy="457200"/>
+          </a:xfrm>
+          <a:prstGeom prst="roundRect">
+            <a:avLst>
+              <a:gd name="adj" fmla="val 16000"/>
+            </a:avLst>
+          </a:prstGeom>
+          <a:solidFill>
+            <a:srgbClr val="0E7C86"/>
+          </a:solidFill>
+          <a:ln>
+            <a:solidFill>
+              <a:srgbClr val="0E7C86"/>
+            </a:solidFill>
+          </a:ln>
+        </p:spPr>
+        <p:txBody>
+          <a:bodyPr wrap="square" lIns="0" tIns="0" rIns="0" bIns="0" rtlCol="0" anchor="ctr"/>
+          <a:lstStyle/>
+          <a:p>
+            <a:pPr algn="ctr" indent="0" marL="0">
+              <a:buNone/>
+            </a:pPr>
+            <a:r>
+              <a:rPr lang="en-US" sz="1700" b="1" dirty="0">
+                <a:solidFill>
+                  <a:srgbClr val="FFFFFF"/>
+                </a:solidFill>
+                <a:latin typeface="Calibri" pitchFamily="34" charset="0"/>
+                <a:ea typeface="Calibri" pitchFamily="34" charset="-122"/>
+                <a:cs typeface="Calibri" pitchFamily="34" charset="-120"/>
+              </a:rPr>
+              <a:t>3</a:t>
+            </a:r>
+            <a:endParaRPr lang="en-US" sz="1700" dirty="0"/>
+          </a:p>
+        </p:txBody>
+      </p:sp>
+      <p:sp>
+        <p:nvSpPr>
+          <p:cNvPr id="8" name="Text 6"/>
+          <p:cNvSpPr txBox="1"/>
+          <p:nvPr/>
+        </p:nvSpPr>
+        <p:spPr>
+          <a:xfrm>
+            <a:off x="1280160" y="3430829"/>
+            <a:ext cx="6492240" cy="493776"/>
+          </a:xfrm>
+          <a:prstGeom prst="rect">
+            <a:avLst/>
+          </a:prstGeom>
+          <a:noFill/>
+          <a:ln/>
+        </p:spPr>
+        <p:txBody>
+          <a:bodyPr wrap="square" lIns="0" tIns="0" rIns="0" bIns="0" rtlCol="0" anchor="ctr"/>
+          <a:lstStyle/>
+          <a:p>
+            <a:pPr indent="0" marL="0">
+              <a:buNone/>
+            </a:pPr>
+            <a:r>
+              <a:rPr lang="en-US" sz="2200" dirty="0">
+                <a:solidFill>
+                  <a:srgbClr val="1B2530"/>
+                </a:solidFill>
+                <a:latin typeface="Calibri" pitchFamily="34" charset="0"/>
+                <a:ea typeface="Calibri" pitchFamily="34" charset="-122"/>
+                <a:cs typeface="Calibri" pitchFamily="34" charset="-120"/>
+              </a:rPr>
+              <a:t>Complete Pong in assembly: 2984; in C: 2952</a:t>
+            </a:r>
+            <a:endParaRPr lang="en-US" sz="2200" dirty="0"/>
+          </a:p>
+        </p:txBody>
+      </p:sp>
+      <p:sp>
+        <p:nvSpPr>
+          <p:cNvPr id="9" name="Text 7"/>
+          <p:cNvSpPr txBox="1"/>
+          <p:nvPr/>
+        </p:nvSpPr>
+        <p:spPr>
+          <a:xfrm>
+            <a:off x="548640" y="4433011"/>
+            <a:ext cx="457200" cy="457200"/>
+          </a:xfrm>
+          <a:prstGeom prst="roundRect">
+            <a:avLst>
+              <a:gd name="adj" fmla="val 16000"/>
+            </a:avLst>
+          </a:prstGeom>
+          <a:solidFill>
+            <a:srgbClr val="0E7C86"/>
+          </a:solidFill>
+          <a:ln>
+            <a:solidFill>
+              <a:srgbClr val="0E7C86"/>
+            </a:solidFill>
+          </a:ln>
+        </p:spPr>
+        <p:txBody>
+          <a:bodyPr wrap="square" lIns="0" tIns="0" rIns="0" bIns="0" rtlCol="0" anchor="ctr"/>
+          <a:lstStyle/>
+          <a:p>
+            <a:pPr algn="ctr" indent="0" marL="0">
+              <a:buNone/>
+            </a:pPr>
+            <a:r>
+              <a:rPr lang="en-US" sz="1700" b="1" dirty="0">
+                <a:solidFill>
+                  <a:srgbClr val="FFFFFF"/>
+                </a:solidFill>
+                <a:latin typeface="Calibri" pitchFamily="34" charset="0"/>
+                <a:ea typeface="Calibri" pitchFamily="34" charset="-122"/>
+                <a:cs typeface="Calibri" pitchFamily="34" charset="-120"/>
+              </a:rPr>
+              <a:t>4</a:t>
+            </a:r>
+            <a:endParaRPr lang="en-US" sz="1700" dirty="0"/>
+          </a:p>
+        </p:txBody>
+      </p:sp>
+      <p:sp>
+        <p:nvSpPr>
+          <p:cNvPr id="10" name="Text 8"/>
+          <p:cNvSpPr txBox="1"/>
+          <p:nvPr/>
+        </p:nvSpPr>
+        <p:spPr>
+          <a:xfrm>
+            <a:off x="1280160" y="4414723"/>
+            <a:ext cx="6492240" cy="819302"/>
+          </a:xfrm>
+          <a:prstGeom prst="rect">
+            <a:avLst/>
+          </a:prstGeom>
+          <a:noFill/>
+          <a:ln/>
+        </p:spPr>
+        <p:txBody>
+          <a:bodyPr wrap="square" lIns="0" tIns="0" rIns="0" bIns="0" rtlCol="0" anchor="t"/>
+          <a:lstStyle/>
+          <a:p>
+            <a:pPr indent="0" marL="0">
+              <a:buNone/>
+            </a:pPr>
+            <a:r>
+              <a:rPr lang="en-US" sz="2200" dirty="0">
+                <a:solidFill>
+                  <a:srgbClr val="1B2530"/>
+                </a:solidFill>
+                <a:latin typeface="Calibri" pitchFamily="34" charset="0"/>
+                <a:ea typeface="Calibri" pitchFamily="34" charset="-122"/>
+                <a:cs typeface="Calibri" pitchFamily="34" charset="-120"/>
+              </a:rPr>
+              <a:t>Breakout with bricks, score and sound: about 3.4 KiB</a:t>
+            </a:r>
+            <a:endParaRPr lang="en-US" sz="2200" dirty="0"/>
+          </a:p>
+        </p:txBody>
+      </p:sp>
+      <p:sp>
+        <p:nvSpPr>
+          <p:cNvPr id="11" name="Text 9"/>
+          <p:cNvSpPr txBox="1"/>
+          <p:nvPr/>
+        </p:nvSpPr>
+        <p:spPr>
+          <a:xfrm>
+            <a:off x="548640" y="5416906"/>
+            <a:ext cx="457200" cy="457200"/>
+          </a:xfrm>
+          <a:prstGeom prst="roundRect">
+            <a:avLst>
+              <a:gd name="adj" fmla="val 16000"/>
+            </a:avLst>
+          </a:prstGeom>
+          <a:solidFill>
+            <a:srgbClr val="0E7C86"/>
+          </a:solidFill>
+          <a:ln>
+            <a:solidFill>
+              <a:srgbClr val="0E7C86"/>
+            </a:solidFill>
+          </a:ln>
+        </p:spPr>
+        <p:txBody>
+          <a:bodyPr wrap="square" lIns="0" tIns="0" rIns="0" bIns="0" rtlCol="0" anchor="ctr"/>
+          <a:lstStyle/>
+          <a:p>
+            <a:pPr algn="ctr" indent="0" marL="0">
+              <a:buNone/>
+            </a:pPr>
+            <a:r>
+              <a:rPr lang="en-US" sz="1700" b="1" dirty="0">
+                <a:solidFill>
+                  <a:srgbClr val="FFFFFF"/>
+                </a:solidFill>
+                <a:latin typeface="Calibri" pitchFamily="34" charset="0"/>
+                <a:ea typeface="Calibri" pitchFamily="34" charset="-122"/>
+                <a:cs typeface="Calibri" pitchFamily="34" charset="-120"/>
+              </a:rPr>
+              <a:t>5</a:t>
+            </a:r>
+            <a:endParaRPr lang="en-US" sz="1700" dirty="0"/>
+          </a:p>
+        </p:txBody>
+      </p:sp>
+      <p:sp>
+        <p:nvSpPr>
+          <p:cNvPr id="12" name="Text 10"/>
+          <p:cNvSpPr txBox="1"/>
+          <p:nvPr/>
+        </p:nvSpPr>
+        <p:spPr>
+          <a:xfrm>
+            <a:off x="1280160" y="5398618"/>
+            <a:ext cx="6492240" cy="493776"/>
+          </a:xfrm>
+          <a:prstGeom prst="rect">
+            <a:avLst/>
+          </a:prstGeom>
+          <a:noFill/>
+          <a:ln/>
+        </p:spPr>
+        <p:txBody>
+          <a:bodyPr wrap="square" lIns="0" tIns="0" rIns="0" bIns="0" rtlCol="0" anchor="ctr"/>
+          <a:lstStyle/>
+          <a:p>
+            <a:pPr indent="0" marL="0">
+              <a:buNone/>
+            </a:pPr>
+            <a:r>
+              <a:rPr lang="en-US" sz="2200" dirty="0">
+                <a:solidFill>
+                  <a:srgbClr val="1B2530"/>
+                </a:solidFill>
+                <a:latin typeface="Calibri" pitchFamily="34" charset="0"/>
+                <a:ea typeface="Calibri" pitchFamily="34" charset="-122"/>
+                <a:cs typeface="Calibri" pitchFamily="34" charset="-120"/>
+              </a:rPr>
+              <a:t>All of them use about 5% of the 64 KiB profile</a:t>
+            </a:r>
+            <a:endParaRPr lang="en-US" sz="2200" dirty="0"/>
+          </a:p>
+        </p:txBody>
+      </p:sp>
+      <p:sp>
+        <p:nvSpPr>
+          <p:cNvPr id="13" name="Shape 11"/>
+          <p:cNvSpPr/>
+          <p:nvPr/>
+        </p:nvSpPr>
+        <p:spPr>
+          <a:xfrm>
+            <a:off x="8229600" y="1463040"/>
+            <a:ext cx="3413455" cy="4754880"/>
+          </a:xfrm>
+          <a:prstGeom prst="roundRect">
+            <a:avLst>
+              <a:gd name="adj" fmla="val 2143"/>
+            </a:avLst>
+          </a:prstGeom>
+          <a:solidFill>
+            <a:srgbClr val="1B2530"/>
+          </a:solidFill>
+          <a:ln w="12700">
+            <a:solidFill>
+              <a:srgbClr val="1B2530"/>
+            </a:solidFill>
+            <a:prstDash val="solid"/>
+          </a:ln>
+        </p:spPr>
+      </p:sp>
+      <p:sp>
+        <p:nvSpPr>
+          <p:cNvPr id="14" name="Text 12"/>
+          <p:cNvSpPr txBox="1"/>
+          <p:nvPr/>
+        </p:nvSpPr>
+        <p:spPr>
+          <a:xfrm>
+            <a:off x="8412480" y="2286000"/>
+            <a:ext cx="3044952" cy="1828800"/>
+          </a:xfrm>
+          <a:prstGeom prst="rect">
+            <a:avLst/>
+          </a:prstGeom>
+          <a:noFill/>
+          <a:ln/>
+        </p:spPr>
+        <p:txBody>
+          <a:bodyPr wrap="square" lIns="0" tIns="0" rIns="0" bIns="0" rtlCol="0" anchor="ctr"/>
+          <a:lstStyle/>
+          <a:p>
+            <a:pPr algn="ctr" indent="0" marL="0">
+              <a:buNone/>
+            </a:pPr>
+            <a:r>
+              <a:rPr lang="en-US" sz="6000" b="1" dirty="0">
+                <a:solidFill>
+                  <a:srgbClr val="FFFFFF"/>
+                </a:solidFill>
+                <a:latin typeface="Cambria" pitchFamily="34" charset="0"/>
+                <a:ea typeface="Cambria" pitchFamily="34" charset="-122"/>
+                <a:cs typeface="Cambria" pitchFamily="34" charset="-120"/>
+              </a:rPr>
+              <a:t>5%</a:t>
+            </a:r>
+            <a:endParaRPr lang="en-US" sz="6000" dirty="0"/>
+          </a:p>
+        </p:txBody>
+      </p:sp>
+      <p:sp>
+        <p:nvSpPr>
+          <p:cNvPr id="15" name="Text 13"/>
+          <p:cNvSpPr txBox="1"/>
+          <p:nvPr/>
+        </p:nvSpPr>
+        <p:spPr>
+          <a:xfrm>
+            <a:off x="8503920" y="4297680"/>
+            <a:ext cx="2862072" cy="1371600"/>
+          </a:xfrm>
+          <a:prstGeom prst="rect">
+            <a:avLst/>
+          </a:prstGeom>
+          <a:noFill/>
+          <a:ln/>
+        </p:spPr>
+        <p:txBody>
+          <a:bodyPr wrap="square" lIns="0" tIns="0" rIns="0" bIns="0" rtlCol="0" anchor="t"/>
+          <a:lstStyle/>
+          <a:p>
+            <a:pPr algn="ctr" indent="0" marL="0">
+              <a:buNone/>
+            </a:pPr>
+            <a:r>
+              <a:rPr lang="en-US" sz="1800" dirty="0">
+                <a:solidFill>
+                  <a:srgbClr val="CFE3EA"/>
+                </a:solidFill>
+                <a:latin typeface="Calibri" pitchFamily="34" charset="0"/>
+                <a:ea typeface="Calibri" pitchFamily="34" charset="-122"/>
+                <a:cs typeface="Calibri" pitchFamily="34" charset="-120"/>
+              </a:rPr>
+              <a:t>of the default budget</a:t>
+            </a:r>
+            <a:endParaRPr lang="en-US" sz="1800" dirty="0"/>
+          </a:p>
+        </p:txBody>
+      </p:sp>
+      <p:sp>
+        <p:nvSpPr>
+          <p:cNvPr id="25" name="Slide Number Placeholder 0"/>
+          <p:cNvSpPr>
+            <a:spLocks noGrp="1"/>
+          </p:cNvSpPr>
+          <p:nvPr>
+            <p:ph type="sldNum" sz="quarter" idx="4294967295"/>
+          </p:nvPr>
+        </p:nvSpPr>
+        <p:spPr>
+          <a:xfrm>
+            <a:off x="11002975" y="6419088"/>
+            <a:ext cx="640080" cy="274320"/>
+          </a:xfrm>
+          <a:prstGeom prst="rect">
+            <a:avLst/>
+          </a:prstGeom>
+          <a:extLst>
+            <a:ext uri="{C572A759-6A51-4108-AA02-DFA0A04FC94B}">
+              <ma14:wrappingTextBoxFlag xmlns:ma14="http://schemas.microsoft.com/office/mac/drawingml/2011/main" val="0"/>
+            </a:ext>
+          </a:extLst>
+        </p:spPr>
+        <p:txBody>
+          <a:bodyPr/>
+          <a:lstStyle>
+            <a:lvl1pPr>
+              <a:defRPr sz="1000">
+                <a:solidFill>
+                  <a:srgbClr val="5B6B78"/>
+                </a:solidFill>
+                <a:latin typeface="Calibri"/>
+                <a:ea typeface="Calibri"/>
+                <a:cs typeface="Calibri"/>
+              </a:defRPr>
+            </a:lvl1pPr>
+          </a:lstStyle>
+          <a:p>
+            <a:pPr algn="r"/>
+            <a:fld id="{F7021451-1387-4CA6-816F-3879F97B5CBC}" type="slidenum">
+              <a:rPr b="0" lang="en-US"/>
+              <a:t>28</a:t>
+            </a:fld>
+            <a:endParaRPr lang="en-US"/>
+          </a:p>
+        </p:txBody>
+      </p:sp>
+    </p:spTree>
+  </p:cSld>
+  <p:clrMapOvr>
+    <a:masterClrMapping/>
+  </p:clrMapOvr>
+</p:sld>
+</file>
+
+<file path=ppt/slides/slide29.xml><?xml version="1.0" encoding="utf-8"?>
+<p:sld xmlns:a="http://schemas.openxmlformats.org/drawingml/2006/main" xmlns:r="http://schemas.openxmlformats.org/officeDocument/2006/relationships" xmlns:p="http://schemas.openxmlformats.org/presentationml/2006/main">
+  <p:cSld name="Slide 29">
+    <p:spTree>
+      <p:nvGrpSpPr>
+        <p:cNvPr id="1" name=""/>
+        <p:cNvGrpSpPr/>
+        <p:nvPr/>
+      </p:nvGrpSpPr>
+      <p:grpSpPr>
+        <a:xfrm>
+          <a:off x="0" y="0"/>
+          <a:ext cx="0" cy="0"/>
+          <a:chOff x="0" y="0"/>
+          <a:chExt cx="0" cy="0"/>
+        </a:xfrm>
+      </p:grpSpPr>
+      <p:sp>
+        <p:nvSpPr>
+          <p:cNvPr id="2" name="Text 1"/>
+          <p:cNvSpPr/>
+          <p:nvPr>
+            <p:ph idx="101" type="title" hasCustomPrompt="1"/>
+          </p:nvPr>
+        </p:nvSpPr>
+        <p:spPr>
+          <a:xfrm>
+            <a:off x="548640" y="384048"/>
+            <a:ext cx="11094415" cy="868680"/>
+          </a:xfrm>
+          <a:prstGeom prst="rect">
+            <a:avLst/>
+          </a:prstGeom>
+          <a:noFill/>
+          <a:ln/>
+        </p:spPr>
+        <p:txBody>
+          <a:bodyPr wrap="square" lIns="0" tIns="0" rIns="0" bIns="0" rtlCol="0" anchor="ctr"/>
+          <a:lstStyle/>
+          <a:p>
+            <a:pPr algn="l" indent="0" marL="0">
+              <a:buNone/>
+            </a:pPr>
+            <a:r>
+              <a:rPr lang="en-US" sz="3000" b="1" dirty="0">
+                <a:solidFill>
+                  <a:srgbClr val="2E4A62"/>
+                </a:solidFill>
+                <a:latin typeface="Cambria" pitchFamily="34" charset="0"/>
+                <a:ea typeface="Cambria" pitchFamily="34" charset="-122"/>
+                <a:cs typeface="Cambria" pitchFamily="34" charset="-120"/>
+              </a:rPr>
               <a:t>Five failures and their causes</a:t>
             </a:r>
             <a:endParaRPr lang="en-US" sz="3000" dirty="0"/>
@@ -15559,7 +18560,7 @@
       </p:sp>
       <p:graphicFrame>
         <p:nvGraphicFramePr>
-          <p:cNvPr id="27" name="Table 0"/>
+          <p:cNvPr id="30" name="Table 0"/>
           <p:cNvGraphicFramePr>
             <a:graphicFrameLocks noGrp="1"/>
           </p:cNvGraphicFramePr>
@@ -16866,1501 +19867,6 @@
             <a:pPr algn="r"/>
             <a:fld id="{F7021451-1387-4CA6-816F-3879F97B5CBC}" type="slidenum">
               <a:rPr b="0" lang="en-US"/>
-              <a:t>26</a:t>
-            </a:fld>
-            <a:endParaRPr lang="en-US"/>
-          </a:p>
-        </p:txBody>
-      </p:sp>
-    </p:spTree>
-  </p:cSld>
-  <p:clrMapOvr>
-    <a:masterClrMapping/>
-  </p:clrMapOvr>
-</p:sld>
-</file>
-
-<file path=ppt/slides/slide27.xml><?xml version="1.0" encoding="utf-8"?>
-<p:sld xmlns:a="http://schemas.openxmlformats.org/drawingml/2006/main" xmlns:r="http://schemas.openxmlformats.org/officeDocument/2006/relationships" xmlns:p="http://schemas.openxmlformats.org/presentationml/2006/main">
-  <p:cSld name="Slide 27">
-    <p:spTree>
-      <p:nvGrpSpPr>
-        <p:cNvPr id="1" name=""/>
-        <p:cNvGrpSpPr/>
-        <p:nvPr/>
-      </p:nvGrpSpPr>
-      <p:grpSpPr>
-        <a:xfrm>
-          <a:off x="0" y="0"/>
-          <a:ext cx="0" cy="0"/>
-          <a:chOff x="0" y="0"/>
-          <a:chExt cx="0" cy="0"/>
-        </a:xfrm>
-      </p:grpSpPr>
-      <p:sp>
-        <p:nvSpPr>
-          <p:cNvPr id="2" name="Text 1"/>
-          <p:cNvSpPr/>
-          <p:nvPr>
-            <p:ph idx="101" type="title" hasCustomPrompt="1"/>
-          </p:nvPr>
-        </p:nvSpPr>
-        <p:spPr>
-          <a:xfrm>
-            <a:off x="548640" y="384048"/>
-            <a:ext cx="11094415" cy="868680"/>
-          </a:xfrm>
-          <a:prstGeom prst="rect">
-            <a:avLst/>
-          </a:prstGeom>
-          <a:noFill/>
-          <a:ln/>
-        </p:spPr>
-        <p:txBody>
-          <a:bodyPr wrap="square" lIns="0" tIns="0" rIns="0" bIns="0" rtlCol="0" anchor="ctr"/>
-          <a:lstStyle/>
-          <a:p>
-            <a:pPr algn="l" indent="0" marL="0">
-              <a:buNone/>
-            </a:pPr>
-            <a:r>
-              <a:rPr lang="en-US" sz="3000" b="1" dirty="0">
-                <a:solidFill>
-                  <a:srgbClr val="2E4A62"/>
-                </a:solidFill>
-                <a:latin typeface="Cambria" pitchFamily="34" charset="0"/>
-                <a:ea typeface="Cambria" pitchFamily="34" charset="-122"/>
-                <a:cs typeface="Cambria" pitchFamily="34" charset="-120"/>
-              </a:rPr>
-              <a:t>Ports and permissions</a:t>
-            </a:r>
-            <a:endParaRPr lang="en-US" sz="3000" dirty="0"/>
-          </a:p>
-        </p:txBody>
-      </p:sp>
-      <p:sp>
-        <p:nvSpPr>
-          <p:cNvPr id="3" name="Text 1"/>
-          <p:cNvSpPr txBox="1"/>
-          <p:nvPr/>
-        </p:nvSpPr>
-        <p:spPr>
-          <a:xfrm>
-            <a:off x="548640" y="1481328"/>
-            <a:ext cx="457200" cy="457200"/>
-          </a:xfrm>
-          <a:prstGeom prst="roundRect">
-            <a:avLst>
-              <a:gd name="adj" fmla="val 16000"/>
-            </a:avLst>
-          </a:prstGeom>
-          <a:solidFill>
-            <a:srgbClr val="0E7C86"/>
-          </a:solidFill>
-          <a:ln>
-            <a:solidFill>
-              <a:srgbClr val="0E7C86"/>
-            </a:solidFill>
-          </a:ln>
-        </p:spPr>
-        <p:txBody>
-          <a:bodyPr wrap="square" lIns="0" tIns="0" rIns="0" bIns="0" rtlCol="0" anchor="ctr"/>
-          <a:lstStyle/>
-          <a:p>
-            <a:pPr algn="ctr" indent="0" marL="0">
-              <a:buNone/>
-            </a:pPr>
-            <a:r>
-              <a:rPr lang="en-US" sz="1700" b="1" dirty="0">
-                <a:solidFill>
-                  <a:srgbClr val="FFFFFF"/>
-                </a:solidFill>
-                <a:latin typeface="Calibri" pitchFamily="34" charset="0"/>
-                <a:ea typeface="Calibri" pitchFamily="34" charset="-122"/>
-                <a:cs typeface="Calibri" pitchFamily="34" charset="-120"/>
-              </a:rPr>
-              <a:t>1</a:t>
-            </a:r>
-            <a:endParaRPr lang="en-US" sz="1700" dirty="0"/>
-          </a:p>
-        </p:txBody>
-      </p:sp>
-      <p:sp>
-        <p:nvSpPr>
-          <p:cNvPr id="4" name="Text 2"/>
-          <p:cNvSpPr txBox="1"/>
-          <p:nvPr/>
-        </p:nvSpPr>
-        <p:spPr>
-          <a:xfrm>
-            <a:off x="1280160" y="1463040"/>
-            <a:ext cx="10362895" cy="493776"/>
-          </a:xfrm>
-          <a:prstGeom prst="rect">
-            <a:avLst/>
-          </a:prstGeom>
-          <a:noFill/>
-          <a:ln/>
-        </p:spPr>
-        <p:txBody>
-          <a:bodyPr wrap="square" lIns="0" tIns="0" rIns="0" bIns="0" rtlCol="0" anchor="ctr"/>
-          <a:lstStyle/>
-          <a:p>
-            <a:pPr indent="0" marL="0">
-              <a:buNone/>
-            </a:pPr>
-            <a:r>
-              <a:rPr lang="en-US" sz="2400" dirty="0">
-                <a:solidFill>
-                  <a:srgbClr val="1B2530"/>
-                </a:solidFill>
-                <a:latin typeface="Calibri" pitchFamily="34" charset="0"/>
-                <a:ea typeface="Calibri" pitchFamily="34" charset="-122"/>
-                <a:cs typeface="Calibri" pitchFamily="34" charset="-120"/>
-              </a:rPr>
-              <a:t>Linux: boards appear as /dev/ttyACM0 or /dev/ttyUSB0</a:t>
-            </a:r>
-            <a:endParaRPr lang="en-US" sz="2400" dirty="0"/>
-          </a:p>
-        </p:txBody>
-      </p:sp>
-      <p:sp>
-        <p:nvSpPr>
-          <p:cNvPr id="5" name="Text 3"/>
-          <p:cNvSpPr txBox="1"/>
-          <p:nvPr/>
-        </p:nvSpPr>
-        <p:spPr>
-          <a:xfrm>
-            <a:off x="548640" y="2711196"/>
-            <a:ext cx="457200" cy="457200"/>
-          </a:xfrm>
-          <a:prstGeom prst="roundRect">
-            <a:avLst>
-              <a:gd name="adj" fmla="val 16000"/>
-            </a:avLst>
-          </a:prstGeom>
-          <a:solidFill>
-            <a:srgbClr val="0E7C86"/>
-          </a:solidFill>
-          <a:ln>
-            <a:solidFill>
-              <a:srgbClr val="0E7C86"/>
-            </a:solidFill>
-          </a:ln>
-        </p:spPr>
-        <p:txBody>
-          <a:bodyPr wrap="square" lIns="0" tIns="0" rIns="0" bIns="0" rtlCol="0" anchor="ctr"/>
-          <a:lstStyle/>
-          <a:p>
-            <a:pPr algn="ctr" indent="0" marL="0">
-              <a:buNone/>
-            </a:pPr>
-            <a:r>
-              <a:rPr lang="en-US" sz="1700" b="1" dirty="0">
-                <a:solidFill>
-                  <a:srgbClr val="FFFFFF"/>
-                </a:solidFill>
-                <a:latin typeface="Calibri" pitchFamily="34" charset="0"/>
-                <a:ea typeface="Calibri" pitchFamily="34" charset="-122"/>
-                <a:cs typeface="Calibri" pitchFamily="34" charset="-120"/>
-              </a:rPr>
-              <a:t>2</a:t>
-            </a:r>
-            <a:endParaRPr lang="en-US" sz="1700" dirty="0"/>
-          </a:p>
-        </p:txBody>
-      </p:sp>
-      <p:sp>
-        <p:nvSpPr>
-          <p:cNvPr id="6" name="Text 4"/>
-          <p:cNvSpPr txBox="1"/>
-          <p:nvPr/>
-        </p:nvSpPr>
-        <p:spPr>
-          <a:xfrm>
-            <a:off x="1280160" y="2692908"/>
-            <a:ext cx="10362895" cy="493776"/>
-          </a:xfrm>
-          <a:prstGeom prst="rect">
-            <a:avLst/>
-          </a:prstGeom>
-          <a:noFill/>
-          <a:ln/>
-        </p:spPr>
-        <p:txBody>
-          <a:bodyPr wrap="square" lIns="0" tIns="0" rIns="0" bIns="0" rtlCol="0" anchor="ctr"/>
-          <a:lstStyle/>
-          <a:p>
-            <a:pPr indent="0" marL="0">
-              <a:buNone/>
-            </a:pPr>
-            <a:r>
-              <a:rPr lang="en-US" sz="2400" dirty="0">
-                <a:solidFill>
-                  <a:srgbClr val="1B2530"/>
-                </a:solidFill>
-                <a:latin typeface="Calibri" pitchFamily="34" charset="0"/>
-                <a:ea typeface="Calibri" pitchFamily="34" charset="-122"/>
-                <a:cs typeface="Calibri" pitchFamily="34" charset="-120"/>
-              </a:rPr>
-              <a:t>Linux: join the dialout group, then log out and back in</a:t>
-            </a:r>
-            <a:endParaRPr lang="en-US" sz="2400" dirty="0"/>
-          </a:p>
-        </p:txBody>
-      </p:sp>
-      <p:sp>
-        <p:nvSpPr>
-          <p:cNvPr id="7" name="Text 5"/>
-          <p:cNvSpPr txBox="1"/>
-          <p:nvPr/>
-        </p:nvSpPr>
-        <p:spPr>
-          <a:xfrm>
-            <a:off x="548640" y="3941064"/>
-            <a:ext cx="457200" cy="457200"/>
-          </a:xfrm>
-          <a:prstGeom prst="roundRect">
-            <a:avLst>
-              <a:gd name="adj" fmla="val 16000"/>
-            </a:avLst>
-          </a:prstGeom>
-          <a:solidFill>
-            <a:srgbClr val="0E7C86"/>
-          </a:solidFill>
-          <a:ln>
-            <a:solidFill>
-              <a:srgbClr val="0E7C86"/>
-            </a:solidFill>
-          </a:ln>
-        </p:spPr>
-        <p:txBody>
-          <a:bodyPr wrap="square" lIns="0" tIns="0" rIns="0" bIns="0" rtlCol="0" anchor="ctr"/>
-          <a:lstStyle/>
-          <a:p>
-            <a:pPr algn="ctr" indent="0" marL="0">
-              <a:buNone/>
-            </a:pPr>
-            <a:r>
-              <a:rPr lang="en-US" sz="1700" b="1" dirty="0">
-                <a:solidFill>
-                  <a:srgbClr val="FFFFFF"/>
-                </a:solidFill>
-                <a:latin typeface="Calibri" pitchFamily="34" charset="0"/>
-                <a:ea typeface="Calibri" pitchFamily="34" charset="-122"/>
-                <a:cs typeface="Calibri" pitchFamily="34" charset="-120"/>
-              </a:rPr>
-              <a:t>3</a:t>
-            </a:r>
-            <a:endParaRPr lang="en-US" sz="1700" dirty="0"/>
-          </a:p>
-        </p:txBody>
-      </p:sp>
-      <p:sp>
-        <p:nvSpPr>
-          <p:cNvPr id="8" name="Text 6"/>
-          <p:cNvSpPr txBox="1"/>
-          <p:nvPr/>
-        </p:nvSpPr>
-        <p:spPr>
-          <a:xfrm>
-            <a:off x="1280160" y="3922776"/>
-            <a:ext cx="10362895" cy="493776"/>
-          </a:xfrm>
-          <a:prstGeom prst="rect">
-            <a:avLst/>
-          </a:prstGeom>
-          <a:noFill/>
-          <a:ln/>
-        </p:spPr>
-        <p:txBody>
-          <a:bodyPr wrap="square" lIns="0" tIns="0" rIns="0" bIns="0" rtlCol="0" anchor="ctr"/>
-          <a:lstStyle/>
-          <a:p>
-            <a:pPr indent="0" marL="0">
-              <a:buNone/>
-            </a:pPr>
-            <a:r>
-              <a:rPr lang="en-US" sz="2400" dirty="0">
-                <a:solidFill>
-                  <a:srgbClr val="1B2530"/>
-                </a:solidFill>
-                <a:latin typeface="Calibri" pitchFamily="34" charset="0"/>
-                <a:ea typeface="Calibri" pitchFamily="34" charset="-122"/>
-                <a:cs typeface="Calibri" pitchFamily="34" charset="-120"/>
-              </a:rPr>
-              <a:t>Windows: find the COM port in Device Manager; pass -p COMx</a:t>
-            </a:r>
-            <a:endParaRPr lang="en-US" sz="2400" dirty="0"/>
-          </a:p>
-        </p:txBody>
-      </p:sp>
-      <p:sp>
-        <p:nvSpPr>
-          <p:cNvPr id="9" name="Text 7"/>
-          <p:cNvSpPr txBox="1"/>
-          <p:nvPr/>
-        </p:nvSpPr>
-        <p:spPr>
-          <a:xfrm>
-            <a:off x="548640" y="5170932"/>
-            <a:ext cx="457200" cy="457200"/>
-          </a:xfrm>
-          <a:prstGeom prst="roundRect">
-            <a:avLst>
-              <a:gd name="adj" fmla="val 16000"/>
-            </a:avLst>
-          </a:prstGeom>
-          <a:solidFill>
-            <a:srgbClr val="0E7C86"/>
-          </a:solidFill>
-          <a:ln>
-            <a:solidFill>
-              <a:srgbClr val="0E7C86"/>
-            </a:solidFill>
-          </a:ln>
-        </p:spPr>
-        <p:txBody>
-          <a:bodyPr wrap="square" lIns="0" tIns="0" rIns="0" bIns="0" rtlCol="0" anchor="ctr"/>
-          <a:lstStyle/>
-          <a:p>
-            <a:pPr algn="ctr" indent="0" marL="0">
-              <a:buNone/>
-            </a:pPr>
-            <a:r>
-              <a:rPr lang="en-US" sz="1700" b="1" dirty="0">
-                <a:solidFill>
-                  <a:srgbClr val="FFFFFF"/>
-                </a:solidFill>
-                <a:latin typeface="Calibri" pitchFamily="34" charset="0"/>
-                <a:ea typeface="Calibri" pitchFamily="34" charset="-122"/>
-                <a:cs typeface="Calibri" pitchFamily="34" charset="-120"/>
-              </a:rPr>
-              <a:t>4</a:t>
-            </a:r>
-            <a:endParaRPr lang="en-US" sz="1700" dirty="0"/>
-          </a:p>
-        </p:txBody>
-      </p:sp>
-      <p:sp>
-        <p:nvSpPr>
-          <p:cNvPr id="10" name="Text 8"/>
-          <p:cNvSpPr txBox="1"/>
-          <p:nvPr/>
-        </p:nvSpPr>
-        <p:spPr>
-          <a:xfrm>
-            <a:off x="1280160" y="5152644"/>
-            <a:ext cx="10362895" cy="493776"/>
-          </a:xfrm>
-          <a:prstGeom prst="rect">
-            <a:avLst/>
-          </a:prstGeom>
-          <a:noFill/>
-          <a:ln/>
-        </p:spPr>
-        <p:txBody>
-          <a:bodyPr wrap="square" lIns="0" tIns="0" rIns="0" bIns="0" rtlCol="0" anchor="ctr"/>
-          <a:lstStyle/>
-          <a:p>
-            <a:pPr indent="0" marL="0">
-              <a:buNone/>
-            </a:pPr>
-            <a:r>
-              <a:rPr lang="en-US" sz="2400" dirty="0">
-                <a:solidFill>
-                  <a:srgbClr val="1B2530"/>
-                </a:solidFill>
-                <a:latin typeface="Calibri" pitchFamily="34" charset="0"/>
-                <a:ea typeface="Calibri" pitchFamily="34" charset="-122"/>
-                <a:cs typeface="Calibri" pitchFamily="34" charset="-120"/>
-              </a:rPr>
-              <a:t>Only one program can hold a serial port: close other monitors</a:t>
-            </a:r>
-            <a:endParaRPr lang="en-US" sz="2400" dirty="0"/>
-          </a:p>
-        </p:txBody>
-      </p:sp>
-      <p:sp>
-        <p:nvSpPr>
-          <p:cNvPr id="25" name="Slide Number Placeholder 0"/>
-          <p:cNvSpPr>
-            <a:spLocks noGrp="1"/>
-          </p:cNvSpPr>
-          <p:nvPr>
-            <p:ph type="sldNum" sz="quarter" idx="4294967295"/>
-          </p:nvPr>
-        </p:nvSpPr>
-        <p:spPr>
-          <a:xfrm>
-            <a:off x="11002975" y="6419088"/>
-            <a:ext cx="640080" cy="274320"/>
-          </a:xfrm>
-          <a:prstGeom prst="rect">
-            <a:avLst/>
-          </a:prstGeom>
-          <a:extLst>
-            <a:ext uri="{C572A759-6A51-4108-AA02-DFA0A04FC94B}">
-              <ma14:wrappingTextBoxFlag xmlns:ma14="http://schemas.microsoft.com/office/mac/drawingml/2011/main" val="0"/>
-            </a:ext>
-          </a:extLst>
-        </p:spPr>
-        <p:txBody>
-          <a:bodyPr/>
-          <a:lstStyle>
-            <a:lvl1pPr>
-              <a:defRPr sz="1000">
-                <a:solidFill>
-                  <a:srgbClr val="5B6B78"/>
-                </a:solidFill>
-                <a:latin typeface="Calibri"/>
-                <a:ea typeface="Calibri"/>
-                <a:cs typeface="Calibri"/>
-              </a:defRPr>
-            </a:lvl1pPr>
-          </a:lstStyle>
-          <a:p>
-            <a:pPr algn="r"/>
-            <a:fld id="{F7021451-1387-4CA6-816F-3879F97B5CBC}" type="slidenum">
-              <a:rPr b="0" lang="en-US"/>
-              <a:t>27</a:t>
-            </a:fld>
-            <a:endParaRPr lang="en-US"/>
-          </a:p>
-        </p:txBody>
-      </p:sp>
-    </p:spTree>
-  </p:cSld>
-  <p:clrMapOvr>
-    <a:masterClrMapping/>
-  </p:clrMapOvr>
-</p:sld>
-</file>
-
-<file path=ppt/slides/slide28.xml><?xml version="1.0" encoding="utf-8"?>
-<p:sld xmlns:a="http://schemas.openxmlformats.org/drawingml/2006/main" xmlns:r="http://schemas.openxmlformats.org/officeDocument/2006/relationships" xmlns:p="http://schemas.openxmlformats.org/presentationml/2006/main">
-  <p:cSld name="Slide 28">
-    <p:spTree>
-      <p:nvGrpSpPr>
-        <p:cNvPr id="1" name=""/>
-        <p:cNvGrpSpPr/>
-        <p:nvPr/>
-      </p:nvGrpSpPr>
-      <p:grpSpPr>
-        <a:xfrm>
-          <a:off x="0" y="0"/>
-          <a:ext cx="0" cy="0"/>
-          <a:chOff x="0" y="0"/>
-          <a:chExt cx="0" cy="0"/>
-        </a:xfrm>
-      </p:grpSpPr>
-      <p:sp>
-        <p:nvSpPr>
-          <p:cNvPr id="2" name="Text 1"/>
-          <p:cNvSpPr/>
-          <p:nvPr>
-            <p:ph idx="101" type="title" hasCustomPrompt="1"/>
-          </p:nvPr>
-        </p:nvSpPr>
-        <p:spPr>
-          <a:xfrm>
-            <a:off x="548640" y="384048"/>
-            <a:ext cx="11094415" cy="868680"/>
-          </a:xfrm>
-          <a:prstGeom prst="rect">
-            <a:avLst/>
-          </a:prstGeom>
-          <a:noFill/>
-          <a:ln/>
-        </p:spPr>
-        <p:txBody>
-          <a:bodyPr wrap="square" lIns="0" tIns="0" rIns="0" bIns="0" rtlCol="0" anchor="ctr"/>
-          <a:lstStyle/>
-          <a:p>
-            <a:pPr algn="l" indent="0" marL="0">
-              <a:buNone/>
-            </a:pPr>
-            <a:r>
-              <a:rPr lang="en-US" sz="3000" b="1" dirty="0">
-                <a:solidFill>
-                  <a:srgbClr val="2E4A62"/>
-                </a:solidFill>
-                <a:latin typeface="Cambria" pitchFamily="34" charset="0"/>
-                <a:ea typeface="Cambria" pitchFamily="34" charset="-122"/>
-                <a:cs typeface="Cambria" pitchFamily="34" charset="-120"/>
-              </a:rPr>
-              <a:t>Do you need all this?</a:t>
-            </a:r>
-            <a:endParaRPr lang="en-US" sz="3000" dirty="0"/>
-          </a:p>
-        </p:txBody>
-      </p:sp>
-      <p:sp>
-        <p:nvSpPr>
-          <p:cNvPr id="3" name="Shape 1"/>
-          <p:cNvSpPr/>
-          <p:nvPr/>
-        </p:nvSpPr>
-        <p:spPr>
-          <a:xfrm>
-            <a:off x="548640" y="1463040"/>
-            <a:ext cx="5364328" cy="4754880"/>
-          </a:xfrm>
-          <a:prstGeom prst="roundRect">
-            <a:avLst>
-              <a:gd name="adj" fmla="val 1538"/>
-            </a:avLst>
-          </a:prstGeom>
-          <a:solidFill>
-            <a:srgbClr val="EEF2F4"/>
-          </a:solidFill>
-          <a:ln w="12700">
-            <a:solidFill>
-              <a:srgbClr val="EEF2F4"/>
-            </a:solidFill>
-            <a:prstDash val="solid"/>
-          </a:ln>
-        </p:spPr>
-      </p:sp>
-      <p:sp>
-        <p:nvSpPr>
-          <p:cNvPr id="4" name="Text 2"/>
-          <p:cNvSpPr txBox="1"/>
-          <p:nvPr/>
-        </p:nvSpPr>
-        <p:spPr>
-          <a:xfrm>
-            <a:off x="822960" y="1691640"/>
-            <a:ext cx="4815688" cy="548640"/>
-          </a:xfrm>
-          <a:prstGeom prst="roundRect">
-            <a:avLst>
-              <a:gd name="adj" fmla="val 13333"/>
-            </a:avLst>
-          </a:prstGeom>
-          <a:solidFill>
-            <a:srgbClr val="0E7C86"/>
-          </a:solidFill>
-          <a:ln>
-            <a:solidFill>
-              <a:srgbClr val="0E7C86"/>
-            </a:solidFill>
-          </a:ln>
-        </p:spPr>
-        <p:txBody>
-          <a:bodyPr wrap="square" lIns="0" tIns="0" rIns="0" bIns="0" rtlCol="0" anchor="ctr"/>
-          <a:lstStyle/>
-          <a:p>
-            <a:pPr algn="ctr" indent="0" marL="0">
-              <a:buNone/>
-            </a:pPr>
-            <a:r>
-              <a:rPr lang="en-US" sz="1900" b="1" dirty="0">
-                <a:solidFill>
-                  <a:srgbClr val="FFFFFF"/>
-                </a:solidFill>
-                <a:latin typeface="Calibri" pitchFamily="34" charset="0"/>
-                <a:ea typeface="Calibri" pitchFamily="34" charset="-122"/>
-                <a:cs typeface="Calibri" pitchFamily="34" charset="-120"/>
-              </a:rPr>
-              <a:t>Yes, to build</a:t>
-            </a:r>
-            <a:endParaRPr lang="en-US" sz="1900" dirty="0"/>
-          </a:p>
-        </p:txBody>
-      </p:sp>
-      <p:sp>
-        <p:nvSpPr>
-          <p:cNvPr id="5" name="Text 3"/>
-          <p:cNvSpPr txBox="1"/>
-          <p:nvPr/>
-        </p:nvSpPr>
-        <p:spPr>
-          <a:xfrm>
-            <a:off x="868680" y="2468880"/>
-            <a:ext cx="4724248" cy="3566160"/>
-          </a:xfrm>
-          <a:prstGeom prst="rect">
-            <a:avLst/>
-          </a:prstGeom>
-          <a:noFill/>
-          <a:ln/>
-        </p:spPr>
-        <p:txBody>
-          <a:bodyPr wrap="square" lIns="0" tIns="0" rIns="0" bIns="0" rtlCol="0" anchor="t"/>
-          <a:lstStyle/>
-          <a:p>
-            <a:pPr marL="203200" indent="-203200">
-              <a:spcAft>
-                <a:spcPts val="800"/>
-              </a:spcAft>
-              <a:buSzPct val="100000"/>
-              <a:buChar char="•"/>
-            </a:pPr>
-            <a:r>
-              <a:rPr lang="en-US" sz="2100" dirty="0">
-                <a:solidFill>
-                  <a:srgbClr val="1B2530"/>
-                </a:solidFill>
-                <a:latin typeface="Calibri" pitchFamily="34" charset="0"/>
-                <a:ea typeface="Calibri" pitchFamily="34" charset="-122"/>
-                <a:cs typeface="Calibri" pitchFamily="34" charset="-120"/>
-              </a:rPr>
-              <a:t>Writing assembly or C cartridges</a:t>
-            </a:r>
-            <a:endParaRPr lang="en-US" sz="2100" dirty="0"/>
-          </a:p>
-          <a:p>
-            <a:pPr marL="203200" indent="-203200">
-              <a:spcAft>
-                <a:spcPts val="800"/>
-              </a:spcAft>
-              <a:buSzPct val="100000"/>
-              <a:buChar char="•"/>
-            </a:pPr>
-            <a:r>
-              <a:rPr lang="en-US" sz="2100" dirty="0">
-                <a:solidFill>
-                  <a:srgbClr val="1B2530"/>
-                </a:solidFill>
-                <a:latin typeface="Calibri" pitchFamily="34" charset="0"/>
-                <a:ea typeface="Calibri" pitchFamily="34" charset="-122"/>
-                <a:cs typeface="Calibri" pitchFamily="34" charset="-120"/>
-              </a:rPr>
-              <a:t>Building or modifying firmware</a:t>
-            </a:r>
-            <a:endParaRPr lang="en-US" sz="2100" dirty="0"/>
-          </a:p>
-          <a:p>
-            <a:pPr marL="203200" indent="-203200">
-              <a:spcAft>
-                <a:spcPts val="800"/>
-              </a:spcAft>
-              <a:buSzPct val="100000"/>
-              <a:buChar char="•"/>
-            </a:pPr>
-            <a:r>
-              <a:rPr lang="en-US" sz="2100" dirty="0">
-                <a:solidFill>
-                  <a:srgbClr val="1B2530"/>
-                </a:solidFill>
-                <a:latin typeface="Calibri" pitchFamily="34" charset="0"/>
-                <a:ea typeface="Calibri" pitchFamily="34" charset="-122"/>
-                <a:cs typeface="Calibri" pitchFamily="34" charset="-120"/>
-              </a:rPr>
-              <a:t>Measuring performance on a board</a:t>
-            </a:r>
-            <a:endParaRPr lang="en-US" sz="2100" dirty="0"/>
-          </a:p>
-        </p:txBody>
-      </p:sp>
-      <p:sp>
-        <p:nvSpPr>
-          <p:cNvPr id="6" name="Shape 4"/>
-          <p:cNvSpPr/>
-          <p:nvPr/>
-        </p:nvSpPr>
-        <p:spPr>
-          <a:xfrm>
-            <a:off x="6278728" y="1463040"/>
-            <a:ext cx="5364328" cy="4754880"/>
-          </a:xfrm>
-          <a:prstGeom prst="roundRect">
-            <a:avLst>
-              <a:gd name="adj" fmla="val 1538"/>
-            </a:avLst>
-          </a:prstGeom>
-          <a:solidFill>
-            <a:srgbClr val="EEF2F4"/>
-          </a:solidFill>
-          <a:ln w="12700">
-            <a:solidFill>
-              <a:srgbClr val="EEF2F4"/>
-            </a:solidFill>
-            <a:prstDash val="solid"/>
-          </a:ln>
-        </p:spPr>
-      </p:sp>
-      <p:sp>
-        <p:nvSpPr>
-          <p:cNvPr id="7" name="Text 5"/>
-          <p:cNvSpPr txBox="1"/>
-          <p:nvPr/>
-        </p:nvSpPr>
-        <p:spPr>
-          <a:xfrm>
-            <a:off x="6553048" y="1691640"/>
-            <a:ext cx="4815688" cy="548640"/>
-          </a:xfrm>
-          <a:prstGeom prst="roundRect">
-            <a:avLst>
-              <a:gd name="adj" fmla="val 13333"/>
-            </a:avLst>
-          </a:prstGeom>
-          <a:solidFill>
-            <a:srgbClr val="C7791B"/>
-          </a:solidFill>
-          <a:ln>
-            <a:solidFill>
-              <a:srgbClr val="C7791B"/>
-            </a:solidFill>
-          </a:ln>
-        </p:spPr>
-        <p:txBody>
-          <a:bodyPr wrap="square" lIns="0" tIns="0" rIns="0" bIns="0" rtlCol="0" anchor="ctr"/>
-          <a:lstStyle/>
-          <a:p>
-            <a:pPr algn="ctr" indent="0" marL="0">
-              <a:buNone/>
-            </a:pPr>
-            <a:r>
-              <a:rPr lang="en-US" sz="1900" b="1" dirty="0">
-                <a:solidFill>
-                  <a:srgbClr val="FFFFFF"/>
-                </a:solidFill>
-                <a:latin typeface="Calibri" pitchFamily="34" charset="0"/>
-                <a:ea typeface="Calibri" pitchFamily="34" charset="-122"/>
-                <a:cs typeface="Calibri" pitchFamily="34" charset="-120"/>
-              </a:rPr>
-              <a:t>No, to run or to start</a:t>
-            </a:r>
-            <a:endParaRPr lang="en-US" sz="1900" dirty="0"/>
-          </a:p>
-        </p:txBody>
-      </p:sp>
-      <p:sp>
-        <p:nvSpPr>
-          <p:cNvPr id="8" name="Text 6"/>
-          <p:cNvSpPr txBox="1"/>
-          <p:nvPr/>
-        </p:nvSpPr>
-        <p:spPr>
-          <a:xfrm>
-            <a:off x="6598768" y="2468880"/>
-            <a:ext cx="4724248" cy="3566160"/>
-          </a:xfrm>
-          <a:prstGeom prst="rect">
-            <a:avLst/>
-          </a:prstGeom>
-          <a:noFill/>
-          <a:ln/>
-        </p:spPr>
-        <p:txBody>
-          <a:bodyPr wrap="square" lIns="0" tIns="0" rIns="0" bIns="0" rtlCol="0" anchor="t"/>
-          <a:lstStyle/>
-          <a:p>
-            <a:pPr marL="203200" indent="-203200">
-              <a:spcAft>
-                <a:spcPts val="800"/>
-              </a:spcAft>
-              <a:buSzPct val="100000"/>
-              <a:buChar char="•"/>
-            </a:pPr>
-            <a:r>
-              <a:rPr lang="en-US" sz="2100" dirty="0">
-                <a:solidFill>
-                  <a:srgbClr val="1B2530"/>
-                </a:solidFill>
-                <a:latin typeface="Calibri" pitchFamily="34" charset="0"/>
-                <a:ea typeface="Calibri" pitchFamily="34" charset="-122"/>
-                <a:cs typeface="Calibri" pitchFamily="34" charset="-120"/>
-              </a:rPr>
-              <a:t>Playing and debugging: PRG32-QT</a:t>
-            </a:r>
-            <a:endParaRPr lang="en-US" sz="2100" dirty="0"/>
-          </a:p>
-          <a:p>
-            <a:pPr marL="203200" indent="-203200">
-              <a:spcAft>
-                <a:spcPts val="800"/>
-              </a:spcAft>
-              <a:buSzPct val="100000"/>
-              <a:buChar char="•"/>
-            </a:pPr>
-            <a:r>
-              <a:rPr lang="en-US" sz="2100" dirty="0">
-                <a:solidFill>
-                  <a:srgbClr val="1B2530"/>
-                </a:solidFill>
-                <a:latin typeface="Calibri" pitchFamily="34" charset="0"/>
-                <a:ea typeface="Calibri" pitchFamily="34" charset="-122"/>
-                <a:cs typeface="Calibri" pitchFamily="34" charset="-120"/>
-              </a:rPr>
-              <a:t>Blocks: a browser and the Construction Kit</a:t>
-            </a:r>
-            <a:endParaRPr lang="en-US" sz="2100" dirty="0"/>
-          </a:p>
-          <a:p>
-            <a:pPr marL="203200" indent="-203200">
-              <a:spcAft>
-                <a:spcPts val="800"/>
-              </a:spcAft>
-              <a:buSzPct val="100000"/>
-              <a:buChar char="•"/>
-            </a:pPr>
-            <a:r>
-              <a:rPr lang="en-US" sz="2100" dirty="0">
-                <a:solidFill>
-                  <a:srgbClr val="1B2530"/>
-                </a:solidFill>
-                <a:latin typeface="Calibri" pitchFamily="34" charset="0"/>
-                <a:ea typeface="Calibri" pitchFamily="34" charset="-122"/>
-                <a:cs typeface="Calibri" pitchFamily="34" charset="-120"/>
-              </a:rPr>
-              <a:t>Reading code: the repository</a:t>
-            </a:r>
-            <a:endParaRPr lang="en-US" sz="2100" dirty="0"/>
-          </a:p>
-        </p:txBody>
-      </p:sp>
-      <p:sp>
-        <p:nvSpPr>
-          <p:cNvPr id="25" name="Slide Number Placeholder 0"/>
-          <p:cNvSpPr>
-            <a:spLocks noGrp="1"/>
-          </p:cNvSpPr>
-          <p:nvPr>
-            <p:ph type="sldNum" sz="quarter" idx="4294967295"/>
-          </p:nvPr>
-        </p:nvSpPr>
-        <p:spPr>
-          <a:xfrm>
-            <a:off x="11002975" y="6419088"/>
-            <a:ext cx="640080" cy="274320"/>
-          </a:xfrm>
-          <a:prstGeom prst="rect">
-            <a:avLst/>
-          </a:prstGeom>
-          <a:extLst>
-            <a:ext uri="{C572A759-6A51-4108-AA02-DFA0A04FC94B}">
-              <ma14:wrappingTextBoxFlag xmlns:ma14="http://schemas.microsoft.com/office/mac/drawingml/2011/main" val="0"/>
-            </a:ext>
-          </a:extLst>
-        </p:spPr>
-        <p:txBody>
-          <a:bodyPr/>
-          <a:lstStyle>
-            <a:lvl1pPr>
-              <a:defRPr sz="1000">
-                <a:solidFill>
-                  <a:srgbClr val="5B6B78"/>
-                </a:solidFill>
-                <a:latin typeface="Calibri"/>
-                <a:ea typeface="Calibri"/>
-                <a:cs typeface="Calibri"/>
-              </a:defRPr>
-            </a:lvl1pPr>
-          </a:lstStyle>
-          <a:p>
-            <a:pPr algn="r"/>
-            <a:fld id="{F7021451-1387-4CA6-816F-3879F97B5CBC}" type="slidenum">
-              <a:rPr b="0" lang="en-US"/>
-              <a:t>28</a:t>
-            </a:fld>
-            <a:endParaRPr lang="en-US"/>
-          </a:p>
-        </p:txBody>
-      </p:sp>
-    </p:spTree>
-  </p:cSld>
-  <p:clrMapOvr>
-    <a:masterClrMapping/>
-  </p:clrMapOvr>
-</p:sld>
-</file>
-
-<file path=ppt/slides/slide29.xml><?xml version="1.0" encoding="utf-8"?>
-<p:sld xmlns:a="http://schemas.openxmlformats.org/drawingml/2006/main" xmlns:r="http://schemas.openxmlformats.org/officeDocument/2006/relationships" xmlns:p="http://schemas.openxmlformats.org/presentationml/2006/main">
-  <p:cSld name="Slide 29">
-    <p:spTree>
-      <p:nvGrpSpPr>
-        <p:cNvPr id="1" name=""/>
-        <p:cNvGrpSpPr/>
-        <p:nvPr/>
-      </p:nvGrpSpPr>
-      <p:grpSpPr>
-        <a:xfrm>
-          <a:off x="0" y="0"/>
-          <a:ext cx="0" cy="0"/>
-          <a:chOff x="0" y="0"/>
-          <a:chExt cx="0" cy="0"/>
-        </a:xfrm>
-      </p:grpSpPr>
-      <p:sp>
-        <p:nvSpPr>
-          <p:cNvPr id="2" name="Text 1"/>
-          <p:cNvSpPr/>
-          <p:nvPr>
-            <p:ph idx="101" type="title" hasCustomPrompt="1"/>
-          </p:nvPr>
-        </p:nvSpPr>
-        <p:spPr>
-          <a:xfrm>
-            <a:off x="548640" y="384048"/>
-            <a:ext cx="11094415" cy="868680"/>
-          </a:xfrm>
-          <a:prstGeom prst="rect">
-            <a:avLst/>
-          </a:prstGeom>
-          <a:noFill/>
-          <a:ln/>
-        </p:spPr>
-        <p:txBody>
-          <a:bodyPr wrap="square" lIns="0" tIns="0" rIns="0" bIns="0" rtlCol="0" anchor="ctr"/>
-          <a:lstStyle/>
-          <a:p>
-            <a:pPr algn="l" indent="0" marL="0">
-              <a:buNone/>
-            </a:pPr>
-            <a:r>
-              <a:rPr lang="en-US" sz="3000" b="1" dirty="0">
-                <a:solidFill>
-                  <a:srgbClr val="2E4A62"/>
-                </a:solidFill>
-                <a:latin typeface="Cambria" pitchFamily="34" charset="0"/>
-                <a:ea typeface="Cambria" pitchFamily="34" charset="-122"/>
-                <a:cs typeface="Cambria" pitchFamily="34" charset="-120"/>
-              </a:rPr>
-              <a:t>Check your understanding</a:t>
-            </a:r>
-            <a:endParaRPr lang="en-US" sz="3000" dirty="0"/>
-          </a:p>
-        </p:txBody>
-      </p:sp>
-      <p:sp>
-        <p:nvSpPr>
-          <p:cNvPr id="3" name="Text 1"/>
-          <p:cNvSpPr txBox="1"/>
-          <p:nvPr/>
-        </p:nvSpPr>
-        <p:spPr>
-          <a:xfrm>
-            <a:off x="548640" y="1463040"/>
-            <a:ext cx="11094415" cy="1188720"/>
-          </a:xfrm>
-          <a:prstGeom prst="rect">
-            <a:avLst/>
-          </a:prstGeom>
-          <a:noFill/>
-          <a:ln/>
-        </p:spPr>
-        <p:txBody>
-          <a:bodyPr wrap="square" lIns="0" tIns="0" rIns="0" bIns="0" rtlCol="0" anchor="ctr"/>
-          <a:lstStyle/>
-          <a:p>
-            <a:pPr indent="0" marL="0">
-              <a:buNone/>
-            </a:pPr>
-            <a:r>
-              <a:rPr lang="en-US" sz="2600" b="1" dirty="0">
-                <a:solidFill>
-                  <a:srgbClr val="1B2530"/>
-                </a:solidFill>
-                <a:latin typeface="Cambria" pitchFamily="34" charset="0"/>
-                <a:ea typeface="Cambria" pitchFamily="34" charset="-122"/>
-                <a:cs typeface="Cambria" pitchFamily="34" charset="-120"/>
-              </a:rPr>
-              <a:t>Which command stages a cartridge into the emulator?</a:t>
-            </a:r>
-            <a:endParaRPr lang="en-US" sz="2600" dirty="0"/>
-          </a:p>
-        </p:txBody>
-      </p:sp>
-      <p:sp>
-        <p:nvSpPr>
-          <p:cNvPr id="4" name="Shape 2"/>
-          <p:cNvSpPr/>
-          <p:nvPr/>
-        </p:nvSpPr>
-        <p:spPr>
-          <a:xfrm>
-            <a:off x="548640" y="2880360"/>
-            <a:ext cx="5432908" cy="1554480"/>
-          </a:xfrm>
-          <a:prstGeom prst="roundRect">
-            <a:avLst>
-              <a:gd name="adj" fmla="val 4706"/>
-            </a:avLst>
-          </a:prstGeom>
-          <a:solidFill>
-            <a:srgbClr val="EEF2F4"/>
-          </a:solidFill>
-          <a:ln w="12700">
-            <a:solidFill>
-              <a:srgbClr val="EEF2F4"/>
-            </a:solidFill>
-            <a:prstDash val="solid"/>
-          </a:ln>
-        </p:spPr>
-      </p:sp>
-      <p:sp>
-        <p:nvSpPr>
-          <p:cNvPr id="5" name="Text 3"/>
-          <p:cNvSpPr txBox="1"/>
-          <p:nvPr/>
-        </p:nvSpPr>
-        <p:spPr>
-          <a:xfrm>
-            <a:off x="731520" y="3438144"/>
-            <a:ext cx="438912" cy="438912"/>
-          </a:xfrm>
-          <a:prstGeom prst="roundRect">
-            <a:avLst>
-              <a:gd name="adj" fmla="val 16667"/>
-            </a:avLst>
-          </a:prstGeom>
-          <a:solidFill>
-            <a:srgbClr val="2E4A62"/>
-          </a:solidFill>
-          <a:ln>
-            <a:solidFill>
-              <a:srgbClr val="2E4A62"/>
-            </a:solidFill>
-          </a:ln>
-        </p:spPr>
-        <p:txBody>
-          <a:bodyPr wrap="square" lIns="0" tIns="0" rIns="0" bIns="0" rtlCol="0" anchor="ctr"/>
-          <a:lstStyle/>
-          <a:p>
-            <a:pPr algn="ctr" indent="0" marL="0">
-              <a:buNone/>
-            </a:pPr>
-            <a:r>
-              <a:rPr lang="en-US" sz="1600" b="1" dirty="0">
-                <a:solidFill>
-                  <a:srgbClr val="FFFFFF"/>
-                </a:solidFill>
-                <a:latin typeface="Calibri" pitchFamily="34" charset="0"/>
-                <a:ea typeface="Calibri" pitchFamily="34" charset="-122"/>
-                <a:cs typeface="Calibri" pitchFamily="34" charset="-120"/>
-              </a:rPr>
-              <a:t>A</a:t>
-            </a:r>
-            <a:endParaRPr lang="en-US" sz="1600" dirty="0"/>
-          </a:p>
-        </p:txBody>
-      </p:sp>
-      <p:sp>
-        <p:nvSpPr>
-          <p:cNvPr id="6" name="Text 4"/>
-          <p:cNvSpPr txBox="1"/>
-          <p:nvPr/>
-        </p:nvSpPr>
-        <p:spPr>
-          <a:xfrm>
-            <a:off x="1371600" y="2971800"/>
-            <a:ext cx="4427068" cy="1371600"/>
-          </a:xfrm>
-          <a:prstGeom prst="rect">
-            <a:avLst/>
-          </a:prstGeom>
-          <a:noFill/>
-          <a:ln/>
-        </p:spPr>
-        <p:txBody>
-          <a:bodyPr wrap="square" lIns="0" tIns="0" rIns="0" bIns="0" rtlCol="0" anchor="ctr"/>
-          <a:lstStyle/>
-          <a:p>
-            <a:pPr indent="0" marL="0">
-              <a:buNone/>
-            </a:pPr>
-            <a:r>
-              <a:rPr lang="en-US" sz="1900" dirty="0">
-                <a:solidFill>
-                  <a:srgbClr val="1B2530"/>
-                </a:solidFill>
-                <a:latin typeface="Calibri" pitchFamily="34" charset="0"/>
-                <a:ea typeface="Calibri" pitchFamily="34" charset="-122"/>
-                <a:cs typeface="Calibri" pitchFamily="34" charset="-120"/>
-              </a:rPr>
-              <a:t>python3 -m prg32 esp32c6 upload</a:t>
-            </a:r>
-            <a:endParaRPr lang="en-US" sz="1900" dirty="0"/>
-          </a:p>
-        </p:txBody>
-      </p:sp>
-      <p:sp>
-        <p:nvSpPr>
-          <p:cNvPr id="7" name="Shape 5"/>
-          <p:cNvSpPr/>
-          <p:nvPr/>
-        </p:nvSpPr>
-        <p:spPr>
-          <a:xfrm>
-            <a:off x="6210148" y="2880360"/>
-            <a:ext cx="5432908" cy="1554480"/>
-          </a:xfrm>
-          <a:prstGeom prst="roundRect">
-            <a:avLst>
-              <a:gd name="adj" fmla="val 4706"/>
-            </a:avLst>
-          </a:prstGeom>
-          <a:solidFill>
-            <a:srgbClr val="EEF2F4"/>
-          </a:solidFill>
-          <a:ln w="12700">
-            <a:solidFill>
-              <a:srgbClr val="EEF2F4"/>
-            </a:solidFill>
-            <a:prstDash val="solid"/>
-          </a:ln>
-        </p:spPr>
-      </p:sp>
-      <p:sp>
-        <p:nvSpPr>
-          <p:cNvPr id="8" name="Text 6"/>
-          <p:cNvSpPr txBox="1"/>
-          <p:nvPr/>
-        </p:nvSpPr>
-        <p:spPr>
-          <a:xfrm>
-            <a:off x="6393028" y="3438144"/>
-            <a:ext cx="438912" cy="438912"/>
-          </a:xfrm>
-          <a:prstGeom prst="roundRect">
-            <a:avLst>
-              <a:gd name="adj" fmla="val 16667"/>
-            </a:avLst>
-          </a:prstGeom>
-          <a:solidFill>
-            <a:srgbClr val="2E4A62"/>
-          </a:solidFill>
-          <a:ln>
-            <a:solidFill>
-              <a:srgbClr val="2E4A62"/>
-            </a:solidFill>
-          </a:ln>
-        </p:spPr>
-        <p:txBody>
-          <a:bodyPr wrap="square" lIns="0" tIns="0" rIns="0" bIns="0" rtlCol="0" anchor="ctr"/>
-          <a:lstStyle/>
-          <a:p>
-            <a:pPr algn="ctr" indent="0" marL="0">
-              <a:buNone/>
-            </a:pPr>
-            <a:r>
-              <a:rPr lang="en-US" sz="1600" b="1" dirty="0">
-                <a:solidFill>
-                  <a:srgbClr val="FFFFFF"/>
-                </a:solidFill>
-                <a:latin typeface="Calibri" pitchFamily="34" charset="0"/>
-                <a:ea typeface="Calibri" pitchFamily="34" charset="-122"/>
-                <a:cs typeface="Calibri" pitchFamily="34" charset="-120"/>
-              </a:rPr>
-              <a:t>B</a:t>
-            </a:r>
-            <a:endParaRPr lang="en-US" sz="1600" dirty="0"/>
-          </a:p>
-        </p:txBody>
-      </p:sp>
-      <p:sp>
-        <p:nvSpPr>
-          <p:cNvPr id="9" name="Text 7"/>
-          <p:cNvSpPr txBox="1"/>
-          <p:nvPr/>
-        </p:nvSpPr>
-        <p:spPr>
-          <a:xfrm>
-            <a:off x="7033108" y="2971800"/>
-            <a:ext cx="4427068" cy="1371600"/>
-          </a:xfrm>
-          <a:prstGeom prst="rect">
-            <a:avLst/>
-          </a:prstGeom>
-          <a:noFill/>
-          <a:ln/>
-        </p:spPr>
-        <p:txBody>
-          <a:bodyPr wrap="square" lIns="0" tIns="0" rIns="0" bIns="0" rtlCol="0" anchor="ctr"/>
-          <a:lstStyle/>
-          <a:p>
-            <a:pPr indent="0" marL="0">
-              <a:buNone/>
-            </a:pPr>
-            <a:r>
-              <a:rPr lang="en-US" sz="1900" dirty="0">
-                <a:solidFill>
-                  <a:srgbClr val="1B2530"/>
-                </a:solidFill>
-                <a:latin typeface="Calibri" pitchFamily="34" charset="0"/>
-                <a:ea typeface="Calibri" pitchFamily="34" charset="-122"/>
-                <a:cs typeface="Calibri" pitchFamily="34" charset="-120"/>
-              </a:rPr>
-              <a:t>python3 -m prg32 qemu upload</a:t>
-            </a:r>
-            <a:endParaRPr lang="en-US" sz="1900" dirty="0"/>
-          </a:p>
-        </p:txBody>
-      </p:sp>
-      <p:sp>
-        <p:nvSpPr>
-          <p:cNvPr id="10" name="Shape 8"/>
-          <p:cNvSpPr/>
-          <p:nvPr/>
-        </p:nvSpPr>
-        <p:spPr>
-          <a:xfrm>
-            <a:off x="548640" y="4663440"/>
-            <a:ext cx="5432908" cy="1554480"/>
-          </a:xfrm>
-          <a:prstGeom prst="roundRect">
-            <a:avLst>
-              <a:gd name="adj" fmla="val 4706"/>
-            </a:avLst>
-          </a:prstGeom>
-          <a:solidFill>
-            <a:srgbClr val="EEF2F4"/>
-          </a:solidFill>
-          <a:ln w="12700">
-            <a:solidFill>
-              <a:srgbClr val="EEF2F4"/>
-            </a:solidFill>
-            <a:prstDash val="solid"/>
-          </a:ln>
-        </p:spPr>
-      </p:sp>
-      <p:sp>
-        <p:nvSpPr>
-          <p:cNvPr id="11" name="Text 9"/>
-          <p:cNvSpPr txBox="1"/>
-          <p:nvPr/>
-        </p:nvSpPr>
-        <p:spPr>
-          <a:xfrm>
-            <a:off x="731520" y="5221224"/>
-            <a:ext cx="438912" cy="438912"/>
-          </a:xfrm>
-          <a:prstGeom prst="roundRect">
-            <a:avLst>
-              <a:gd name="adj" fmla="val 16667"/>
-            </a:avLst>
-          </a:prstGeom>
-          <a:solidFill>
-            <a:srgbClr val="2E4A62"/>
-          </a:solidFill>
-          <a:ln>
-            <a:solidFill>
-              <a:srgbClr val="2E4A62"/>
-            </a:solidFill>
-          </a:ln>
-        </p:spPr>
-        <p:txBody>
-          <a:bodyPr wrap="square" lIns="0" tIns="0" rIns="0" bIns="0" rtlCol="0" anchor="ctr"/>
-          <a:lstStyle/>
-          <a:p>
-            <a:pPr algn="ctr" indent="0" marL="0">
-              <a:buNone/>
-            </a:pPr>
-            <a:r>
-              <a:rPr lang="en-US" sz="1600" b="1" dirty="0">
-                <a:solidFill>
-                  <a:srgbClr val="FFFFFF"/>
-                </a:solidFill>
-                <a:latin typeface="Calibri" pitchFamily="34" charset="0"/>
-                <a:ea typeface="Calibri" pitchFamily="34" charset="-122"/>
-                <a:cs typeface="Calibri" pitchFamily="34" charset="-120"/>
-              </a:rPr>
-              <a:t>C</a:t>
-            </a:r>
-            <a:endParaRPr lang="en-US" sz="1600" dirty="0"/>
-          </a:p>
-        </p:txBody>
-      </p:sp>
-      <p:sp>
-        <p:nvSpPr>
-          <p:cNvPr id="12" name="Text 10"/>
-          <p:cNvSpPr txBox="1"/>
-          <p:nvPr/>
-        </p:nvSpPr>
-        <p:spPr>
-          <a:xfrm>
-            <a:off x="1371600" y="4754880"/>
-            <a:ext cx="4427068" cy="1371600"/>
-          </a:xfrm>
-          <a:prstGeom prst="rect">
-            <a:avLst/>
-          </a:prstGeom>
-          <a:noFill/>
-          <a:ln/>
-        </p:spPr>
-        <p:txBody>
-          <a:bodyPr wrap="square" lIns="0" tIns="0" rIns="0" bIns="0" rtlCol="0" anchor="ctr"/>
-          <a:lstStyle/>
-          <a:p>
-            <a:pPr indent="0" marL="0">
-              <a:buNone/>
-            </a:pPr>
-            <a:r>
-              <a:rPr lang="en-US" sz="1900" dirty="0">
-                <a:solidFill>
-                  <a:srgbClr val="1B2530"/>
-                </a:solidFill>
-                <a:latin typeface="Calibri" pitchFamily="34" charset="0"/>
-                <a:ea typeface="Calibri" pitchFamily="34" charset="-122"/>
-                <a:cs typeface="Calibri" pitchFamily="34" charset="-120"/>
-              </a:rPr>
-              <a:t>python3 -m prg32 qemu build</a:t>
-            </a:r>
-            <a:endParaRPr lang="en-US" sz="1900" dirty="0"/>
-          </a:p>
-        </p:txBody>
-      </p:sp>
-      <p:sp>
-        <p:nvSpPr>
-          <p:cNvPr id="13" name="Shape 11"/>
-          <p:cNvSpPr/>
-          <p:nvPr/>
-        </p:nvSpPr>
-        <p:spPr>
-          <a:xfrm>
-            <a:off x="6210148" y="4663440"/>
-            <a:ext cx="5432908" cy="1554480"/>
-          </a:xfrm>
-          <a:prstGeom prst="roundRect">
-            <a:avLst>
-              <a:gd name="adj" fmla="val 4706"/>
-            </a:avLst>
-          </a:prstGeom>
-          <a:solidFill>
-            <a:srgbClr val="EEF2F4"/>
-          </a:solidFill>
-          <a:ln w="12700">
-            <a:solidFill>
-              <a:srgbClr val="EEF2F4"/>
-            </a:solidFill>
-            <a:prstDash val="solid"/>
-          </a:ln>
-        </p:spPr>
-      </p:sp>
-      <p:sp>
-        <p:nvSpPr>
-          <p:cNvPr id="14" name="Text 12"/>
-          <p:cNvSpPr txBox="1"/>
-          <p:nvPr/>
-        </p:nvSpPr>
-        <p:spPr>
-          <a:xfrm>
-            <a:off x="6393028" y="5221224"/>
-            <a:ext cx="438912" cy="438912"/>
-          </a:xfrm>
-          <a:prstGeom prst="roundRect">
-            <a:avLst>
-              <a:gd name="adj" fmla="val 16667"/>
-            </a:avLst>
-          </a:prstGeom>
-          <a:solidFill>
-            <a:srgbClr val="2E4A62"/>
-          </a:solidFill>
-          <a:ln>
-            <a:solidFill>
-              <a:srgbClr val="2E4A62"/>
-            </a:solidFill>
-          </a:ln>
-        </p:spPr>
-        <p:txBody>
-          <a:bodyPr wrap="square" lIns="0" tIns="0" rIns="0" bIns="0" rtlCol="0" anchor="ctr"/>
-          <a:lstStyle/>
-          <a:p>
-            <a:pPr algn="ctr" indent="0" marL="0">
-              <a:buNone/>
-            </a:pPr>
-            <a:r>
-              <a:rPr lang="en-US" sz="1600" b="1" dirty="0">
-                <a:solidFill>
-                  <a:srgbClr val="FFFFFF"/>
-                </a:solidFill>
-                <a:latin typeface="Calibri" pitchFamily="34" charset="0"/>
-                <a:ea typeface="Calibri" pitchFamily="34" charset="-122"/>
-                <a:cs typeface="Calibri" pitchFamily="34" charset="-120"/>
-              </a:rPr>
-              <a:t>D</a:t>
-            </a:r>
-            <a:endParaRPr lang="en-US" sz="1600" dirty="0"/>
-          </a:p>
-        </p:txBody>
-      </p:sp>
-      <p:sp>
-        <p:nvSpPr>
-          <p:cNvPr id="15" name="Text 13"/>
-          <p:cNvSpPr txBox="1"/>
-          <p:nvPr/>
-        </p:nvSpPr>
-        <p:spPr>
-          <a:xfrm>
-            <a:off x="7033108" y="4754880"/>
-            <a:ext cx="4427068" cy="1371600"/>
-          </a:xfrm>
-          <a:prstGeom prst="rect">
-            <a:avLst/>
-          </a:prstGeom>
-          <a:noFill/>
-          <a:ln/>
-        </p:spPr>
-        <p:txBody>
-          <a:bodyPr wrap="square" lIns="0" tIns="0" rIns="0" bIns="0" rtlCol="0" anchor="ctr"/>
-          <a:lstStyle/>
-          <a:p>
-            <a:pPr indent="0" marL="0">
-              <a:buNone/>
-            </a:pPr>
-            <a:r>
-              <a:rPr lang="en-US" sz="1900" dirty="0">
-                <a:solidFill>
-                  <a:srgbClr val="1B2530"/>
-                </a:solidFill>
-                <a:latin typeface="Calibri" pitchFamily="34" charset="0"/>
-                <a:ea typeface="Calibri" pitchFamily="34" charset="-122"/>
-                <a:cs typeface="Calibri" pitchFamily="34" charset="-120"/>
-              </a:rPr>
-              <a:t>idf.py flash</a:t>
-            </a:r>
-            <a:endParaRPr lang="en-US" sz="1900" dirty="0"/>
-          </a:p>
-        </p:txBody>
-      </p:sp>
-      <p:sp>
-        <p:nvSpPr>
-          <p:cNvPr id="25" name="Slide Number Placeholder 0"/>
-          <p:cNvSpPr>
-            <a:spLocks noGrp="1"/>
-          </p:cNvSpPr>
-          <p:nvPr>
-            <p:ph type="sldNum" sz="quarter" idx="4294967295"/>
-          </p:nvPr>
-        </p:nvSpPr>
-        <p:spPr>
-          <a:xfrm>
-            <a:off x="11002975" y="6419088"/>
-            <a:ext cx="640080" cy="274320"/>
-          </a:xfrm>
-          <a:prstGeom prst="rect">
-            <a:avLst/>
-          </a:prstGeom>
-          <a:extLst>
-            <a:ext uri="{C572A759-6A51-4108-AA02-DFA0A04FC94B}">
-              <ma14:wrappingTextBoxFlag xmlns:ma14="http://schemas.microsoft.com/office/mac/drawingml/2011/main" val="0"/>
-            </a:ext>
-          </a:extLst>
-        </p:spPr>
-        <p:txBody>
-          <a:bodyPr/>
-          <a:lstStyle>
-            <a:lvl1pPr>
-              <a:defRPr sz="1000">
-                <a:solidFill>
-                  <a:srgbClr val="5B6B78"/>
-                </a:solidFill>
-                <a:latin typeface="Calibri"/>
-                <a:ea typeface="Calibri"/>
-                <a:cs typeface="Calibri"/>
-              </a:defRPr>
-            </a:lvl1pPr>
-          </a:lstStyle>
-          <a:p>
-            <a:pPr algn="r"/>
-            <a:fld id="{F7021451-1387-4CA6-816F-3879F97B5CBC}" type="slidenum">
-              <a:rPr b="0" lang="en-US"/>
               <a:t>29</a:t>
             </a:fld>
             <a:endParaRPr lang="en-US"/>
@@ -19603,7 +21109,7 @@
                 <a:ea typeface="Cambria" pitchFamily="34" charset="-122"/>
                 <a:cs typeface="Cambria" pitchFamily="34" charset="-120"/>
               </a:rPr>
-              <a:t>Checkpoint</a:t>
+              <a:t>Ports and permissions</a:t>
             </a:r>
             <a:endParaRPr lang="en-US" sz="3000" dirty="0"/>
           </a:p>
@@ -19626,11 +21132,11 @@
             </a:avLst>
           </a:prstGeom>
           <a:solidFill>
-            <a:srgbClr val="2F7D4F"/>
+            <a:srgbClr val="0E7C86"/>
           </a:solidFill>
           <a:ln>
             <a:solidFill>
-              <a:srgbClr val="2F7D4F"/>
+              <a:srgbClr val="0E7C86"/>
             </a:solidFill>
           </a:ln>
         </p:spPr>
@@ -19681,7 +21187,7 @@
               <a:buNone/>
             </a:pPr>
             <a:r>
-              <a:rPr lang="en-US" sz="2200" dirty="0">
+              <a:rPr lang="en-US" sz="2400" dirty="0">
                 <a:solidFill>
                   <a:srgbClr val="1B2530"/>
                 </a:solidFill>
@@ -19689,9 +21195,9 @@
                 <a:ea typeface="Calibri" pitchFamily="34" charset="-122"/>
                 <a:cs typeface="Calibri" pitchFamily="34" charset="-120"/>
               </a:rPr>
-              <a:t>prg32 doctor passes in an ESP-IDF shell</a:t>
-            </a:r>
-            <a:endParaRPr lang="en-US" sz="2200" dirty="0"/>
+              <a:t>Linux: boards appear as /dev/ttyACM0 or /dev/ttyUSB0</a:t>
+            </a:r>
+            <a:endParaRPr lang="en-US" sz="2400" dirty="0"/>
           </a:p>
         </p:txBody>
       </p:sp>
@@ -19703,7 +21209,7 @@
         </p:nvSpPr>
         <p:spPr>
           <a:xfrm>
-            <a:off x="548640" y="2465222"/>
+            <a:off x="548640" y="2711196"/>
             <a:ext cx="457200" cy="457200"/>
           </a:xfrm>
           <a:prstGeom prst="roundRect">
@@ -19712,11 +21218,11 @@
             </a:avLst>
           </a:prstGeom>
           <a:solidFill>
-            <a:srgbClr val="2F7D4F"/>
+            <a:srgbClr val="0E7C86"/>
           </a:solidFill>
           <a:ln>
             <a:solidFill>
-              <a:srgbClr val="2F7D4F"/>
+              <a:srgbClr val="0E7C86"/>
             </a:solidFill>
           </a:ln>
         </p:spPr>
@@ -19750,7 +21256,7 @@
         </p:nvSpPr>
         <p:spPr>
           <a:xfrm>
-            <a:off x="1280160" y="2446934"/>
+            <a:off x="1280160" y="2692908"/>
             <a:ext cx="10362895" cy="493776"/>
           </a:xfrm>
           <a:prstGeom prst="rect">
@@ -19767,7 +21273,7 @@
               <a:buNone/>
             </a:pPr>
             <a:r>
-              <a:rPr lang="en-US" sz="2200" dirty="0">
+              <a:rPr lang="en-US" sz="2400" dirty="0">
                 <a:solidFill>
                   <a:srgbClr val="1B2530"/>
                 </a:solidFill>
@@ -19775,9 +21281,9 @@
                 <a:ea typeface="Calibri" pitchFamily="34" charset="-122"/>
                 <a:cs typeface="Calibri" pitchFamily="34" charset="-120"/>
               </a:rPr>
-              <a:t>You can say which chip and directory each target uses</a:t>
-            </a:r>
-            <a:endParaRPr lang="en-US" sz="2200" dirty="0"/>
+              <a:t>Linux: join the dialout group, then log out and back in</a:t>
+            </a:r>
+            <a:endParaRPr lang="en-US" sz="2400" dirty="0"/>
           </a:p>
         </p:txBody>
       </p:sp>
@@ -19789,7 +21295,7 @@
         </p:nvSpPr>
         <p:spPr>
           <a:xfrm>
-            <a:off x="548640" y="3449117"/>
+            <a:off x="548640" y="3941064"/>
             <a:ext cx="457200" cy="457200"/>
           </a:xfrm>
           <a:prstGeom prst="roundRect">
@@ -19798,11 +21304,11 @@
             </a:avLst>
           </a:prstGeom>
           <a:solidFill>
-            <a:srgbClr val="2F7D4F"/>
+            <a:srgbClr val="0E7C86"/>
           </a:solidFill>
           <a:ln>
             <a:solidFill>
-              <a:srgbClr val="2F7D4F"/>
+              <a:srgbClr val="0E7C86"/>
             </a:solidFill>
           </a:ln>
         </p:spPr>
@@ -19836,7 +21342,7 @@
         </p:nvSpPr>
         <p:spPr>
           <a:xfrm>
-            <a:off x="1280160" y="3430829"/>
+            <a:off x="1280160" y="3922776"/>
             <a:ext cx="10362895" cy="493776"/>
           </a:xfrm>
           <a:prstGeom prst="rect">
@@ -19853,7 +21359,7 @@
               <a:buNone/>
             </a:pPr>
             <a:r>
-              <a:rPr lang="en-US" sz="2200" dirty="0">
+              <a:rPr lang="en-US" sz="2400" dirty="0">
                 <a:solidFill>
                   <a:srgbClr val="1B2530"/>
                 </a:solidFill>
@@ -19861,9 +21367,9 @@
                 <a:ea typeface="Calibri" pitchFamily="34" charset="-122"/>
                 <a:cs typeface="Calibri" pitchFamily="34" charset="-120"/>
               </a:rPr>
-              <a:t>You can read every option of cartridge build</a:t>
-            </a:r>
-            <a:endParaRPr lang="en-US" sz="2200" dirty="0"/>
+              <a:t>Windows: find the COM port in Device Manager; pass -p COMx</a:t>
+            </a:r>
+            <a:endParaRPr lang="en-US" sz="2400" dirty="0"/>
           </a:p>
         </p:txBody>
       </p:sp>
@@ -19875,7 +21381,7 @@
         </p:nvSpPr>
         <p:spPr>
           <a:xfrm>
-            <a:off x="548640" y="4433011"/>
+            <a:off x="548640" y="5170932"/>
             <a:ext cx="457200" cy="457200"/>
           </a:xfrm>
           <a:prstGeom prst="roundRect">
@@ -19884,11 +21390,11 @@
             </a:avLst>
           </a:prstGeom>
           <a:solidFill>
-            <a:srgbClr val="2F7D4F"/>
+            <a:srgbClr val="0E7C86"/>
           </a:solidFill>
           <a:ln>
             <a:solidFill>
-              <a:srgbClr val="2F7D4F"/>
+              <a:srgbClr val="0E7C86"/>
             </a:solidFill>
           </a:ln>
         </p:spPr>
@@ -19922,7 +21428,7 @@
         </p:nvSpPr>
         <p:spPr>
           <a:xfrm>
-            <a:off x="1280160" y="4414723"/>
+            <a:off x="1280160" y="5152644"/>
             <a:ext cx="10362895" cy="493776"/>
           </a:xfrm>
           <a:prstGeom prst="rect">
@@ -19939,7 +21445,7 @@
               <a:buNone/>
             </a:pPr>
             <a:r>
-              <a:rPr lang="en-US" sz="2200" dirty="0">
+              <a:rPr lang="en-US" sz="2400" dirty="0">
                 <a:solidFill>
                   <a:srgbClr val="1B2530"/>
                 </a:solidFill>
@@ -19947,95 +21453,9 @@
                 <a:ea typeface="Calibri" pitchFamily="34" charset="-122"/>
                 <a:cs typeface="Calibri" pitchFamily="34" charset="-120"/>
               </a:rPr>
-              <a:t>You know where QEMU reads the keyboard</a:t>
-            </a:r>
-            <a:endParaRPr lang="en-US" sz="2200" dirty="0"/>
-          </a:p>
-        </p:txBody>
-      </p:sp>
-      <p:sp>
-        <p:nvSpPr>
-          <p:cNvPr id="11" name="Text 9"/>
-          <p:cNvSpPr txBox="1"/>
-          <p:nvPr/>
-        </p:nvSpPr>
-        <p:spPr>
-          <a:xfrm>
-            <a:off x="548640" y="5416906"/>
-            <a:ext cx="457200" cy="457200"/>
-          </a:xfrm>
-          <a:prstGeom prst="roundRect">
-            <a:avLst>
-              <a:gd name="adj" fmla="val 16000"/>
-            </a:avLst>
-          </a:prstGeom>
-          <a:solidFill>
-            <a:srgbClr val="2F7D4F"/>
-          </a:solidFill>
-          <a:ln>
-            <a:solidFill>
-              <a:srgbClr val="2F7D4F"/>
-            </a:solidFill>
-          </a:ln>
-        </p:spPr>
-        <p:txBody>
-          <a:bodyPr wrap="square" lIns="0" tIns="0" rIns="0" bIns="0" rtlCol="0" anchor="ctr"/>
-          <a:lstStyle/>
-          <a:p>
-            <a:pPr algn="ctr" indent="0" marL="0">
-              <a:buNone/>
-            </a:pPr>
-            <a:r>
-              <a:rPr lang="en-US" sz="1700" b="1" dirty="0">
-                <a:solidFill>
-                  <a:srgbClr val="FFFFFF"/>
-                </a:solidFill>
-                <a:latin typeface="Calibri" pitchFamily="34" charset="0"/>
-                <a:ea typeface="Calibri" pitchFamily="34" charset="-122"/>
-                <a:cs typeface="Calibri" pitchFamily="34" charset="-120"/>
-              </a:rPr>
-              <a:t>5</a:t>
-            </a:r>
-            <a:endParaRPr lang="en-US" sz="1700" dirty="0"/>
-          </a:p>
-        </p:txBody>
-      </p:sp>
-      <p:sp>
-        <p:nvSpPr>
-          <p:cNvPr id="12" name="Text 10"/>
-          <p:cNvSpPr txBox="1"/>
-          <p:nvPr/>
-        </p:nvSpPr>
-        <p:spPr>
-          <a:xfrm>
-            <a:off x="1280160" y="5398618"/>
-            <a:ext cx="10362895" cy="493776"/>
-          </a:xfrm>
-          <a:prstGeom prst="rect">
-            <a:avLst/>
-          </a:prstGeom>
-          <a:noFill/>
-          <a:ln/>
-        </p:spPr>
-        <p:txBody>
-          <a:bodyPr wrap="square" lIns="0" tIns="0" rIns="0" bIns="0" rtlCol="0" anchor="ctr"/>
-          <a:lstStyle/>
-          <a:p>
-            <a:pPr indent="0" marL="0">
-              <a:buNone/>
-            </a:pPr>
-            <a:r>
-              <a:rPr lang="en-US" sz="2200" dirty="0">
-                <a:solidFill>
-                  <a:srgbClr val="1B2530"/>
-                </a:solidFill>
-                <a:latin typeface="Calibri" pitchFamily="34" charset="0"/>
-                <a:ea typeface="Calibri" pitchFamily="34" charset="-122"/>
-                <a:cs typeface="Calibri" pitchFamily="34" charset="-120"/>
-              </a:rPr>
-              <a:t>You can name the default cartridge RAM size</a:t>
-            </a:r>
-            <a:endParaRPr lang="en-US" sz="2200" dirty="0"/>
+              <a:t>Only one program can hold a serial port: close other monitors</a:t>
+            </a:r>
+            <a:endParaRPr lang="en-US" sz="2400" dirty="0"/>
           </a:p>
         </p:txBody>
       </p:sp>
@@ -20147,7 +21567,7 @@
                 <a:ea typeface="Cambria" pitchFamily="34" charset="-122"/>
                 <a:cs typeface="Cambria" pitchFamily="34" charset="-120"/>
               </a:rPr>
-              <a:t>Next steps and reading</a:t>
+              <a:t>Do you need all this?</a:t>
             </a:r>
             <a:endParaRPr lang="en-US" sz="3000" dirty="0"/>
           </a:p>
@@ -20221,7 +21641,7 @@
                 <a:ea typeface="Calibri" pitchFamily="34" charset="-122"/>
                 <a:cs typeface="Calibri" pitchFamily="34" charset="-120"/>
               </a:rPr>
-              <a:t>Before the next session</a:t>
+              <a:t>Yes, to build</a:t>
             </a:r>
             <a:endParaRPr lang="en-US" sz="1900" dirty="0"/>
           </a:p>
@@ -20264,7 +21684,7 @@
                 <a:ea typeface="Calibri" pitchFamily="34" charset="-122"/>
                 <a:cs typeface="Calibri" pitchFamily="34" charset="-120"/>
               </a:rPr>
-              <a:t>Do the setup lab; bring your own laptop</a:t>
+              <a:t>Writing assembly or C cartridges</a:t>
             </a:r>
             <a:endParaRPr lang="en-US" sz="2100" dirty="0"/>
           </a:p>
@@ -20285,7 +21705,7 @@
                 <a:ea typeface="Calibri" pitchFamily="34" charset="-122"/>
                 <a:cs typeface="Calibri" pitchFamily="34" charset="-120"/>
               </a:rPr>
-              <a:t>Windows users: run the ESP-IDF installer before the lab</a:t>
+              <a:t>Building or modifying firmware</a:t>
             </a:r>
             <a:endParaRPr lang="en-US" sz="2100" dirty="0"/>
           </a:p>
@@ -20306,7 +21726,7 @@
                 <a:ea typeface="Calibri" pitchFamily="34" charset="-122"/>
                 <a:cs typeface="Calibri" pitchFamily="34" charset="-120"/>
               </a:rPr>
-              <a:t>Read docs/usage/troubleshooting.md</a:t>
+              <a:t>Measuring performance on a board</a:t>
             </a:r>
             <a:endParaRPr lang="en-US" sz="2100" dirty="0"/>
           </a:p>
@@ -20380,7 +21800,7 @@
                 <a:ea typeface="Calibri" pitchFamily="34" charset="-122"/>
                 <a:cs typeface="Calibri" pitchFamily="34" charset="-120"/>
               </a:rPr>
-              <a:t>Reading and sources</a:t>
+              <a:t>No, to run or to start</a:t>
             </a:r>
             <a:endParaRPr lang="en-US" sz="1900" dirty="0"/>
           </a:p>
@@ -20423,7 +21843,7 @@
                 <a:ea typeface="Calibri" pitchFamily="34" charset="-122"/>
                 <a:cs typeface="Calibri" pitchFamily="34" charset="-120"/>
               </a:rPr>
-              <a:t>Textbook, Chapter 3</a:t>
+              <a:t>Playing and debugging: PRG32-QT</a:t>
             </a:r>
             <a:endParaRPr lang="en-US" sz="2100" dirty="0"/>
           </a:p>
@@ -20444,7 +21864,7 @@
                 <a:ea typeface="Calibri" pitchFamily="34" charset="-122"/>
                 <a:cs typeface="Calibri" pitchFamily="34" charset="-120"/>
               </a:rPr>
-              <a:t>PRG32 README: Install and Setup</a:t>
+              <a:t>Blocks: a browser and the Construction Kit</a:t>
             </a:r>
             <a:endParaRPr lang="en-US" sz="2100" dirty="0"/>
           </a:p>
@@ -20465,10 +21885,1369 @@
                 <a:ea typeface="Calibri" pitchFamily="34" charset="-122"/>
                 <a:cs typeface="Calibri" pitchFamily="34" charset="-120"/>
               </a:rPr>
-              <a:t>PRG32 docs/usage: getting_started, tooling, qemu, profiles</a:t>
+              <a:t>Reading code: the repository</a:t>
             </a:r>
             <a:endParaRPr lang="en-US" sz="2100" dirty="0"/>
           </a:p>
+        </p:txBody>
+      </p:sp>
+      <p:sp>
+        <p:nvSpPr>
+          <p:cNvPr id="25" name="Slide Number Placeholder 0"/>
+          <p:cNvSpPr>
+            <a:spLocks noGrp="1"/>
+          </p:cNvSpPr>
+          <p:nvPr>
+            <p:ph type="sldNum" sz="quarter" idx="4294967295"/>
+          </p:nvPr>
+        </p:nvSpPr>
+        <p:spPr>
+          <a:xfrm>
+            <a:off x="11002975" y="6419088"/>
+            <a:ext cx="640080" cy="274320"/>
+          </a:xfrm>
+          <a:prstGeom prst="rect">
+            <a:avLst/>
+          </a:prstGeom>
+          <a:extLst>
+            <a:ext uri="{C572A759-6A51-4108-AA02-DFA0A04FC94B}">
+              <ma14:wrappingTextBoxFlag xmlns:ma14="http://schemas.microsoft.com/office/mac/drawingml/2011/main" val="0"/>
+            </a:ext>
+          </a:extLst>
+        </p:spPr>
+        <p:txBody>
+          <a:bodyPr/>
+          <a:lstStyle>
+            <a:lvl1pPr>
+              <a:defRPr sz="1000">
+                <a:solidFill>
+                  <a:srgbClr val="5B6B78"/>
+                </a:solidFill>
+                <a:latin typeface="Calibri"/>
+                <a:ea typeface="Calibri"/>
+                <a:cs typeface="Calibri"/>
+              </a:defRPr>
+            </a:lvl1pPr>
+          </a:lstStyle>
+          <a:p>
+            <a:pPr algn="r"/>
+            <a:fld id="{F7021451-1387-4CA6-816F-3879F97B5CBC}" type="slidenum">
+              <a:rPr b="0" lang="en-US"/>
+              <a:t>31</a:t>
+            </a:fld>
+            <a:endParaRPr lang="en-US"/>
+          </a:p>
+        </p:txBody>
+      </p:sp>
+    </p:spTree>
+  </p:cSld>
+  <p:clrMapOvr>
+    <a:masterClrMapping/>
+  </p:clrMapOvr>
+</p:sld>
+</file>
+
+<file path=ppt/slides/slide32.xml><?xml version="1.0" encoding="utf-8"?>
+<p:sld xmlns:a="http://schemas.openxmlformats.org/drawingml/2006/main" xmlns:r="http://schemas.openxmlformats.org/officeDocument/2006/relationships" xmlns:p="http://schemas.openxmlformats.org/presentationml/2006/main">
+  <p:cSld name="Slide 32">
+    <p:spTree>
+      <p:nvGrpSpPr>
+        <p:cNvPr id="1" name=""/>
+        <p:cNvGrpSpPr/>
+        <p:nvPr/>
+      </p:nvGrpSpPr>
+      <p:grpSpPr>
+        <a:xfrm>
+          <a:off x="0" y="0"/>
+          <a:ext cx="0" cy="0"/>
+          <a:chOff x="0" y="0"/>
+          <a:chExt cx="0" cy="0"/>
+        </a:xfrm>
+      </p:grpSpPr>
+      <p:sp>
+        <p:nvSpPr>
+          <p:cNvPr id="2" name="Text 1"/>
+          <p:cNvSpPr/>
+          <p:nvPr>
+            <p:ph idx="101" type="title" hasCustomPrompt="1"/>
+          </p:nvPr>
+        </p:nvSpPr>
+        <p:spPr>
+          <a:xfrm>
+            <a:off x="548640" y="384048"/>
+            <a:ext cx="11094415" cy="868680"/>
+          </a:xfrm>
+          <a:prstGeom prst="rect">
+            <a:avLst/>
+          </a:prstGeom>
+          <a:noFill/>
+          <a:ln/>
+        </p:spPr>
+        <p:txBody>
+          <a:bodyPr wrap="square" lIns="0" tIns="0" rIns="0" bIns="0" rtlCol="0" anchor="ctr"/>
+          <a:lstStyle/>
+          <a:p>
+            <a:pPr algn="l" indent="0" marL="0">
+              <a:buNone/>
+            </a:pPr>
+            <a:r>
+              <a:rPr lang="en-US" sz="3000" b="1" dirty="0">
+                <a:solidFill>
+                  <a:srgbClr val="2E4A62"/>
+                </a:solidFill>
+                <a:latin typeface="Cambria" pitchFamily="34" charset="0"/>
+                <a:ea typeface="Cambria" pitchFamily="34" charset="-122"/>
+                <a:cs typeface="Cambria" pitchFamily="34" charset="-120"/>
+              </a:rPr>
+              <a:t>Check your understanding</a:t>
+            </a:r>
+            <a:endParaRPr lang="en-US" sz="3000" dirty="0"/>
+          </a:p>
+        </p:txBody>
+      </p:sp>
+      <p:sp>
+        <p:nvSpPr>
+          <p:cNvPr id="3" name="Text 1"/>
+          <p:cNvSpPr txBox="1"/>
+          <p:nvPr/>
+        </p:nvSpPr>
+        <p:spPr>
+          <a:xfrm>
+            <a:off x="548640" y="1463040"/>
+            <a:ext cx="11094415" cy="1188720"/>
+          </a:xfrm>
+          <a:prstGeom prst="rect">
+            <a:avLst/>
+          </a:prstGeom>
+          <a:noFill/>
+          <a:ln/>
+        </p:spPr>
+        <p:txBody>
+          <a:bodyPr wrap="square" lIns="0" tIns="0" rIns="0" bIns="0" rtlCol="0" anchor="ctr"/>
+          <a:lstStyle/>
+          <a:p>
+            <a:pPr indent="0" marL="0">
+              <a:buNone/>
+            </a:pPr>
+            <a:r>
+              <a:rPr lang="en-US" sz="2600" b="1" dirty="0">
+                <a:solidFill>
+                  <a:srgbClr val="1B2530"/>
+                </a:solidFill>
+                <a:latin typeface="Cambria" pitchFamily="34" charset="0"/>
+                <a:ea typeface="Cambria" pitchFamily="34" charset="-122"/>
+                <a:cs typeface="Cambria" pitchFamily="34" charset="-120"/>
+              </a:rPr>
+              <a:t>Which command stages a cartridge into the emulator?</a:t>
+            </a:r>
+            <a:endParaRPr lang="en-US" sz="2600" dirty="0"/>
+          </a:p>
+        </p:txBody>
+      </p:sp>
+      <p:sp>
+        <p:nvSpPr>
+          <p:cNvPr id="4" name="Shape 2"/>
+          <p:cNvSpPr/>
+          <p:nvPr/>
+        </p:nvSpPr>
+        <p:spPr>
+          <a:xfrm>
+            <a:off x="548640" y="2880360"/>
+            <a:ext cx="5432908" cy="1554480"/>
+          </a:xfrm>
+          <a:prstGeom prst="roundRect">
+            <a:avLst>
+              <a:gd name="adj" fmla="val 4706"/>
+            </a:avLst>
+          </a:prstGeom>
+          <a:solidFill>
+            <a:srgbClr val="EEF2F4"/>
+          </a:solidFill>
+          <a:ln w="12700">
+            <a:solidFill>
+              <a:srgbClr val="EEF2F4"/>
+            </a:solidFill>
+            <a:prstDash val="solid"/>
+          </a:ln>
+        </p:spPr>
+      </p:sp>
+      <p:sp>
+        <p:nvSpPr>
+          <p:cNvPr id="5" name="Text 3"/>
+          <p:cNvSpPr txBox="1"/>
+          <p:nvPr/>
+        </p:nvSpPr>
+        <p:spPr>
+          <a:xfrm>
+            <a:off x="731520" y="3438144"/>
+            <a:ext cx="438912" cy="438912"/>
+          </a:xfrm>
+          <a:prstGeom prst="roundRect">
+            <a:avLst>
+              <a:gd name="adj" fmla="val 16667"/>
+            </a:avLst>
+          </a:prstGeom>
+          <a:solidFill>
+            <a:srgbClr val="2E4A62"/>
+          </a:solidFill>
+          <a:ln>
+            <a:solidFill>
+              <a:srgbClr val="2E4A62"/>
+            </a:solidFill>
+          </a:ln>
+        </p:spPr>
+        <p:txBody>
+          <a:bodyPr wrap="square" lIns="0" tIns="0" rIns="0" bIns="0" rtlCol="0" anchor="ctr"/>
+          <a:lstStyle/>
+          <a:p>
+            <a:pPr algn="ctr" indent="0" marL="0">
+              <a:buNone/>
+            </a:pPr>
+            <a:r>
+              <a:rPr lang="en-US" sz="1600" b="1" dirty="0">
+                <a:solidFill>
+                  <a:srgbClr val="FFFFFF"/>
+                </a:solidFill>
+                <a:latin typeface="Calibri" pitchFamily="34" charset="0"/>
+                <a:ea typeface="Calibri" pitchFamily="34" charset="-122"/>
+                <a:cs typeface="Calibri" pitchFamily="34" charset="-120"/>
+              </a:rPr>
+              <a:t>A</a:t>
+            </a:r>
+            <a:endParaRPr lang="en-US" sz="1600" dirty="0"/>
+          </a:p>
+        </p:txBody>
+      </p:sp>
+      <p:sp>
+        <p:nvSpPr>
+          <p:cNvPr id="6" name="Text 4"/>
+          <p:cNvSpPr txBox="1"/>
+          <p:nvPr/>
+        </p:nvSpPr>
+        <p:spPr>
+          <a:xfrm>
+            <a:off x="1371600" y="2971800"/>
+            <a:ext cx="4427068" cy="1371600"/>
+          </a:xfrm>
+          <a:prstGeom prst="rect">
+            <a:avLst/>
+          </a:prstGeom>
+          <a:noFill/>
+          <a:ln/>
+        </p:spPr>
+        <p:txBody>
+          <a:bodyPr wrap="square" lIns="0" tIns="0" rIns="0" bIns="0" rtlCol="0" anchor="ctr"/>
+          <a:lstStyle/>
+          <a:p>
+            <a:pPr indent="0" marL="0">
+              <a:buNone/>
+            </a:pPr>
+            <a:r>
+              <a:rPr lang="en-US" sz="1900" dirty="0">
+                <a:solidFill>
+                  <a:srgbClr val="1B2530"/>
+                </a:solidFill>
+                <a:latin typeface="Calibri" pitchFamily="34" charset="0"/>
+                <a:ea typeface="Calibri" pitchFamily="34" charset="-122"/>
+                <a:cs typeface="Calibri" pitchFamily="34" charset="-120"/>
+              </a:rPr>
+              <a:t>python3 -m prg32 esp32c6 upload</a:t>
+            </a:r>
+            <a:endParaRPr lang="en-US" sz="1900" dirty="0"/>
+          </a:p>
+        </p:txBody>
+      </p:sp>
+      <p:sp>
+        <p:nvSpPr>
+          <p:cNvPr id="7" name="Shape 5"/>
+          <p:cNvSpPr/>
+          <p:nvPr/>
+        </p:nvSpPr>
+        <p:spPr>
+          <a:xfrm>
+            <a:off x="6210148" y="2880360"/>
+            <a:ext cx="5432908" cy="1554480"/>
+          </a:xfrm>
+          <a:prstGeom prst="roundRect">
+            <a:avLst>
+              <a:gd name="adj" fmla="val 4706"/>
+            </a:avLst>
+          </a:prstGeom>
+          <a:solidFill>
+            <a:srgbClr val="EEF2F4"/>
+          </a:solidFill>
+          <a:ln w="12700">
+            <a:solidFill>
+              <a:srgbClr val="EEF2F4"/>
+            </a:solidFill>
+            <a:prstDash val="solid"/>
+          </a:ln>
+        </p:spPr>
+      </p:sp>
+      <p:sp>
+        <p:nvSpPr>
+          <p:cNvPr id="8" name="Text 6"/>
+          <p:cNvSpPr txBox="1"/>
+          <p:nvPr/>
+        </p:nvSpPr>
+        <p:spPr>
+          <a:xfrm>
+            <a:off x="6393028" y="3438144"/>
+            <a:ext cx="438912" cy="438912"/>
+          </a:xfrm>
+          <a:prstGeom prst="roundRect">
+            <a:avLst>
+              <a:gd name="adj" fmla="val 16667"/>
+            </a:avLst>
+          </a:prstGeom>
+          <a:solidFill>
+            <a:srgbClr val="2E4A62"/>
+          </a:solidFill>
+          <a:ln>
+            <a:solidFill>
+              <a:srgbClr val="2E4A62"/>
+            </a:solidFill>
+          </a:ln>
+        </p:spPr>
+        <p:txBody>
+          <a:bodyPr wrap="square" lIns="0" tIns="0" rIns="0" bIns="0" rtlCol="0" anchor="ctr"/>
+          <a:lstStyle/>
+          <a:p>
+            <a:pPr algn="ctr" indent="0" marL="0">
+              <a:buNone/>
+            </a:pPr>
+            <a:r>
+              <a:rPr lang="en-US" sz="1600" b="1" dirty="0">
+                <a:solidFill>
+                  <a:srgbClr val="FFFFFF"/>
+                </a:solidFill>
+                <a:latin typeface="Calibri" pitchFamily="34" charset="0"/>
+                <a:ea typeface="Calibri" pitchFamily="34" charset="-122"/>
+                <a:cs typeface="Calibri" pitchFamily="34" charset="-120"/>
+              </a:rPr>
+              <a:t>B</a:t>
+            </a:r>
+            <a:endParaRPr lang="en-US" sz="1600" dirty="0"/>
+          </a:p>
+        </p:txBody>
+      </p:sp>
+      <p:sp>
+        <p:nvSpPr>
+          <p:cNvPr id="9" name="Text 7"/>
+          <p:cNvSpPr txBox="1"/>
+          <p:nvPr/>
+        </p:nvSpPr>
+        <p:spPr>
+          <a:xfrm>
+            <a:off x="7033108" y="2971800"/>
+            <a:ext cx="4427068" cy="1371600"/>
+          </a:xfrm>
+          <a:prstGeom prst="rect">
+            <a:avLst/>
+          </a:prstGeom>
+          <a:noFill/>
+          <a:ln/>
+        </p:spPr>
+        <p:txBody>
+          <a:bodyPr wrap="square" lIns="0" tIns="0" rIns="0" bIns="0" rtlCol="0" anchor="ctr"/>
+          <a:lstStyle/>
+          <a:p>
+            <a:pPr indent="0" marL="0">
+              <a:buNone/>
+            </a:pPr>
+            <a:r>
+              <a:rPr lang="en-US" sz="1900" dirty="0">
+                <a:solidFill>
+                  <a:srgbClr val="1B2530"/>
+                </a:solidFill>
+                <a:latin typeface="Calibri" pitchFamily="34" charset="0"/>
+                <a:ea typeface="Calibri" pitchFamily="34" charset="-122"/>
+                <a:cs typeface="Calibri" pitchFamily="34" charset="-120"/>
+              </a:rPr>
+              <a:t>python3 -m prg32 qemu upload</a:t>
+            </a:r>
+            <a:endParaRPr lang="en-US" sz="1900" dirty="0"/>
+          </a:p>
+        </p:txBody>
+      </p:sp>
+      <p:sp>
+        <p:nvSpPr>
+          <p:cNvPr id="10" name="Shape 8"/>
+          <p:cNvSpPr/>
+          <p:nvPr/>
+        </p:nvSpPr>
+        <p:spPr>
+          <a:xfrm>
+            <a:off x="548640" y="4663440"/>
+            <a:ext cx="5432908" cy="1554480"/>
+          </a:xfrm>
+          <a:prstGeom prst="roundRect">
+            <a:avLst>
+              <a:gd name="adj" fmla="val 4706"/>
+            </a:avLst>
+          </a:prstGeom>
+          <a:solidFill>
+            <a:srgbClr val="EEF2F4"/>
+          </a:solidFill>
+          <a:ln w="12700">
+            <a:solidFill>
+              <a:srgbClr val="EEF2F4"/>
+            </a:solidFill>
+            <a:prstDash val="solid"/>
+          </a:ln>
+        </p:spPr>
+      </p:sp>
+      <p:sp>
+        <p:nvSpPr>
+          <p:cNvPr id="11" name="Text 9"/>
+          <p:cNvSpPr txBox="1"/>
+          <p:nvPr/>
+        </p:nvSpPr>
+        <p:spPr>
+          <a:xfrm>
+            <a:off x="731520" y="5221224"/>
+            <a:ext cx="438912" cy="438912"/>
+          </a:xfrm>
+          <a:prstGeom prst="roundRect">
+            <a:avLst>
+              <a:gd name="adj" fmla="val 16667"/>
+            </a:avLst>
+          </a:prstGeom>
+          <a:solidFill>
+            <a:srgbClr val="2E4A62"/>
+          </a:solidFill>
+          <a:ln>
+            <a:solidFill>
+              <a:srgbClr val="2E4A62"/>
+            </a:solidFill>
+          </a:ln>
+        </p:spPr>
+        <p:txBody>
+          <a:bodyPr wrap="square" lIns="0" tIns="0" rIns="0" bIns="0" rtlCol="0" anchor="ctr"/>
+          <a:lstStyle/>
+          <a:p>
+            <a:pPr algn="ctr" indent="0" marL="0">
+              <a:buNone/>
+            </a:pPr>
+            <a:r>
+              <a:rPr lang="en-US" sz="1600" b="1" dirty="0">
+                <a:solidFill>
+                  <a:srgbClr val="FFFFFF"/>
+                </a:solidFill>
+                <a:latin typeface="Calibri" pitchFamily="34" charset="0"/>
+                <a:ea typeface="Calibri" pitchFamily="34" charset="-122"/>
+                <a:cs typeface="Calibri" pitchFamily="34" charset="-120"/>
+              </a:rPr>
+              <a:t>C</a:t>
+            </a:r>
+            <a:endParaRPr lang="en-US" sz="1600" dirty="0"/>
+          </a:p>
+        </p:txBody>
+      </p:sp>
+      <p:sp>
+        <p:nvSpPr>
+          <p:cNvPr id="12" name="Text 10"/>
+          <p:cNvSpPr txBox="1"/>
+          <p:nvPr/>
+        </p:nvSpPr>
+        <p:spPr>
+          <a:xfrm>
+            <a:off x="1371600" y="4754880"/>
+            <a:ext cx="4427068" cy="1371600"/>
+          </a:xfrm>
+          <a:prstGeom prst="rect">
+            <a:avLst/>
+          </a:prstGeom>
+          <a:noFill/>
+          <a:ln/>
+        </p:spPr>
+        <p:txBody>
+          <a:bodyPr wrap="square" lIns="0" tIns="0" rIns="0" bIns="0" rtlCol="0" anchor="ctr"/>
+          <a:lstStyle/>
+          <a:p>
+            <a:pPr indent="0" marL="0">
+              <a:buNone/>
+            </a:pPr>
+            <a:r>
+              <a:rPr lang="en-US" sz="1900" dirty="0">
+                <a:solidFill>
+                  <a:srgbClr val="1B2530"/>
+                </a:solidFill>
+                <a:latin typeface="Calibri" pitchFamily="34" charset="0"/>
+                <a:ea typeface="Calibri" pitchFamily="34" charset="-122"/>
+                <a:cs typeface="Calibri" pitchFamily="34" charset="-120"/>
+              </a:rPr>
+              <a:t>python3 -m prg32 qemu build</a:t>
+            </a:r>
+            <a:endParaRPr lang="en-US" sz="1900" dirty="0"/>
+          </a:p>
+        </p:txBody>
+      </p:sp>
+      <p:sp>
+        <p:nvSpPr>
+          <p:cNvPr id="13" name="Shape 11"/>
+          <p:cNvSpPr/>
+          <p:nvPr/>
+        </p:nvSpPr>
+        <p:spPr>
+          <a:xfrm>
+            <a:off x="6210148" y="4663440"/>
+            <a:ext cx="5432908" cy="1554480"/>
+          </a:xfrm>
+          <a:prstGeom prst="roundRect">
+            <a:avLst>
+              <a:gd name="adj" fmla="val 4706"/>
+            </a:avLst>
+          </a:prstGeom>
+          <a:solidFill>
+            <a:srgbClr val="EEF2F4"/>
+          </a:solidFill>
+          <a:ln w="12700">
+            <a:solidFill>
+              <a:srgbClr val="EEF2F4"/>
+            </a:solidFill>
+            <a:prstDash val="solid"/>
+          </a:ln>
+        </p:spPr>
+      </p:sp>
+      <p:sp>
+        <p:nvSpPr>
+          <p:cNvPr id="14" name="Text 12"/>
+          <p:cNvSpPr txBox="1"/>
+          <p:nvPr/>
+        </p:nvSpPr>
+        <p:spPr>
+          <a:xfrm>
+            <a:off x="6393028" y="5221224"/>
+            <a:ext cx="438912" cy="438912"/>
+          </a:xfrm>
+          <a:prstGeom prst="roundRect">
+            <a:avLst>
+              <a:gd name="adj" fmla="val 16667"/>
+            </a:avLst>
+          </a:prstGeom>
+          <a:solidFill>
+            <a:srgbClr val="2E4A62"/>
+          </a:solidFill>
+          <a:ln>
+            <a:solidFill>
+              <a:srgbClr val="2E4A62"/>
+            </a:solidFill>
+          </a:ln>
+        </p:spPr>
+        <p:txBody>
+          <a:bodyPr wrap="square" lIns="0" tIns="0" rIns="0" bIns="0" rtlCol="0" anchor="ctr"/>
+          <a:lstStyle/>
+          <a:p>
+            <a:pPr algn="ctr" indent="0" marL="0">
+              <a:buNone/>
+            </a:pPr>
+            <a:r>
+              <a:rPr lang="en-US" sz="1600" b="1" dirty="0">
+                <a:solidFill>
+                  <a:srgbClr val="FFFFFF"/>
+                </a:solidFill>
+                <a:latin typeface="Calibri" pitchFamily="34" charset="0"/>
+                <a:ea typeface="Calibri" pitchFamily="34" charset="-122"/>
+                <a:cs typeface="Calibri" pitchFamily="34" charset="-120"/>
+              </a:rPr>
+              <a:t>D</a:t>
+            </a:r>
+            <a:endParaRPr lang="en-US" sz="1600" dirty="0"/>
+          </a:p>
+        </p:txBody>
+      </p:sp>
+      <p:sp>
+        <p:nvSpPr>
+          <p:cNvPr id="15" name="Text 13"/>
+          <p:cNvSpPr txBox="1"/>
+          <p:nvPr/>
+        </p:nvSpPr>
+        <p:spPr>
+          <a:xfrm>
+            <a:off x="7033108" y="4754880"/>
+            <a:ext cx="4427068" cy="1371600"/>
+          </a:xfrm>
+          <a:prstGeom prst="rect">
+            <a:avLst/>
+          </a:prstGeom>
+          <a:noFill/>
+          <a:ln/>
+        </p:spPr>
+        <p:txBody>
+          <a:bodyPr wrap="square" lIns="0" tIns="0" rIns="0" bIns="0" rtlCol="0" anchor="ctr"/>
+          <a:lstStyle/>
+          <a:p>
+            <a:pPr indent="0" marL="0">
+              <a:buNone/>
+            </a:pPr>
+            <a:r>
+              <a:rPr lang="en-US" sz="1900" dirty="0">
+                <a:solidFill>
+                  <a:srgbClr val="1B2530"/>
+                </a:solidFill>
+                <a:latin typeface="Calibri" pitchFamily="34" charset="0"/>
+                <a:ea typeface="Calibri" pitchFamily="34" charset="-122"/>
+                <a:cs typeface="Calibri" pitchFamily="34" charset="-120"/>
+              </a:rPr>
+              <a:t>idf.py flash</a:t>
+            </a:r>
+            <a:endParaRPr lang="en-US" sz="1900" dirty="0"/>
+          </a:p>
+        </p:txBody>
+      </p:sp>
+      <p:sp>
+        <p:nvSpPr>
+          <p:cNvPr id="25" name="Slide Number Placeholder 0"/>
+          <p:cNvSpPr>
+            <a:spLocks noGrp="1"/>
+          </p:cNvSpPr>
+          <p:nvPr>
+            <p:ph type="sldNum" sz="quarter" idx="4294967295"/>
+          </p:nvPr>
+        </p:nvSpPr>
+        <p:spPr>
+          <a:xfrm>
+            <a:off x="11002975" y="6419088"/>
+            <a:ext cx="640080" cy="274320"/>
+          </a:xfrm>
+          <a:prstGeom prst="rect">
+            <a:avLst/>
+          </a:prstGeom>
+          <a:extLst>
+            <a:ext uri="{C572A759-6A51-4108-AA02-DFA0A04FC94B}">
+              <ma14:wrappingTextBoxFlag xmlns:ma14="http://schemas.microsoft.com/office/mac/drawingml/2011/main" val="0"/>
+            </a:ext>
+          </a:extLst>
+        </p:spPr>
+        <p:txBody>
+          <a:bodyPr/>
+          <a:lstStyle>
+            <a:lvl1pPr>
+              <a:defRPr sz="1000">
+                <a:solidFill>
+                  <a:srgbClr val="5B6B78"/>
+                </a:solidFill>
+                <a:latin typeface="Calibri"/>
+                <a:ea typeface="Calibri"/>
+                <a:cs typeface="Calibri"/>
+              </a:defRPr>
+            </a:lvl1pPr>
+          </a:lstStyle>
+          <a:p>
+            <a:pPr algn="r"/>
+            <a:fld id="{F7021451-1387-4CA6-816F-3879F97B5CBC}" type="slidenum">
+              <a:rPr b="0" lang="en-US"/>
+              <a:t>32</a:t>
+            </a:fld>
+            <a:endParaRPr lang="en-US"/>
+          </a:p>
+        </p:txBody>
+      </p:sp>
+    </p:spTree>
+  </p:cSld>
+  <p:clrMapOvr>
+    <a:masterClrMapping/>
+  </p:clrMapOvr>
+</p:sld>
+</file>
+
+<file path=ppt/slides/slide33.xml><?xml version="1.0" encoding="utf-8"?>
+<p:sld xmlns:a="http://schemas.openxmlformats.org/drawingml/2006/main" xmlns:r="http://schemas.openxmlformats.org/officeDocument/2006/relationships" xmlns:p="http://schemas.openxmlformats.org/presentationml/2006/main">
+  <p:cSld name="Slide 33">
+    <p:spTree>
+      <p:nvGrpSpPr>
+        <p:cNvPr id="1" name=""/>
+        <p:cNvGrpSpPr/>
+        <p:nvPr/>
+      </p:nvGrpSpPr>
+      <p:grpSpPr>
+        <a:xfrm>
+          <a:off x="0" y="0"/>
+          <a:ext cx="0" cy="0"/>
+          <a:chOff x="0" y="0"/>
+          <a:chExt cx="0" cy="0"/>
+        </a:xfrm>
+      </p:grpSpPr>
+      <p:sp>
+        <p:nvSpPr>
+          <p:cNvPr id="2" name="Text 1"/>
+          <p:cNvSpPr/>
+          <p:nvPr>
+            <p:ph idx="101" type="title" hasCustomPrompt="1"/>
+          </p:nvPr>
+        </p:nvSpPr>
+        <p:spPr>
+          <a:xfrm>
+            <a:off x="548640" y="384048"/>
+            <a:ext cx="11094415" cy="868680"/>
+          </a:xfrm>
+          <a:prstGeom prst="rect">
+            <a:avLst/>
+          </a:prstGeom>
+          <a:noFill/>
+          <a:ln/>
+        </p:spPr>
+        <p:txBody>
+          <a:bodyPr wrap="square" lIns="0" tIns="0" rIns="0" bIns="0" rtlCol="0" anchor="ctr"/>
+          <a:lstStyle/>
+          <a:p>
+            <a:pPr algn="l" indent="0" marL="0">
+              <a:buNone/>
+            </a:pPr>
+            <a:r>
+              <a:rPr lang="en-US" sz="3000" b="1" dirty="0">
+                <a:solidFill>
+                  <a:srgbClr val="2E4A62"/>
+                </a:solidFill>
+                <a:latin typeface="Cambria" pitchFamily="34" charset="0"/>
+                <a:ea typeface="Cambria" pitchFamily="34" charset="-122"/>
+                <a:cs typeface="Cambria" pitchFamily="34" charset="-120"/>
+              </a:rPr>
+              <a:t>Checkpoint</a:t>
+            </a:r>
+            <a:endParaRPr lang="en-US" sz="3000" dirty="0"/>
+          </a:p>
+        </p:txBody>
+      </p:sp>
+      <p:sp>
+        <p:nvSpPr>
+          <p:cNvPr id="3" name="Text 1"/>
+          <p:cNvSpPr txBox="1"/>
+          <p:nvPr/>
+        </p:nvSpPr>
+        <p:spPr>
+          <a:xfrm>
+            <a:off x="548640" y="1481328"/>
+            <a:ext cx="457200" cy="457200"/>
+          </a:xfrm>
+          <a:prstGeom prst="roundRect">
+            <a:avLst>
+              <a:gd name="adj" fmla="val 16000"/>
+            </a:avLst>
+          </a:prstGeom>
+          <a:solidFill>
+            <a:srgbClr val="2F7D4F"/>
+          </a:solidFill>
+          <a:ln>
+            <a:solidFill>
+              <a:srgbClr val="2F7D4F"/>
+            </a:solidFill>
+          </a:ln>
+        </p:spPr>
+        <p:txBody>
+          <a:bodyPr wrap="square" lIns="0" tIns="0" rIns="0" bIns="0" rtlCol="0" anchor="ctr"/>
+          <a:lstStyle/>
+          <a:p>
+            <a:pPr algn="ctr" indent="0" marL="0">
+              <a:buNone/>
+            </a:pPr>
+            <a:r>
+              <a:rPr lang="en-US" sz="1700" b="1" dirty="0">
+                <a:solidFill>
+                  <a:srgbClr val="FFFFFF"/>
+                </a:solidFill>
+                <a:latin typeface="Calibri" pitchFamily="34" charset="0"/>
+                <a:ea typeface="Calibri" pitchFamily="34" charset="-122"/>
+                <a:cs typeface="Calibri" pitchFamily="34" charset="-120"/>
+              </a:rPr>
+              <a:t>1</a:t>
+            </a:r>
+            <a:endParaRPr lang="en-US" sz="1700" dirty="0"/>
+          </a:p>
+        </p:txBody>
+      </p:sp>
+      <p:sp>
+        <p:nvSpPr>
+          <p:cNvPr id="4" name="Text 2"/>
+          <p:cNvSpPr txBox="1"/>
+          <p:nvPr/>
+        </p:nvSpPr>
+        <p:spPr>
+          <a:xfrm>
+            <a:off x="1280160" y="1463040"/>
+            <a:ext cx="10362895" cy="493776"/>
+          </a:xfrm>
+          <a:prstGeom prst="rect">
+            <a:avLst/>
+          </a:prstGeom>
+          <a:noFill/>
+          <a:ln/>
+        </p:spPr>
+        <p:txBody>
+          <a:bodyPr wrap="square" lIns="0" tIns="0" rIns="0" bIns="0" rtlCol="0" anchor="ctr"/>
+          <a:lstStyle/>
+          <a:p>
+            <a:pPr indent="0" marL="0">
+              <a:buNone/>
+            </a:pPr>
+            <a:r>
+              <a:rPr lang="en-US" sz="2200" dirty="0">
+                <a:solidFill>
+                  <a:srgbClr val="1B2530"/>
+                </a:solidFill>
+                <a:latin typeface="Calibri" pitchFamily="34" charset="0"/>
+                <a:ea typeface="Calibri" pitchFamily="34" charset="-122"/>
+                <a:cs typeface="Calibri" pitchFamily="34" charset="-120"/>
+              </a:rPr>
+              <a:t>prg32 doctor passes in an ESP-IDF shell</a:t>
+            </a:r>
+            <a:endParaRPr lang="en-US" sz="2200" dirty="0"/>
+          </a:p>
+        </p:txBody>
+      </p:sp>
+      <p:sp>
+        <p:nvSpPr>
+          <p:cNvPr id="5" name="Text 3"/>
+          <p:cNvSpPr txBox="1"/>
+          <p:nvPr/>
+        </p:nvSpPr>
+        <p:spPr>
+          <a:xfrm>
+            <a:off x="548640" y="2465222"/>
+            <a:ext cx="457200" cy="457200"/>
+          </a:xfrm>
+          <a:prstGeom prst="roundRect">
+            <a:avLst>
+              <a:gd name="adj" fmla="val 16000"/>
+            </a:avLst>
+          </a:prstGeom>
+          <a:solidFill>
+            <a:srgbClr val="2F7D4F"/>
+          </a:solidFill>
+          <a:ln>
+            <a:solidFill>
+              <a:srgbClr val="2F7D4F"/>
+            </a:solidFill>
+          </a:ln>
+        </p:spPr>
+        <p:txBody>
+          <a:bodyPr wrap="square" lIns="0" tIns="0" rIns="0" bIns="0" rtlCol="0" anchor="ctr"/>
+          <a:lstStyle/>
+          <a:p>
+            <a:pPr algn="ctr" indent="0" marL="0">
+              <a:buNone/>
+            </a:pPr>
+            <a:r>
+              <a:rPr lang="en-US" sz="1700" b="1" dirty="0">
+                <a:solidFill>
+                  <a:srgbClr val="FFFFFF"/>
+                </a:solidFill>
+                <a:latin typeface="Calibri" pitchFamily="34" charset="0"/>
+                <a:ea typeface="Calibri" pitchFamily="34" charset="-122"/>
+                <a:cs typeface="Calibri" pitchFamily="34" charset="-120"/>
+              </a:rPr>
+              <a:t>2</a:t>
+            </a:r>
+            <a:endParaRPr lang="en-US" sz="1700" dirty="0"/>
+          </a:p>
+        </p:txBody>
+      </p:sp>
+      <p:sp>
+        <p:nvSpPr>
+          <p:cNvPr id="6" name="Text 4"/>
+          <p:cNvSpPr txBox="1"/>
+          <p:nvPr/>
+        </p:nvSpPr>
+        <p:spPr>
+          <a:xfrm>
+            <a:off x="1280160" y="2446934"/>
+            <a:ext cx="10362895" cy="493776"/>
+          </a:xfrm>
+          <a:prstGeom prst="rect">
+            <a:avLst/>
+          </a:prstGeom>
+          <a:noFill/>
+          <a:ln/>
+        </p:spPr>
+        <p:txBody>
+          <a:bodyPr wrap="square" lIns="0" tIns="0" rIns="0" bIns="0" rtlCol="0" anchor="ctr"/>
+          <a:lstStyle/>
+          <a:p>
+            <a:pPr indent="0" marL="0">
+              <a:buNone/>
+            </a:pPr>
+            <a:r>
+              <a:rPr lang="en-US" sz="2200" dirty="0">
+                <a:solidFill>
+                  <a:srgbClr val="1B2530"/>
+                </a:solidFill>
+                <a:latin typeface="Calibri" pitchFamily="34" charset="0"/>
+                <a:ea typeface="Calibri" pitchFamily="34" charset="-122"/>
+                <a:cs typeface="Calibri" pitchFamily="34" charset="-120"/>
+              </a:rPr>
+              <a:t>You can say which chip and directory each target uses</a:t>
+            </a:r>
+            <a:endParaRPr lang="en-US" sz="2200" dirty="0"/>
+          </a:p>
+        </p:txBody>
+      </p:sp>
+      <p:sp>
+        <p:nvSpPr>
+          <p:cNvPr id="7" name="Text 5"/>
+          <p:cNvSpPr txBox="1"/>
+          <p:nvPr/>
+        </p:nvSpPr>
+        <p:spPr>
+          <a:xfrm>
+            <a:off x="548640" y="3449117"/>
+            <a:ext cx="457200" cy="457200"/>
+          </a:xfrm>
+          <a:prstGeom prst="roundRect">
+            <a:avLst>
+              <a:gd name="adj" fmla="val 16000"/>
+            </a:avLst>
+          </a:prstGeom>
+          <a:solidFill>
+            <a:srgbClr val="2F7D4F"/>
+          </a:solidFill>
+          <a:ln>
+            <a:solidFill>
+              <a:srgbClr val="2F7D4F"/>
+            </a:solidFill>
+          </a:ln>
+        </p:spPr>
+        <p:txBody>
+          <a:bodyPr wrap="square" lIns="0" tIns="0" rIns="0" bIns="0" rtlCol="0" anchor="ctr"/>
+          <a:lstStyle/>
+          <a:p>
+            <a:pPr algn="ctr" indent="0" marL="0">
+              <a:buNone/>
+            </a:pPr>
+            <a:r>
+              <a:rPr lang="en-US" sz="1700" b="1" dirty="0">
+                <a:solidFill>
+                  <a:srgbClr val="FFFFFF"/>
+                </a:solidFill>
+                <a:latin typeface="Calibri" pitchFamily="34" charset="0"/>
+                <a:ea typeface="Calibri" pitchFamily="34" charset="-122"/>
+                <a:cs typeface="Calibri" pitchFamily="34" charset="-120"/>
+              </a:rPr>
+              <a:t>3</a:t>
+            </a:r>
+            <a:endParaRPr lang="en-US" sz="1700" dirty="0"/>
+          </a:p>
+        </p:txBody>
+      </p:sp>
+      <p:sp>
+        <p:nvSpPr>
+          <p:cNvPr id="8" name="Text 6"/>
+          <p:cNvSpPr txBox="1"/>
+          <p:nvPr/>
+        </p:nvSpPr>
+        <p:spPr>
+          <a:xfrm>
+            <a:off x="1280160" y="3430829"/>
+            <a:ext cx="10362895" cy="493776"/>
+          </a:xfrm>
+          <a:prstGeom prst="rect">
+            <a:avLst/>
+          </a:prstGeom>
+          <a:noFill/>
+          <a:ln/>
+        </p:spPr>
+        <p:txBody>
+          <a:bodyPr wrap="square" lIns="0" tIns="0" rIns="0" bIns="0" rtlCol="0" anchor="ctr"/>
+          <a:lstStyle/>
+          <a:p>
+            <a:pPr indent="0" marL="0">
+              <a:buNone/>
+            </a:pPr>
+            <a:r>
+              <a:rPr lang="en-US" sz="2200" dirty="0">
+                <a:solidFill>
+                  <a:srgbClr val="1B2530"/>
+                </a:solidFill>
+                <a:latin typeface="Calibri" pitchFamily="34" charset="0"/>
+                <a:ea typeface="Calibri" pitchFamily="34" charset="-122"/>
+                <a:cs typeface="Calibri" pitchFamily="34" charset="-120"/>
+              </a:rPr>
+              <a:t>You can read every option of cartridge build</a:t>
+            </a:r>
+            <a:endParaRPr lang="en-US" sz="2200" dirty="0"/>
+          </a:p>
+        </p:txBody>
+      </p:sp>
+      <p:sp>
+        <p:nvSpPr>
+          <p:cNvPr id="9" name="Text 7"/>
+          <p:cNvSpPr txBox="1"/>
+          <p:nvPr/>
+        </p:nvSpPr>
+        <p:spPr>
+          <a:xfrm>
+            <a:off x="548640" y="4433011"/>
+            <a:ext cx="457200" cy="457200"/>
+          </a:xfrm>
+          <a:prstGeom prst="roundRect">
+            <a:avLst>
+              <a:gd name="adj" fmla="val 16000"/>
+            </a:avLst>
+          </a:prstGeom>
+          <a:solidFill>
+            <a:srgbClr val="2F7D4F"/>
+          </a:solidFill>
+          <a:ln>
+            <a:solidFill>
+              <a:srgbClr val="2F7D4F"/>
+            </a:solidFill>
+          </a:ln>
+        </p:spPr>
+        <p:txBody>
+          <a:bodyPr wrap="square" lIns="0" tIns="0" rIns="0" bIns="0" rtlCol="0" anchor="ctr"/>
+          <a:lstStyle/>
+          <a:p>
+            <a:pPr algn="ctr" indent="0" marL="0">
+              <a:buNone/>
+            </a:pPr>
+            <a:r>
+              <a:rPr lang="en-US" sz="1700" b="1" dirty="0">
+                <a:solidFill>
+                  <a:srgbClr val="FFFFFF"/>
+                </a:solidFill>
+                <a:latin typeface="Calibri" pitchFamily="34" charset="0"/>
+                <a:ea typeface="Calibri" pitchFamily="34" charset="-122"/>
+                <a:cs typeface="Calibri" pitchFamily="34" charset="-120"/>
+              </a:rPr>
+              <a:t>4</a:t>
+            </a:r>
+            <a:endParaRPr lang="en-US" sz="1700" dirty="0"/>
+          </a:p>
+        </p:txBody>
+      </p:sp>
+      <p:sp>
+        <p:nvSpPr>
+          <p:cNvPr id="10" name="Text 8"/>
+          <p:cNvSpPr txBox="1"/>
+          <p:nvPr/>
+        </p:nvSpPr>
+        <p:spPr>
+          <a:xfrm>
+            <a:off x="1280160" y="4414723"/>
+            <a:ext cx="10362895" cy="493776"/>
+          </a:xfrm>
+          <a:prstGeom prst="rect">
+            <a:avLst/>
+          </a:prstGeom>
+          <a:noFill/>
+          <a:ln/>
+        </p:spPr>
+        <p:txBody>
+          <a:bodyPr wrap="square" lIns="0" tIns="0" rIns="0" bIns="0" rtlCol="0" anchor="ctr"/>
+          <a:lstStyle/>
+          <a:p>
+            <a:pPr indent="0" marL="0">
+              <a:buNone/>
+            </a:pPr>
+            <a:r>
+              <a:rPr lang="en-US" sz="2200" dirty="0">
+                <a:solidFill>
+                  <a:srgbClr val="1B2530"/>
+                </a:solidFill>
+                <a:latin typeface="Calibri" pitchFamily="34" charset="0"/>
+                <a:ea typeface="Calibri" pitchFamily="34" charset="-122"/>
+                <a:cs typeface="Calibri" pitchFamily="34" charset="-120"/>
+              </a:rPr>
+              <a:t>You know where QEMU reads the keyboard</a:t>
+            </a:r>
+            <a:endParaRPr lang="en-US" sz="2200" dirty="0"/>
+          </a:p>
+        </p:txBody>
+      </p:sp>
+      <p:sp>
+        <p:nvSpPr>
+          <p:cNvPr id="11" name="Text 9"/>
+          <p:cNvSpPr txBox="1"/>
+          <p:nvPr/>
+        </p:nvSpPr>
+        <p:spPr>
+          <a:xfrm>
+            <a:off x="548640" y="5416906"/>
+            <a:ext cx="457200" cy="457200"/>
+          </a:xfrm>
+          <a:prstGeom prst="roundRect">
+            <a:avLst>
+              <a:gd name="adj" fmla="val 16000"/>
+            </a:avLst>
+          </a:prstGeom>
+          <a:solidFill>
+            <a:srgbClr val="2F7D4F"/>
+          </a:solidFill>
+          <a:ln>
+            <a:solidFill>
+              <a:srgbClr val="2F7D4F"/>
+            </a:solidFill>
+          </a:ln>
+        </p:spPr>
+        <p:txBody>
+          <a:bodyPr wrap="square" lIns="0" tIns="0" rIns="0" bIns="0" rtlCol="0" anchor="ctr"/>
+          <a:lstStyle/>
+          <a:p>
+            <a:pPr algn="ctr" indent="0" marL="0">
+              <a:buNone/>
+            </a:pPr>
+            <a:r>
+              <a:rPr lang="en-US" sz="1700" b="1" dirty="0">
+                <a:solidFill>
+                  <a:srgbClr val="FFFFFF"/>
+                </a:solidFill>
+                <a:latin typeface="Calibri" pitchFamily="34" charset="0"/>
+                <a:ea typeface="Calibri" pitchFamily="34" charset="-122"/>
+                <a:cs typeface="Calibri" pitchFamily="34" charset="-120"/>
+              </a:rPr>
+              <a:t>5</a:t>
+            </a:r>
+            <a:endParaRPr lang="en-US" sz="1700" dirty="0"/>
+          </a:p>
+        </p:txBody>
+      </p:sp>
+      <p:sp>
+        <p:nvSpPr>
+          <p:cNvPr id="12" name="Text 10"/>
+          <p:cNvSpPr txBox="1"/>
+          <p:nvPr/>
+        </p:nvSpPr>
+        <p:spPr>
+          <a:xfrm>
+            <a:off x="1280160" y="5398618"/>
+            <a:ext cx="10362895" cy="493776"/>
+          </a:xfrm>
+          <a:prstGeom prst="rect">
+            <a:avLst/>
+          </a:prstGeom>
+          <a:noFill/>
+          <a:ln/>
+        </p:spPr>
+        <p:txBody>
+          <a:bodyPr wrap="square" lIns="0" tIns="0" rIns="0" bIns="0" rtlCol="0" anchor="ctr"/>
+          <a:lstStyle/>
+          <a:p>
+            <a:pPr indent="0" marL="0">
+              <a:buNone/>
+            </a:pPr>
+            <a:r>
+              <a:rPr lang="en-US" sz="2200" dirty="0">
+                <a:solidFill>
+                  <a:srgbClr val="1B2530"/>
+                </a:solidFill>
+                <a:latin typeface="Calibri" pitchFamily="34" charset="0"/>
+                <a:ea typeface="Calibri" pitchFamily="34" charset="-122"/>
+                <a:cs typeface="Calibri" pitchFamily="34" charset="-120"/>
+              </a:rPr>
+              <a:t>You can name the default cartridge RAM size</a:t>
+            </a:r>
+            <a:endParaRPr lang="en-US" sz="2200" dirty="0"/>
+          </a:p>
+        </p:txBody>
+      </p:sp>
+      <p:sp>
+        <p:nvSpPr>
+          <p:cNvPr id="25" name="Slide Number Placeholder 0"/>
+          <p:cNvSpPr>
+            <a:spLocks noGrp="1"/>
+          </p:cNvSpPr>
+          <p:nvPr>
+            <p:ph type="sldNum" sz="quarter" idx="4294967295"/>
+          </p:nvPr>
+        </p:nvSpPr>
+        <p:spPr>
+          <a:xfrm>
+            <a:off x="11002975" y="6419088"/>
+            <a:ext cx="640080" cy="274320"/>
+          </a:xfrm>
+          <a:prstGeom prst="rect">
+            <a:avLst/>
+          </a:prstGeom>
+          <a:extLst>
+            <a:ext uri="{C572A759-6A51-4108-AA02-DFA0A04FC94B}">
+              <ma14:wrappingTextBoxFlag xmlns:ma14="http://schemas.microsoft.com/office/mac/drawingml/2011/main" val="0"/>
+            </a:ext>
+          </a:extLst>
+        </p:spPr>
+        <p:txBody>
+          <a:bodyPr/>
+          <a:lstStyle>
+            <a:lvl1pPr>
+              <a:defRPr sz="1000">
+                <a:solidFill>
+                  <a:srgbClr val="5B6B78"/>
+                </a:solidFill>
+                <a:latin typeface="Calibri"/>
+                <a:ea typeface="Calibri"/>
+                <a:cs typeface="Calibri"/>
+              </a:defRPr>
+            </a:lvl1pPr>
+          </a:lstStyle>
+          <a:p>
+            <a:pPr algn="r"/>
+            <a:fld id="{F7021451-1387-4CA6-816F-3879F97B5CBC}" type="slidenum">
+              <a:rPr b="0" lang="en-US"/>
+              <a:t>33</a:t>
+            </a:fld>
+            <a:endParaRPr lang="en-US"/>
+          </a:p>
+        </p:txBody>
+      </p:sp>
+    </p:spTree>
+  </p:cSld>
+  <p:clrMapOvr>
+    <a:masterClrMapping/>
+  </p:clrMapOvr>
+</p:sld>
+</file>
+
+<file path=ppt/slides/slide34.xml><?xml version="1.0" encoding="utf-8"?>
+<p:sld xmlns:a="http://schemas.openxmlformats.org/drawingml/2006/main" xmlns:r="http://schemas.openxmlformats.org/officeDocument/2006/relationships" xmlns:p="http://schemas.openxmlformats.org/presentationml/2006/main">
+  <p:cSld name="Slide 34">
+    <p:spTree>
+      <p:nvGrpSpPr>
+        <p:cNvPr id="1" name=""/>
+        <p:cNvGrpSpPr/>
+        <p:nvPr/>
+      </p:nvGrpSpPr>
+      <p:grpSpPr>
+        <a:xfrm>
+          <a:off x="0" y="0"/>
+          <a:ext cx="0" cy="0"/>
+          <a:chOff x="0" y="0"/>
+          <a:chExt cx="0" cy="0"/>
+        </a:xfrm>
+      </p:grpSpPr>
+      <p:sp>
+        <p:nvSpPr>
+          <p:cNvPr id="2" name="Text 1"/>
+          <p:cNvSpPr/>
+          <p:nvPr>
+            <p:ph idx="101" type="title" hasCustomPrompt="1"/>
+          </p:nvPr>
+        </p:nvSpPr>
+        <p:spPr>
+          <a:xfrm>
+            <a:off x="548640" y="384048"/>
+            <a:ext cx="11094415" cy="868680"/>
+          </a:xfrm>
+          <a:prstGeom prst="rect">
+            <a:avLst/>
+          </a:prstGeom>
+          <a:noFill/>
+          <a:ln/>
+        </p:spPr>
+        <p:txBody>
+          <a:bodyPr wrap="square" lIns="0" tIns="0" rIns="0" bIns="0" rtlCol="0" anchor="ctr"/>
+          <a:lstStyle/>
+          <a:p>
+            <a:pPr algn="l" indent="0" marL="0">
+              <a:buNone/>
+            </a:pPr>
+            <a:r>
+              <a:rPr lang="en-US" sz="3000" b="1" dirty="0">
+                <a:solidFill>
+                  <a:srgbClr val="2E4A62"/>
+                </a:solidFill>
+                <a:latin typeface="Cambria" pitchFamily="34" charset="0"/>
+                <a:ea typeface="Cambria" pitchFamily="34" charset="-122"/>
+                <a:cs typeface="Cambria" pitchFamily="34" charset="-120"/>
+              </a:rPr>
+              <a:t>Next steps and reading</a:t>
+            </a:r>
+            <a:endParaRPr lang="en-US" sz="3000" dirty="0"/>
+          </a:p>
+        </p:txBody>
+      </p:sp>
+      <p:sp>
+        <p:nvSpPr>
+          <p:cNvPr id="3" name="Shape 1"/>
+          <p:cNvSpPr/>
+          <p:nvPr/>
+        </p:nvSpPr>
+        <p:spPr>
+          <a:xfrm>
+            <a:off x="548640" y="1463040"/>
+            <a:ext cx="5364328" cy="4754880"/>
+          </a:xfrm>
+          <a:prstGeom prst="roundRect">
+            <a:avLst>
+              <a:gd name="adj" fmla="val 1538"/>
+            </a:avLst>
+          </a:prstGeom>
+          <a:solidFill>
+            <a:srgbClr val="EEF2F4"/>
+          </a:solidFill>
+          <a:ln w="12700">
+            <a:solidFill>
+              <a:srgbClr val="EEF2F4"/>
+            </a:solidFill>
+            <a:prstDash val="solid"/>
+          </a:ln>
+        </p:spPr>
+      </p:sp>
+      <p:sp>
+        <p:nvSpPr>
+          <p:cNvPr id="4" name="Text 2"/>
+          <p:cNvSpPr txBox="1"/>
+          <p:nvPr/>
+        </p:nvSpPr>
+        <p:spPr>
+          <a:xfrm>
+            <a:off x="822960" y="1691640"/>
+            <a:ext cx="4815688" cy="548640"/>
+          </a:xfrm>
+          <a:prstGeom prst="roundRect">
+            <a:avLst>
+              <a:gd name="adj" fmla="val 13333"/>
+            </a:avLst>
+          </a:prstGeom>
+          <a:solidFill>
+            <a:srgbClr val="0E7C86"/>
+          </a:solidFill>
+          <a:ln>
+            <a:solidFill>
+              <a:srgbClr val="0E7C86"/>
+            </a:solidFill>
+          </a:ln>
+        </p:spPr>
+        <p:txBody>
+          <a:bodyPr wrap="square" lIns="0" tIns="0" rIns="0" bIns="0" rtlCol="0" anchor="ctr"/>
+          <a:lstStyle/>
+          <a:p>
+            <a:pPr algn="ctr" indent="0" marL="0">
+              <a:buNone/>
+            </a:pPr>
+            <a:r>
+              <a:rPr lang="en-US" sz="1900" b="1" dirty="0">
+                <a:solidFill>
+                  <a:srgbClr val="FFFFFF"/>
+                </a:solidFill>
+                <a:latin typeface="Calibri" pitchFamily="34" charset="0"/>
+                <a:ea typeface="Calibri" pitchFamily="34" charset="-122"/>
+                <a:cs typeface="Calibri" pitchFamily="34" charset="-120"/>
+              </a:rPr>
+              <a:t>Before the next session</a:t>
+            </a:r>
+            <a:endParaRPr lang="en-US" sz="1900" dirty="0"/>
+          </a:p>
+        </p:txBody>
+      </p:sp>
+      <p:sp>
+        <p:nvSpPr>
+          <p:cNvPr id="5" name="Text 3"/>
+          <p:cNvSpPr txBox="1"/>
+          <p:nvPr/>
+        </p:nvSpPr>
+        <p:spPr>
+          <a:xfrm>
+            <a:off x="868680" y="2468880"/>
+            <a:ext cx="4724248" cy="3566160"/>
+          </a:xfrm>
+          <a:prstGeom prst="rect">
+            <a:avLst/>
+          </a:prstGeom>
+          <a:noFill/>
+          <a:ln/>
+        </p:spPr>
+        <p:txBody>
+          <a:bodyPr wrap="square" lIns="0" tIns="0" rIns="0" bIns="0" rtlCol="0" anchor="t"/>
+          <a:lstStyle/>
           <a:p>
             <a:pPr marL="203200" indent="-203200">
               <a:spcAft>
@@ -20486,6 +23265,228 @@
                 <a:ea typeface="Calibri" pitchFamily="34" charset="-122"/>
                 <a:cs typeface="Calibri" pitchFamily="34" charset="-120"/>
               </a:rPr>
+              <a:t>Do the setup lab; bring your own laptop</a:t>
+            </a:r>
+            <a:endParaRPr lang="en-US" sz="2100" dirty="0"/>
+          </a:p>
+          <a:p>
+            <a:pPr marL="203200" indent="-203200">
+              <a:spcAft>
+                <a:spcPts val="800"/>
+              </a:spcAft>
+              <a:buSzPct val="100000"/>
+              <a:buChar char="•"/>
+            </a:pPr>
+            <a:r>
+              <a:rPr lang="en-US" sz="2100" dirty="0">
+                <a:solidFill>
+                  <a:srgbClr val="1B2530"/>
+                </a:solidFill>
+                <a:latin typeface="Calibri" pitchFamily="34" charset="0"/>
+                <a:ea typeface="Calibri" pitchFamily="34" charset="-122"/>
+                <a:cs typeface="Calibri" pitchFamily="34" charset="-120"/>
+              </a:rPr>
+              <a:t>Windows users: run the ESP-IDF installer before the lab</a:t>
+            </a:r>
+            <a:endParaRPr lang="en-US" sz="2100" dirty="0"/>
+          </a:p>
+          <a:p>
+            <a:pPr marL="203200" indent="-203200">
+              <a:spcAft>
+                <a:spcPts val="800"/>
+              </a:spcAft>
+              <a:buSzPct val="100000"/>
+              <a:buChar char="•"/>
+            </a:pPr>
+            <a:r>
+              <a:rPr lang="en-US" sz="2100" dirty="0">
+                <a:solidFill>
+                  <a:srgbClr val="1B2530"/>
+                </a:solidFill>
+                <a:latin typeface="Calibri" pitchFamily="34" charset="0"/>
+                <a:ea typeface="Calibri" pitchFamily="34" charset="-122"/>
+                <a:cs typeface="Calibri" pitchFamily="34" charset="-120"/>
+              </a:rPr>
+              <a:t>Read docs/usage/troubleshooting.md</a:t>
+            </a:r>
+            <a:endParaRPr lang="en-US" sz="2100" dirty="0"/>
+          </a:p>
+        </p:txBody>
+      </p:sp>
+      <p:sp>
+        <p:nvSpPr>
+          <p:cNvPr id="6" name="Shape 4"/>
+          <p:cNvSpPr/>
+          <p:nvPr/>
+        </p:nvSpPr>
+        <p:spPr>
+          <a:xfrm>
+            <a:off x="6278728" y="1463040"/>
+            <a:ext cx="5364328" cy="4754880"/>
+          </a:xfrm>
+          <a:prstGeom prst="roundRect">
+            <a:avLst>
+              <a:gd name="adj" fmla="val 1538"/>
+            </a:avLst>
+          </a:prstGeom>
+          <a:solidFill>
+            <a:srgbClr val="EEF2F4"/>
+          </a:solidFill>
+          <a:ln w="12700">
+            <a:solidFill>
+              <a:srgbClr val="EEF2F4"/>
+            </a:solidFill>
+            <a:prstDash val="solid"/>
+          </a:ln>
+        </p:spPr>
+      </p:sp>
+      <p:sp>
+        <p:nvSpPr>
+          <p:cNvPr id="7" name="Text 5"/>
+          <p:cNvSpPr txBox="1"/>
+          <p:nvPr/>
+        </p:nvSpPr>
+        <p:spPr>
+          <a:xfrm>
+            <a:off x="6553048" y="1691640"/>
+            <a:ext cx="4815688" cy="548640"/>
+          </a:xfrm>
+          <a:prstGeom prst="roundRect">
+            <a:avLst>
+              <a:gd name="adj" fmla="val 13333"/>
+            </a:avLst>
+          </a:prstGeom>
+          <a:solidFill>
+            <a:srgbClr val="C7791B"/>
+          </a:solidFill>
+          <a:ln>
+            <a:solidFill>
+              <a:srgbClr val="C7791B"/>
+            </a:solidFill>
+          </a:ln>
+        </p:spPr>
+        <p:txBody>
+          <a:bodyPr wrap="square" lIns="0" tIns="0" rIns="0" bIns="0" rtlCol="0" anchor="ctr"/>
+          <a:lstStyle/>
+          <a:p>
+            <a:pPr algn="ctr" indent="0" marL="0">
+              <a:buNone/>
+            </a:pPr>
+            <a:r>
+              <a:rPr lang="en-US" sz="1900" b="1" dirty="0">
+                <a:solidFill>
+                  <a:srgbClr val="FFFFFF"/>
+                </a:solidFill>
+                <a:latin typeface="Calibri" pitchFamily="34" charset="0"/>
+                <a:ea typeface="Calibri" pitchFamily="34" charset="-122"/>
+                <a:cs typeface="Calibri" pitchFamily="34" charset="-120"/>
+              </a:rPr>
+              <a:t>Reading and sources</a:t>
+            </a:r>
+            <a:endParaRPr lang="en-US" sz="1900" dirty="0"/>
+          </a:p>
+        </p:txBody>
+      </p:sp>
+      <p:sp>
+        <p:nvSpPr>
+          <p:cNvPr id="8" name="Text 6"/>
+          <p:cNvSpPr txBox="1"/>
+          <p:nvPr/>
+        </p:nvSpPr>
+        <p:spPr>
+          <a:xfrm>
+            <a:off x="6598768" y="2468880"/>
+            <a:ext cx="4724248" cy="3566160"/>
+          </a:xfrm>
+          <a:prstGeom prst="rect">
+            <a:avLst/>
+          </a:prstGeom>
+          <a:noFill/>
+          <a:ln/>
+        </p:spPr>
+        <p:txBody>
+          <a:bodyPr wrap="square" lIns="0" tIns="0" rIns="0" bIns="0" rtlCol="0" anchor="t"/>
+          <a:lstStyle/>
+          <a:p>
+            <a:pPr marL="203200" indent="-203200">
+              <a:spcAft>
+                <a:spcPts val="800"/>
+              </a:spcAft>
+              <a:buSzPct val="100000"/>
+              <a:buChar char="•"/>
+            </a:pPr>
+            <a:r>
+              <a:rPr lang="en-US" sz="2100" dirty="0">
+                <a:solidFill>
+                  <a:srgbClr val="1B2530"/>
+                </a:solidFill>
+                <a:latin typeface="Calibri" pitchFamily="34" charset="0"/>
+                <a:ea typeface="Calibri" pitchFamily="34" charset="-122"/>
+                <a:cs typeface="Calibri" pitchFamily="34" charset="-120"/>
+              </a:rPr>
+              <a:t>Textbook, Chapter 3</a:t>
+            </a:r>
+            <a:endParaRPr lang="en-US" sz="2100" dirty="0"/>
+          </a:p>
+          <a:p>
+            <a:pPr marL="203200" indent="-203200">
+              <a:spcAft>
+                <a:spcPts val="800"/>
+              </a:spcAft>
+              <a:buSzPct val="100000"/>
+              <a:buChar char="•"/>
+            </a:pPr>
+            <a:r>
+              <a:rPr lang="en-US" sz="2100" dirty="0">
+                <a:solidFill>
+                  <a:srgbClr val="1B2530"/>
+                </a:solidFill>
+                <a:latin typeface="Calibri" pitchFamily="34" charset="0"/>
+                <a:ea typeface="Calibri" pitchFamily="34" charset="-122"/>
+                <a:cs typeface="Calibri" pitchFamily="34" charset="-120"/>
+              </a:rPr>
+              <a:t>PRG32 README: Install and Setup</a:t>
+            </a:r>
+            <a:endParaRPr lang="en-US" sz="2100" dirty="0"/>
+          </a:p>
+          <a:p>
+            <a:pPr marL="203200" indent="-203200">
+              <a:spcAft>
+                <a:spcPts val="800"/>
+              </a:spcAft>
+              <a:buSzPct val="100000"/>
+              <a:buChar char="•"/>
+            </a:pPr>
+            <a:r>
+              <a:rPr lang="en-US" sz="2100" dirty="0">
+                <a:solidFill>
+                  <a:srgbClr val="1B2530"/>
+                </a:solidFill>
+                <a:latin typeface="Calibri" pitchFamily="34" charset="0"/>
+                <a:ea typeface="Calibri" pitchFamily="34" charset="-122"/>
+                <a:cs typeface="Calibri" pitchFamily="34" charset="-120"/>
+              </a:rPr>
+              <a:t>PRG32 docs/usage: getting_started, tooling, qemu, profiles</a:t>
+            </a:r>
+            <a:endParaRPr lang="en-US" sz="2100" dirty="0"/>
+          </a:p>
+          <a:p>
+            <a:pPr marL="203200" indent="-203200">
+              <a:spcAft>
+                <a:spcPts val="800"/>
+              </a:spcAft>
+              <a:buSzPct val="100000"/>
+              <a:buChar char="•"/>
+            </a:pPr>
+            <a:r>
+              <a:rPr lang="en-US" sz="2100" dirty="0">
+                <a:solidFill>
+                  <a:srgbClr val="1B2530"/>
+                </a:solidFill>
+                <a:latin typeface="Calibri" pitchFamily="34" charset="0"/>
+                <a:ea typeface="Calibri" pitchFamily="34" charset="-122"/>
+                <a:cs typeface="Calibri" pitchFamily="34" charset="-120"/>
+              </a:rPr>
               <a:t>Espressif ESP-IDF documentation</a:t>
             </a:r>
             <a:endParaRPr lang="en-US" sz="2100" dirty="0"/>
@@ -20534,7 +23535,7 @@
             <a:pPr algn="r"/>
             <a:fld id="{F7021451-1387-4CA6-816F-3879F97B5CBC}" type="slidenum">
               <a:rPr b="0" lang="en-US"/>
-              <a:t>31</a:t>
+              <a:t>34</a:t>
             </a:fld>
             <a:endParaRPr lang="en-US"/>
           </a:p>

--- a/presentations/03-setup/03-setup-lecture.pptx
+++ b/presentations/03-setup/03-setup-lecture.pptx
@@ -140,7 +140,7 @@
   <p:extLst>
     <p:ext uri="{521415D9-36F7-43E2-AB2F-B90AF26B5E84}">
       <p14:sectionLst xmlns:p14="http://schemas.microsoft.com/office/powerpoint/2010/main">
-        <p14:section name="Opening" id="{510ede18-7360-2764-7b11-52381c7bb68d}">
+        <p14:section name="Opening" id="{9c12a68d-f8f8-16d5-6bd0-7ec2b79b05cd}">
           <p14:sldIdLst>
             <p14:sldId id="256"/>
             <p14:sldId id="257"/>
@@ -151,7 +151,7 @@
             <p14:sldId id="262"/>
           </p14:sldIdLst>
         </p14:section>
-        <p14:section name="ESP-IDF" id="{bd736d2f-9a01-332e-3a2a-85d58721f928}">
+        <p14:section name="ESP-IDF" id="{65677f63-8d58-a038-de22-5bdb331c2d68}">
           <p14:sldIdLst>
             <p14:sldId id="263"/>
             <p14:sldId id="264"/>
@@ -160,7 +160,7 @@
             <p14:sldId id="267"/>
           </p14:sldIdLst>
         </p14:section>
-        <p14:section name="Two targets, two directories" id="{04b5ef2e-edec-bf33-15b3-07de65c41371}">
+        <p14:section name="Two targets, two directories" id="{135865ab-00b2-a1bc-4002-9f9bf078cc88}">
           <p14:sldIdLst>
             <p14:sldId id="268"/>
             <p14:sldId id="269"/>
@@ -169,7 +169,7 @@
             <p14:sldId id="272"/>
           </p14:sldIdLst>
         </p14:section>
-        <p14:section name="The prg32 tool" id="{993e13f6-1ad4-4592-169c-80501bac1369}">
+        <p14:section name="The prg32 tool" id="{b09d9b00-0dab-2f5a-5753-d311f2350f16}">
           <p14:sldIdLst>
             <p14:sldId id="273"/>
             <p14:sldId id="274"/>
@@ -181,7 +181,7 @@
             <p14:sldId id="280"/>
           </p14:sldIdLst>
         </p14:section>
-        <p14:section name="Profiles and diagnosis" id="{e81a8375-a43e-01f0-edfd-ab09b402f815}">
+        <p14:section name="Profiles and diagnosis" id="{8b5ce2de-4281-52b2-6986-5670cf235b58}">
           <p14:sldIdLst>
             <p14:sldId id="281"/>
             <p14:sldId id="282"/>
@@ -193,7 +193,7 @@
             <p14:sldId id="288"/>
           </p14:sldIdLst>
         </p14:section>
-        <p14:section name="Closing" id="{f7bad59d-5b6d-acb3-b814-51655a13cc6a}">
+        <p14:section name="Closing" id="{3fc3a325-9376-5ccb-3ffa-146b6ae9ed1a}">
           <p14:sldIdLst>
             <p14:sldId id="289"/>
           </p14:sldIdLst>
